--- a/2026-Q4/05-TheBereanMethod/Week05-TheBereanMethod.pptx
+++ b/2026-Q4/05-TheBereanMethod/Week05-TheBereanMethod.pptx
@@ -4,6 +4,9 @@
   <p:sldMasterIdLst>
     <p:sldMasterId id="2147483648" r:id="rId1"/>
   </p:sldMasterIdLst>
+  <p:notesMasterIdLst>
+    <p:notesMasterId r:id="rId9"/>
+  </p:notesMasterIdLst>
   <p:sldIdLst>
     <p:sldId id="256" r:id="rId2"/>
     <p:sldId id="257" r:id="rId3"/>
@@ -13,10 +16,7 @@
     <p:sldId id="261" r:id="rId7"/>
     <p:sldId id="262" r:id="rId8"/>
   </p:sldIdLst>
-  <p:notesMasterIdLst>
-    <p:notesMasterId r:id="rId9"/>
-  </p:notesMasterIdLst>
-  <p:sldSz cx="9144000" cy="6858000"/>
+  <p:sldSz cx="9144000" cy="6858000" type="screen4x3"/>
   <p:notesSz cx="6858000" cy="9144000"/>
   <p:defaultTextStyle>
     <a:lvl1pPr marL="0" algn="l" defTabSz="914400" rtl="0" eaLnBrk="1" latinLnBrk="0" hangingPunct="1">
@@ -110,6 +110,11 @@
       </a:defRPr>
     </a:lvl9pPr>
   </p:defaultTextStyle>
+  <p:extLst>
+    <p:ext uri="{EFAFB233-063F-42B5-8137-9DF3F51BA10A}">
+      <p15:sldGuideLst xmlns:p15="http://schemas.microsoft.com/office/powerpoint/2012/main"/>
+    </p:ext>
+  </p:extLst>
 </p:presentation>
 </file>
 
@@ -135,234 +140,10 @@
           <a:chExt cx="0" cy="0"/>
         </a:xfrm>
       </p:grpSpPr>
-      <p:sp>
-        <p:nvSpPr>
-          <p:cNvPr id="2" name="Header Placeholder 1"/>
-          <p:cNvSpPr>
-            <a:spLocks noGrp="1"/>
-          </p:cNvSpPr>
-          <p:nvPr>
-            <p:ph type="hdr" sz="quarter"/>
-          </p:nvPr>
-        </p:nvSpPr>
-        <p:spPr>
-          <a:xfrm>
-            <a:off x="0" y="0"/>
-            <a:ext cx="2971800" cy="458788"/>
-          </a:xfrm>
-          <a:prstGeom prst="rect">
-            <a:avLst/>
-          </a:prstGeom>
-        </p:spPr>
-        <p:txBody>
-          <a:bodyPr vert="horz" lIns="91440" tIns="45720" rIns="91440" bIns="45720" rtlCol="0"/>
-          <a:lstStyle>
-            <a:lvl1pPr algn="l">
-              <a:defRPr sz="1200"/>
-            </a:lvl1pPr>
-          </a:lstStyle>
-          <a:p>
-            <a:endParaRPr lang="en-US"/>
-          </a:p>
-        </p:txBody>
-      </p:sp>
-      <p:sp>
-        <p:nvSpPr>
-          <p:cNvPr id="3" name="Date Placeholder 2"/>
-          <p:cNvSpPr>
-            <a:spLocks noGrp="1"/>
-          </p:cNvSpPr>
-          <p:nvPr>
-            <p:ph type="dt" idx="1"/>
-          </p:nvPr>
-        </p:nvSpPr>
-        <p:spPr>
-          <a:xfrm>
-            <a:off x="3884613" y="0"/>
-            <a:ext cx="2971800" cy="458788"/>
-          </a:xfrm>
-          <a:prstGeom prst="rect">
-            <a:avLst/>
-          </a:prstGeom>
-        </p:spPr>
-        <p:txBody>
-          <a:bodyPr vert="horz" lIns="91440" tIns="45720" rIns="91440" bIns="45720" rtlCol="0"/>
-          <a:lstStyle>
-            <a:lvl1pPr algn="r">
-              <a:defRPr sz="1200"/>
-            </a:lvl1pPr>
-          </a:lstStyle>
-          <a:p>
-            <a:fld id="{5282F153-3F37-0F45-9E97-73ACFA13230C}" type="datetimeFigureOut">
-              <a:rPr lang="en-US"/>
-              <a:t>7/23/19</a:t>
-            </a:fld>
-            <a:endParaRPr lang="en-US"/>
-          </a:p>
-        </p:txBody>
-      </p:sp>
-      <p:sp>
-        <p:nvSpPr>
-          <p:cNvPr id="4" name="Slide Image Placeholder 3"/>
-          <p:cNvSpPr>
-            <a:spLocks noGrp="1" noRot="1" noChangeAspect="1"/>
-          </p:cNvSpPr>
-          <p:nvPr>
-            <p:ph type="sldImg" idx="2"/>
-          </p:nvPr>
-        </p:nvSpPr>
-        <p:spPr>
-          <a:xfrm>
-            <a:off x="685800" y="1143000"/>
-            <a:ext cx="5486400" cy="3086100"/>
-          </a:xfrm>
-          <a:prstGeom prst="rect">
-            <a:avLst/>
-          </a:prstGeom>
-          <a:noFill/>
-          <a:ln w="12700">
-            <a:solidFill>
-              <a:prstClr val="black"/>
-            </a:solidFill>
-          </a:ln>
-        </p:spPr>
-        <p:txBody>
-          <a:bodyPr vert="horz" lIns="91440" tIns="45720" rIns="91440" bIns="45720" rtlCol="0" anchor="ctr"/>
-          <a:lstStyle/>
-          <a:p>
-            <a:endParaRPr lang="en-US"/>
-          </a:p>
-        </p:txBody>
-      </p:sp>
-      <p:sp>
-        <p:nvSpPr>
-          <p:cNvPr id="5" name="Notes Placeholder 4"/>
-          <p:cNvSpPr>
-            <a:spLocks noGrp="1"/>
-          </p:cNvSpPr>
-          <p:nvPr>
-            <p:ph type="body" sz="quarter" idx="3"/>
-          </p:nvPr>
-        </p:nvSpPr>
-        <p:spPr>
-          <a:xfrm>
-            <a:off x="685800" y="4400550"/>
-            <a:ext cx="5486400" cy="3600450"/>
-          </a:xfrm>
-          <a:prstGeom prst="rect">
-            <a:avLst/>
-          </a:prstGeom>
-        </p:spPr>
-        <p:txBody>
-          <a:bodyPr vert="horz" lIns="91440" tIns="45720" rIns="91440" bIns="45720" rtlCol="0"/>
-          <a:lstStyle/>
-          <a:p>
-            <a:pPr lvl="0"/>
-            <a:r>
-              <a:rPr lang="en-US"/>
-              <a:t>Click to edit Master text styles</a:t>
-            </a:r>
-          </a:p>
-          <a:p>
-            <a:pPr lvl="1"/>
-            <a:r>
-              <a:rPr lang="en-US"/>
-              <a:t>Second level</a:t>
-            </a:r>
-          </a:p>
-          <a:p>
-            <a:pPr lvl="2"/>
-            <a:r>
-              <a:rPr lang="en-US"/>
-              <a:t>Third level</a:t>
-            </a:r>
-          </a:p>
-          <a:p>
-            <a:pPr lvl="3"/>
-            <a:r>
-              <a:rPr lang="en-US"/>
-              <a:t>Fourth level</a:t>
-            </a:r>
-          </a:p>
-          <a:p>
-            <a:pPr lvl="4"/>
-            <a:r>
-              <a:rPr lang="en-US"/>
-              <a:t>Fifth level</a:t>
-            </a:r>
-          </a:p>
-        </p:txBody>
-      </p:sp>
-      <p:sp>
-        <p:nvSpPr>
-          <p:cNvPr id="6" name="Footer Placeholder 5"/>
-          <p:cNvSpPr>
-            <a:spLocks noGrp="1"/>
-          </p:cNvSpPr>
-          <p:nvPr>
-            <p:ph type="ftr" sz="quarter" idx="4"/>
-          </p:nvPr>
-        </p:nvSpPr>
-        <p:spPr>
-          <a:xfrm>
-            <a:off x="0" y="8685213"/>
-            <a:ext cx="2971800" cy="458787"/>
-          </a:xfrm>
-          <a:prstGeom prst="rect">
-            <a:avLst/>
-          </a:prstGeom>
-        </p:spPr>
-        <p:txBody>
-          <a:bodyPr vert="horz" lIns="91440" tIns="45720" rIns="91440" bIns="45720" rtlCol="0" anchor="b"/>
-          <a:lstStyle>
-            <a:lvl1pPr algn="l">
-              <a:defRPr sz="1200"/>
-            </a:lvl1pPr>
-          </a:lstStyle>
-          <a:p>
-            <a:endParaRPr lang="en-US"/>
-          </a:p>
-        </p:txBody>
-      </p:sp>
-      <p:sp>
-        <p:nvSpPr>
-          <p:cNvPr id="7" name="Slide Number Placeholder 6"/>
-          <p:cNvSpPr>
-            <a:spLocks noGrp="1"/>
-          </p:cNvSpPr>
-          <p:nvPr>
-            <p:ph type="sldNum" sz="quarter" idx="5"/>
-          </p:nvPr>
-        </p:nvSpPr>
-        <p:spPr>
-          <a:xfrm>
-            <a:off x="3884613" y="8685213"/>
-            <a:ext cx="2971800" cy="458787"/>
-          </a:xfrm>
-          <a:prstGeom prst="rect">
-            <a:avLst/>
-          </a:prstGeom>
-        </p:spPr>
-        <p:txBody>
-          <a:bodyPr vert="horz" lIns="91440" tIns="45720" rIns="91440" bIns="45720" rtlCol="0" anchor="b"/>
-          <a:lstStyle>
-            <a:lvl1pPr algn="r">
-              <a:defRPr sz="1200"/>
-            </a:lvl1pPr>
-          </a:lstStyle>
-          <a:p>
-            <a:fld id="{CE5E9CC1-C706-0F49-92D6-E571CC5EEA8F}" type="slidenum">
-              <a:rPr lang="en-US"/>
-              <a:t>‹#›</a:t>
-            </a:fld>
-            <a:endParaRPr lang="en-US"/>
-          </a:p>
-        </p:txBody>
-      </p:sp>
     </p:spTree>
     <p:extLst>
       <p:ext uri="{BB962C8B-B14F-4D97-AF65-F5344CB8AC3E}">
-        <p14:creationId xmlns:p14="http://schemas.microsoft.com/office/powerpoint/2010/main" val="1024086991"/>
+        <p14:creationId xmlns:p14="http://schemas.microsoft.com/office/powerpoint/2010/main" val="3620023417"/>
       </p:ext>
     </p:extLst>
   </p:cSld>
@@ -510,7 +291,6 @@
               <a:rPr lang="en-US" dirty="0"/>
               <a:t>[0:00] Point at the title verse: “We have ended four weeks in a row on the same instruction — read like a Berean. Today we find out what that actually means, and why it is the engine of the whole course.” Tie to Week 4: grace is secured; now we learn to tell the real gift from its counterfeits.</a:t>
             </a:r>
-            <a:endParaRPr lang="en-US" dirty="0"/>
           </a:p>
         </p:txBody>
       </p:sp>
@@ -602,7 +382,6 @@
 [CLICK] 1 Cor 2 — the crucial epistemology: spiritual truth is spiritually discerned. To the unbeliever it reads as foolishness — not because he’s stupid, but because he lacks the faculty. This is why discernment is a GIFT before it is a skill.
 [CLICK] The bridge: because the Spirit gives the eye, the Berean method is not a technique bolted onto the Bible — it is the Spirit-given eye being exercised. Guard against pride here: we discern by grace, not brains. Transition: “So what does exercising that eye look like? Luke gives us a portrait.”</a:t>
             </a:r>
-            <a:endParaRPr lang="en-US" dirty="0"/>
           </a:p>
         </p:txBody>
       </p:sp>
@@ -695,7 +474,6 @@
 [CLICK] The two failure modes — ask them to locate themselves silently (this seeds discussion Q). All-heart = gullible; all-head = cynical.
 [CLICK] Both at once. Land the paradox: eager BECAUSE precious, examining BECAUSE precious. Same love drives both. Transition: “Scripture hands us a whole toolkit for the examining half.”</a:t>
             </a:r>
-            <a:endParaRPr lang="en-US" dirty="0"/>
           </a:p>
         </p:txBody>
       </p:sp>
@@ -789,7 +567,6 @@
 • Col 2:8 — persuasiveness is not truth (echo Week 3’s “it works”). Watch the source: “according to Christ” or according to men?
 • Heb 5:14 (gold row) — the course’s controlling verse, now in its home context. The first four are commands to DO; this one is the RESULT of doing them. Land: the toolkit is a gym, not a checklist. Transition: “Which is why it has to be DAILY.”</a:t>
             </a:r>
-            <a:endParaRPr lang="en-US" dirty="0"/>
           </a:p>
         </p:txBody>
       </p:sp>
@@ -881,7 +658,6 @@
 [CLICK] Name the reps concretely — this is the beautiful part. Every judgment-scene in Scripture (many we’ve already studied!) is a rep. The daily reader watches God sort accepted from rejected worship hundreds of times until his instinct matches God’s.
 [CLICK] The engine, not the slogan. This is why we end every week the same way. The uncalibrated-sincerity line ties back to Week 3 (Uzzah was sincere and uncalibrated). Land: one chapter, eager and examining. Straight to discussion.</a:t>
             </a:r>
-            <a:endParaRPr lang="en-US" dirty="0"/>
           </a:p>
         </p:txBody>
       </p:sp>
@@ -972,7 +748,6 @@
 Q2: The concrete one. Push past “I test everything” (nobody does) to a real instance — a sermon, a book, a podcast, a viral claim. If someone can’t recall one, that’s the honest answer and the invitation.
 [CLICK] Explicitly invite them to test THIS class. Modeling this in week 5 makes the remaining weeks (especially 10–11) safe and honest.</a:t>
             </a:r>
-            <a:endParaRPr lang="en-US" dirty="0"/>
           </a:p>
         </p:txBody>
       </p:sp>
@@ -1064,7 +839,6 @@
 [CLICK] Carry sentence — say it together.
 [CLICK] Close on 1 Thess 5:21. Dismiss on time.</a:t>
             </a:r>
-            <a:endParaRPr lang="en-US" dirty="0"/>
           </a:p>
         </p:txBody>
       </p:sp>
@@ -1137,6 +911,11 @@
 <file path=ppt/slideMasters/slideMaster1.xml><?xml version="1.0" encoding="utf-8"?>
 <p:sldMaster xmlns:a="http://schemas.openxmlformats.org/drawingml/2006/main" xmlns:r="http://schemas.openxmlformats.org/officeDocument/2006/relationships" xmlns:p="http://schemas.openxmlformats.org/presentationml/2006/main">
   <p:cSld>
+    <p:bg>
+      <p:bgRef idx="1001">
+        <a:schemeClr val="bg1"/>
+      </p:bgRef>
+    </p:bg>
     <p:spTree>
       <p:nvGrpSpPr>
         <p:cNvPr id="1" name=""/>
@@ -1449,7 +1228,7 @@
           <a:bodyPr wrap="square" lIns="0" tIns="0" rIns="0" bIns="0" rtlCol="0" anchor="t"/>
           <a:lstStyle/>
           <a:p>
-            <a:pPr algn="ctr" indent="0" marL="0">
+            <a:pPr marL="0" indent="0" algn="ctr">
               <a:buNone/>
             </a:pPr>
             <a:r>
@@ -1461,7 +1240,7 @@
                 <a:ea typeface="Arial" pitchFamily="34" charset="-122"/>
                 <a:cs typeface="Arial" pitchFamily="34" charset="-120"/>
               </a:rPr>
-              <a:t>The Obedience of Faith — Week 5  ·  Unit II: Discernment</a:t>
+              <a:t>The Obedience of Faith - Week 5  ·  Unit II: Discernment</a:t>
             </a:r>
             <a:endParaRPr lang="en-US" sz="1600" dirty="0"/>
           </a:p>
@@ -1488,7 +1267,7 @@
           <a:bodyPr wrap="square" lIns="0" tIns="0" rIns="0" bIns="0" rtlCol="0" anchor="t"/>
           <a:lstStyle/>
           <a:p>
-            <a:pPr algn="ctr" indent="0" marL="0">
+            <a:pPr marL="0" indent="0" algn="ctr">
               <a:buNone/>
             </a:pPr>
             <a:r>
@@ -1527,7 +1306,7 @@
           <a:bodyPr wrap="square" lIns="0" tIns="0" rIns="0" bIns="0" rtlCol="0" anchor="t"/>
           <a:lstStyle/>
           <a:p>
-            <a:pPr algn="ctr" indent="0" marL="0">
+            <a:pPr marL="0" indent="0" algn="ctr">
               <a:buNone/>
             </a:pPr>
             <a:r>
@@ -1539,7 +1318,30 @@
                 <a:ea typeface="Arial" pitchFamily="34" charset="-122"/>
                 <a:cs typeface="Arial" pitchFamily="34" charset="-120"/>
               </a:rPr>
-              <a:t>Discerning the Sacred and the True — eager, and examining</a:t>
+              <a:t>Discerning the Sacred and the True </a:t>
+            </a:r>
+            <a:r>
+              <a:rPr lang="en-US" sz="2000" b="1" i="1" dirty="0">
+                <a:solidFill>
+                  <a:srgbClr val="1F497D"/>
+                </a:solidFill>
+                <a:latin typeface="Arial" pitchFamily="34" charset="0"/>
+                <a:ea typeface="Arial" pitchFamily="34" charset="-122"/>
+                <a:cs typeface="Arial" pitchFamily="34" charset="-120"/>
+                <a:sym typeface="Wingdings" pitchFamily="2" charset="2"/>
+              </a:rPr>
+              <a:t></a:t>
+            </a:r>
+            <a:r>
+              <a:rPr lang="en-US" sz="2000" b="1" i="1" dirty="0">
+                <a:solidFill>
+                  <a:srgbClr val="1F497D"/>
+                </a:solidFill>
+                <a:latin typeface="Arial" pitchFamily="34" charset="0"/>
+                <a:ea typeface="Arial" pitchFamily="34" charset="-122"/>
+                <a:cs typeface="Arial" pitchFamily="34" charset="-120"/>
+              </a:rPr>
+              <a:t> eager, and examining</a:t>
             </a:r>
             <a:endParaRPr lang="en-US" sz="1600" dirty="0"/>
           </a:p>
@@ -1566,11 +1368,11 @@
           <a:bodyPr wrap="square" lIns="0" tIns="0" rIns="0" bIns="0" rtlCol="0" anchor="t"/>
           <a:lstStyle/>
           <a:p>
-            <a:pPr algn="ctr" indent="0" marL="0">
+            <a:pPr marL="0" indent="0" algn="ctr">
               <a:buNone/>
             </a:pPr>
             <a:r>
-              <a:rPr lang="en-US" sz="1900" i="1" dirty="0">
+              <a:rPr lang="en-US" sz="2000" i="1" dirty="0">
                 <a:solidFill>
                   <a:srgbClr val="000000"/>
                 </a:solidFill>
@@ -1580,55 +1382,52 @@
               </a:rPr>
               <a:t>“These Jews were more open-minded… for they eagerly received the message, examining the scriptures carefully every day to see if these things were so.”</a:t>
             </a:r>
-            <a:pPr algn="ctr" indent="0" marL="0">
+            <a:endParaRPr lang="en-US" dirty="0"/>
+          </a:p>
+          <a:p>
+            <a:pPr marL="0" indent="0" algn="ctr">
               <a:buNone/>
             </a:pPr>
-            <a:endParaRPr lang="en-US" sz="1600" dirty="0"/>
-          </a:p>
-          <a:p>
-            <a:pPr algn="ctr" indent="0" marL="0">
+            <a:r>
+              <a:rPr lang="en-US" sz="2000" dirty="0">
+                <a:solidFill>
+                  <a:srgbClr val="000000"/>
+                </a:solidFill>
+                <a:latin typeface="Arial" pitchFamily="34" charset="0"/>
+                <a:ea typeface="Arial" pitchFamily="34" charset="-122"/>
+                <a:cs typeface="Arial" pitchFamily="34" charset="-120"/>
+              </a:rPr>
+              <a:t>(Acts 17:11)</a:t>
+            </a:r>
+            <a:endParaRPr lang="en-US" dirty="0"/>
+          </a:p>
+        </p:txBody>
+      </p:sp>
+      <p:sp>
+        <p:nvSpPr>
+          <p:cNvPr id="6" name="t4"/>
+          <p:cNvSpPr txBox="1"/>
+          <p:nvPr/>
+        </p:nvSpPr>
+        <p:spPr>
+          <a:xfrm>
+            <a:off x="914400" y="4846320"/>
+            <a:ext cx="7315200" cy="457200"/>
+          </a:xfrm>
+          <a:prstGeom prst="rect">
+            <a:avLst/>
+          </a:prstGeom>
+          <a:noFill/>
+          <a:ln/>
+        </p:spPr>
+        <p:txBody>
+          <a:bodyPr wrap="square" lIns="0" tIns="0" rIns="0" bIns="0" rtlCol="0" anchor="t"/>
+          <a:lstStyle/>
+          <a:p>
+            <a:pPr marL="0" indent="0" algn="ctr">
               <a:buNone/>
             </a:pPr>
             <a:r>
-              <a:rPr lang="en-US" sz="1800" dirty="0">
-                <a:solidFill>
-                  <a:srgbClr val="000000"/>
-                </a:solidFill>
-                <a:latin typeface="Arial" pitchFamily="34" charset="0"/>
-                <a:ea typeface="Arial" pitchFamily="34" charset="-122"/>
-                <a:cs typeface="Arial" pitchFamily="34" charset="-120"/>
-              </a:rPr>
-              <a:t>(Acts 17:11)</a:t>
-            </a:r>
-            <a:endParaRPr lang="en-US" sz="1600" dirty="0"/>
-          </a:p>
-        </p:txBody>
-      </p:sp>
-      <p:sp>
-        <p:nvSpPr>
-          <p:cNvPr id="6" name="t4"/>
-          <p:cNvSpPr txBox="1"/>
-          <p:nvPr/>
-        </p:nvSpPr>
-        <p:spPr>
-          <a:xfrm>
-            <a:off x="914400" y="4846320"/>
-            <a:ext cx="7315200" cy="457200"/>
-          </a:xfrm>
-          <a:prstGeom prst="rect">
-            <a:avLst/>
-          </a:prstGeom>
-          <a:noFill/>
-          <a:ln/>
-        </p:spPr>
-        <p:txBody>
-          <a:bodyPr wrap="square" lIns="0" tIns="0" rIns="0" bIns="0" rtlCol="0" anchor="t"/>
-          <a:lstStyle/>
-          <a:p>
-            <a:pPr algn="ctr" indent="0" marL="0">
-              <a:buNone/>
-            </a:pPr>
-            <a:r>
               <a:rPr lang="en-US" sz="1600" b="1" u="sng" dirty="0">
                 <a:solidFill>
                   <a:srgbClr val="4F81BD"/>
@@ -1636,7 +1435,7 @@
                 <a:latin typeface="Arial" pitchFamily="34" charset="0"/>
                 <a:ea typeface="Arial" pitchFamily="34" charset="-122"/>
                 <a:cs typeface="Arial" pitchFamily="34" charset="-120"/>
-                <a:hlinkClick r:id="rId1" invalidUrl="" action="" tgtFrame="" tooltip="" history="1" highlightClick="0" endSnd="0">
+                <a:hlinkClick r:id="rId3">
                   <a:extLst>
                     <a:ext uri="{A12FA001-AC4F-418D-AE19-62706E023703}">
                       <ahyp:hlinkClr xmlns:ahyp="http://schemas.microsoft.com/office/drawing/2018/hyperlinkcolor" val="tx"/>
@@ -1644,7 +1443,36 @@
                   </a:extLst>
                 </a:hlinkClick>
               </a:rPr>
-              <a:t>https://tinyurl.com/TeachTheWord</a:t>
+              <a:t>https://</a:t>
+            </a:r>
+            <a:r>
+              <a:rPr lang="en-US" sz="1600" b="1" u="sng" dirty="0" err="1">
+                <a:solidFill>
+                  <a:srgbClr val="4F81BD"/>
+                </a:solidFill>
+                <a:latin typeface="Arial" pitchFamily="34" charset="0"/>
+                <a:ea typeface="Arial" pitchFamily="34" charset="-122"/>
+                <a:cs typeface="Arial" pitchFamily="34" charset="-120"/>
+                <a:hlinkClick r:id="rId3">
+                  <a:extLst>
+                    <a:ext uri="{A12FA001-AC4F-418D-AE19-62706E023703}">
+                      <ahyp:hlinkClr xmlns:ahyp="http://schemas.microsoft.com/office/drawing/2018/hyperlinkcolor" val="tx"/>
+                    </a:ext>
+                  </a:extLst>
+                </a:hlinkClick>
+              </a:rPr>
+              <a:t>TeachTheWord</a:t>
+            </a:r>
+            <a:r>
+              <a:rPr lang="en-US" sz="1600" b="1" u="sng" dirty="0" err="1">
+                <a:solidFill>
+                  <a:srgbClr val="4F81BD"/>
+                </a:solidFill>
+                <a:latin typeface="Arial" pitchFamily="34" charset="0"/>
+                <a:ea typeface="Arial" pitchFamily="34" charset="-122"/>
+                <a:cs typeface="Arial" pitchFamily="34" charset="-120"/>
+              </a:rPr>
+              <a:t>.Church</a:t>
             </a:r>
             <a:endParaRPr lang="en-US" sz="1600" dirty="0"/>
           </a:p>
@@ -1696,7 +1524,7 @@
           <a:bodyPr wrap="square" lIns="0" tIns="0" rIns="0" bIns="0" rtlCol="0" anchor="t"/>
           <a:lstStyle/>
           <a:p>
-            <a:pPr algn="l" indent="0" marL="0">
+            <a:pPr marL="0" indent="0" algn="l">
               <a:buNone/>
             </a:pPr>
             <a:r>
@@ -1735,11 +1563,11 @@
           <a:bodyPr wrap="square" lIns="0" tIns="0" rIns="0" bIns="0" rtlCol="0" anchor="t"/>
           <a:lstStyle/>
           <a:p>
-            <a:pPr algn="l" indent="0" marL="0">
+            <a:pPr marL="0" indent="0" algn="l">
               <a:buNone/>
             </a:pPr>
             <a:r>
-              <a:rPr lang="en-US" sz="1300" b="1" dirty="0">
+              <a:rPr lang="en-US" sz="2000" b="1" dirty="0">
                 <a:solidFill>
                   <a:srgbClr val="4F81BD"/>
                 </a:solidFill>
@@ -1747,9 +1575,32 @@
                 <a:ea typeface="Arial" pitchFamily="34" charset="-122"/>
                 <a:cs typeface="Arial" pitchFamily="34" charset="-120"/>
               </a:rPr>
-              <a:t>Is the gospel revealed truth — or just my private opinion?</a:t>
-            </a:r>
-            <a:endParaRPr lang="en-US" sz="1600" dirty="0"/>
+              <a:t>Is the gospel revealed truth </a:t>
+            </a:r>
+            <a:r>
+              <a:rPr lang="en-US" sz="2000" b="1" dirty="0">
+                <a:solidFill>
+                  <a:srgbClr val="4F81BD"/>
+                </a:solidFill>
+                <a:latin typeface="Arial" pitchFamily="34" charset="0"/>
+                <a:ea typeface="Arial" pitchFamily="34" charset="-122"/>
+                <a:cs typeface="Arial" pitchFamily="34" charset="-120"/>
+                <a:sym typeface="Wingdings" pitchFamily="2" charset="2"/>
+              </a:rPr>
+              <a:t> </a:t>
+            </a:r>
+            <a:r>
+              <a:rPr lang="en-US" sz="2000" b="1" dirty="0">
+                <a:solidFill>
+                  <a:srgbClr val="4F81BD"/>
+                </a:solidFill>
+                <a:latin typeface="Arial" pitchFamily="34" charset="0"/>
+                <a:ea typeface="Arial" pitchFamily="34" charset="-122"/>
+                <a:cs typeface="Arial" pitchFamily="34" charset="-120"/>
+              </a:rPr>
+              <a:t>or just my private opinion?</a:t>
+            </a:r>
+            <a:endParaRPr lang="en-US" sz="2800" dirty="0"/>
           </a:p>
         </p:txBody>
       </p:sp>
@@ -1774,11 +1625,11 @@
           <a:bodyPr wrap="square" lIns="0" tIns="0" rIns="0" bIns="0" rtlCol="0" anchor="t"/>
           <a:lstStyle/>
           <a:p>
-            <a:pPr algn="l" indent="0" marL="0">
+            <a:pPr marL="0" indent="0" algn="l">
               <a:buNone/>
             </a:pPr>
             <a:r>
-              <a:rPr lang="en-US" sz="1500" b="1" dirty="0">
+              <a:rPr lang="en-US" b="1" dirty="0">
                 <a:solidFill>
                   <a:srgbClr val="1F497D"/>
                 </a:solidFill>
@@ -1788,11 +1639,153 @@
               </a:rPr>
               <a:t>The modern pressure: </a:t>
             </a:r>
-            <a:pPr algn="l" indent="0" marL="0">
+            <a:r>
+              <a:rPr lang="en-US" dirty="0">
+                <a:solidFill>
+                  <a:srgbClr val="000000"/>
+                </a:solidFill>
+                <a:latin typeface="Arial" pitchFamily="34" charset="0"/>
+                <a:ea typeface="Arial" pitchFamily="34" charset="-122"/>
+                <a:cs typeface="Arial" pitchFamily="34" charset="-120"/>
+              </a:rPr>
+              <a:t>religion gets filed under “personal belief” </a:t>
+            </a:r>
+            <a:r>
+              <a:rPr lang="en-US" dirty="0">
+                <a:solidFill>
+                  <a:srgbClr val="000000"/>
+                </a:solidFill>
+                <a:latin typeface="Arial" pitchFamily="34" charset="0"/>
+                <a:ea typeface="Arial" pitchFamily="34" charset="-122"/>
+                <a:cs typeface="Arial" pitchFamily="34" charset="-120"/>
+                <a:sym typeface="Wingdings" pitchFamily="2" charset="2"/>
+              </a:rPr>
+              <a:t></a:t>
+            </a:r>
+            <a:r>
+              <a:rPr lang="en-US" dirty="0">
+                <a:solidFill>
+                  <a:srgbClr val="000000"/>
+                </a:solidFill>
+                <a:latin typeface="Arial" pitchFamily="34" charset="0"/>
+                <a:ea typeface="Arial" pitchFamily="34" charset="-122"/>
+                <a:cs typeface="Arial" pitchFamily="34" charset="-120"/>
+              </a:rPr>
+              <a:t> non-rational, unscientific, subjective. True for you, not for me. Paul faced the same demotion from Greek philosophers and Jewish law-teachers alike.</a:t>
+            </a:r>
+            <a:endParaRPr lang="en-US" sz="2000" dirty="0"/>
+          </a:p>
+        </p:txBody>
+      </p:sp>
+      <p:sp>
+        <p:nvSpPr>
+          <p:cNvPr id="5" name="a2"/>
+          <p:cNvSpPr txBox="1"/>
+          <p:nvPr/>
+        </p:nvSpPr>
+        <p:spPr>
+          <a:xfrm>
+            <a:off x="365760" y="2088885"/>
+            <a:ext cx="8412480" cy="1147019"/>
+          </a:xfrm>
+          <a:prstGeom prst="rect">
+            <a:avLst/>
+          </a:prstGeom>
+          <a:noFill/>
+          <a:ln/>
+        </p:spPr>
+        <p:txBody>
+          <a:bodyPr wrap="square" lIns="0" tIns="0" rIns="0" bIns="0" rtlCol="0" anchor="t"/>
+          <a:lstStyle/>
+          <a:p>
+            <a:pPr algn="l"/>
+            <a:r>
+              <a:rPr lang="en-US" b="1" dirty="0">
+                <a:solidFill>
+                  <a:srgbClr val="000000"/>
+                </a:solidFill>
+                <a:latin typeface="Arial" pitchFamily="34" charset="0"/>
+                <a:ea typeface="Arial" pitchFamily="34" charset="-122"/>
+                <a:cs typeface="Arial" pitchFamily="34" charset="-120"/>
+              </a:rPr>
+              <a:t>Paul’s answer </a:t>
+            </a:r>
+            <a:r>
+              <a:rPr lang="en-US" b="1" dirty="0">
+                <a:solidFill>
+                  <a:srgbClr val="000000"/>
+                </a:solidFill>
+                <a:latin typeface="Arial" pitchFamily="34" charset="0"/>
+                <a:ea typeface="Arial" pitchFamily="34" charset="-122"/>
+                <a:cs typeface="Arial" pitchFamily="34" charset="-120"/>
+                <a:sym typeface="Wingdings" pitchFamily="2" charset="2"/>
+              </a:rPr>
+              <a:t></a:t>
+            </a:r>
+            <a:r>
+              <a:rPr lang="en-US" b="1" dirty="0">
+                <a:solidFill>
+                  <a:srgbClr val="000000"/>
+                </a:solidFill>
+                <a:latin typeface="Arial" pitchFamily="34" charset="0"/>
+                <a:ea typeface="Arial" pitchFamily="34" charset="-122"/>
+                <a:cs typeface="Arial" pitchFamily="34" charset="-120"/>
+              </a:rPr>
+              <a:t> the gospel is God’s power, not human opinion:
+</a:t>
+            </a:r>
+            <a:r>
+              <a:rPr lang="en-US" b="1" i="1" dirty="0">
+                <a:solidFill>
+                  <a:srgbClr val="000000"/>
+                </a:solidFill>
+                <a:latin typeface="Arial" pitchFamily="34" charset="0"/>
+                <a:ea typeface="Arial" pitchFamily="34" charset="-122"/>
+                <a:cs typeface="Arial" pitchFamily="34" charset="-120"/>
+              </a:rPr>
+              <a:t>“I am not ashamed of the gospel, for it is God’s power for salvation to everyone who believes… For in it the righteousness of God is revealed from faith to faith.” </a:t>
+            </a:r>
+            <a:r>
+              <a:rPr lang="en-US" b="1" dirty="0">
+                <a:solidFill>
+                  <a:srgbClr val="000000"/>
+                </a:solidFill>
+                <a:latin typeface="Arial" pitchFamily="34" charset="0"/>
+                <a:ea typeface="Arial" pitchFamily="34" charset="-122"/>
+                <a:cs typeface="Arial" pitchFamily="34" charset="-120"/>
+              </a:rPr>
+              <a:t>(Romans 1:16–17)</a:t>
+            </a:r>
+            <a:endParaRPr lang="en-US" sz="2000" dirty="0"/>
+          </a:p>
+        </p:txBody>
+      </p:sp>
+      <p:sp>
+        <p:nvSpPr>
+          <p:cNvPr id="6" name="a3"/>
+          <p:cNvSpPr txBox="1"/>
+          <p:nvPr/>
+        </p:nvSpPr>
+        <p:spPr>
+          <a:xfrm>
+            <a:off x="365760" y="3479157"/>
+            <a:ext cx="8412480" cy="1596181"/>
+          </a:xfrm>
+          <a:prstGeom prst="rect">
+            <a:avLst/>
+          </a:prstGeom>
+          <a:noFill/>
+          <a:ln/>
+        </p:spPr>
+        <p:txBody>
+          <a:bodyPr wrap="square" lIns="0" tIns="0" rIns="0" bIns="0" rtlCol="0" anchor="t"/>
+          <a:lstStyle/>
+          <a:p>
+            <a:pPr marL="0" indent="0" algn="l">
               <a:buNone/>
             </a:pPr>
             <a:r>
-              <a:rPr lang="en-US" sz="1500" dirty="0">
+              <a:rPr lang="en-US" sz="2000" dirty="0">
                 <a:solidFill>
                   <a:srgbClr val="000000"/>
                 </a:solidFill>
@@ -1800,22 +1793,90 @@
                 <a:ea typeface="Arial" pitchFamily="34" charset="-122"/>
                 <a:cs typeface="Arial" pitchFamily="34" charset="-120"/>
               </a:rPr>
-              <a:t>religion gets filed under “personal belief” — non-rational, unscientific, subjective. True for you, not for me. Paul faced the same demotion from Greek philosophers and Jewish law-teachers alike.</a:t>
-            </a:r>
-            <a:endParaRPr lang="en-US" sz="1600" dirty="0"/>
-          </a:p>
-        </p:txBody>
-      </p:sp>
-      <p:sp>
-        <p:nvSpPr>
-          <p:cNvPr id="5" name="a2"/>
+              <a:t>It is </a:t>
+            </a:r>
+            <a:r>
+              <a:rPr lang="en-US" sz="2000" b="1" i="1" dirty="0">
+                <a:solidFill>
+                  <a:srgbClr val="1F497D"/>
+                </a:solidFill>
+                <a:latin typeface="Arial" pitchFamily="34" charset="0"/>
+                <a:ea typeface="Arial" pitchFamily="34" charset="-122"/>
+                <a:cs typeface="Arial" pitchFamily="34" charset="-120"/>
+              </a:rPr>
+              <a:t>revealed</a:t>
+            </a:r>
+            <a:r>
+              <a:rPr lang="en-US" sz="2000" dirty="0">
+                <a:solidFill>
+                  <a:srgbClr val="000000"/>
+                </a:solidFill>
+                <a:latin typeface="Arial" pitchFamily="34" charset="0"/>
+                <a:ea typeface="Arial" pitchFamily="34" charset="-122"/>
+                <a:cs typeface="Arial" pitchFamily="34" charset="-120"/>
+              </a:rPr>
+              <a:t> wisdom </a:t>
+            </a:r>
+            <a:r>
+              <a:rPr lang="en-US" sz="2000" dirty="0">
+                <a:solidFill>
+                  <a:srgbClr val="000000"/>
+                </a:solidFill>
+                <a:latin typeface="Arial" pitchFamily="34" charset="0"/>
+                <a:ea typeface="Arial" pitchFamily="34" charset="-122"/>
+                <a:cs typeface="Arial" pitchFamily="34" charset="-120"/>
+                <a:sym typeface="Wingdings" pitchFamily="2" charset="2"/>
+              </a:rPr>
+              <a:t></a:t>
+            </a:r>
+            <a:r>
+              <a:rPr lang="en-US" sz="2000" dirty="0">
+                <a:solidFill>
+                  <a:srgbClr val="000000"/>
+                </a:solidFill>
+                <a:latin typeface="Arial" pitchFamily="34" charset="0"/>
+                <a:ea typeface="Arial" pitchFamily="34" charset="-122"/>
+                <a:cs typeface="Arial" pitchFamily="34" charset="-120"/>
+              </a:rPr>
+              <a:t> not reasoned-to from the outside:
+</a:t>
+            </a:r>
+            <a:r>
+              <a:rPr lang="en-US" sz="2000" b="1" i="1" dirty="0">
+                <a:solidFill>
+                  <a:srgbClr val="000000"/>
+                </a:solidFill>
+                <a:latin typeface="Arial" pitchFamily="34" charset="0"/>
+                <a:ea typeface="Arial" pitchFamily="34" charset="-122"/>
+                <a:cs typeface="Arial" pitchFamily="34" charset="-120"/>
+              </a:rPr>
+              <a:t>“We speak the wisdom of God, hidden in a mystery… God has revealed these to us by the Spirit. The unbeliever does not receive the things of the Spirit of God, for they are foolishness to him… they are spiritually discerned.” </a:t>
+            </a:r>
+            <a:r>
+              <a:rPr lang="en-US" b="1" dirty="0">
+                <a:solidFill>
+                  <a:srgbClr val="000000"/>
+                </a:solidFill>
+                <a:latin typeface="Arial" pitchFamily="34" charset="0"/>
+                <a:ea typeface="Arial" pitchFamily="34" charset="-122"/>
+                <a:cs typeface="Arial" pitchFamily="34" charset="-120"/>
+              </a:rPr>
+              <a:t>(1 Corinthians 2:7, 10, 14)</a:t>
+            </a:r>
+            <a:endParaRPr lang="en-US" sz="2400" dirty="0"/>
+          </a:p>
+        </p:txBody>
+      </p:sp>
+      <p:sp>
+        <p:nvSpPr>
+          <p:cNvPr id="7" name="a4"/>
           <p:cNvSpPr txBox="1"/>
           <p:nvPr/>
         </p:nvSpPr>
         <p:spPr>
           <a:xfrm>
-            <a:off x="365760" y="2148840"/>
-            <a:ext cx="8412480" cy="1051560"/>
+            <a:off x="365760" y="5318592"/>
+            <a:ext cx="8412480" cy="1325880"/>
           </a:xfrm>
           <a:prstGeom prst="rect">
             <a:avLst/>
@@ -1827,11 +1888,22 @@
           <a:bodyPr wrap="square" lIns="0" tIns="0" rIns="0" bIns="0" rtlCol="0" anchor="t"/>
           <a:lstStyle/>
           <a:p>
-            <a:pPr algn="l" indent="0" marL="0">
+            <a:pPr marL="0" indent="0" algn="l">
               <a:buNone/>
             </a:pPr>
             <a:r>
-              <a:rPr lang="en-US" sz="1450" b="1" dirty="0">
+              <a:rPr lang="en-US" b="1" dirty="0">
+                <a:solidFill>
+                  <a:srgbClr val="1F497D"/>
+                </a:solidFill>
+                <a:latin typeface="Arial" pitchFamily="34" charset="0"/>
+                <a:ea typeface="Arial" pitchFamily="34" charset="-122"/>
+                <a:cs typeface="Arial" pitchFamily="34" charset="-120"/>
+              </a:rPr>
+              <a:t>So, discernment is possible at all only because the Spirit gives it. </a:t>
+            </a:r>
+            <a:r>
+              <a:rPr lang="en-US" dirty="0">
                 <a:solidFill>
                   <a:srgbClr val="000000"/>
                 </a:solidFill>
@@ -1839,28 +1911,22 @@
                 <a:ea typeface="Arial" pitchFamily="34" charset="-122"/>
                 <a:cs typeface="Arial" pitchFamily="34" charset="-120"/>
               </a:rPr>
-              <a:t>Paul’s answer — the gospel is God’s power, not human opinion:
-</a:t>
-            </a:r>
-            <a:pPr algn="l" indent="0" marL="0">
-              <a:buNone/>
-            </a:pPr>
-            <a:r>
-              <a:rPr lang="en-US" sz="1500" b="1" i="1" dirty="0">
+              <a:t>The sacred does not come into focus by cleverness or credentials </a:t>
+            </a:r>
+            <a:r>
+              <a:rPr lang="en-US" dirty="0">
                 <a:solidFill>
                   <a:srgbClr val="000000"/>
                 </a:solidFill>
                 <a:latin typeface="Arial" pitchFamily="34" charset="0"/>
                 <a:ea typeface="Arial" pitchFamily="34" charset="-122"/>
                 <a:cs typeface="Arial" pitchFamily="34" charset="-120"/>
-              </a:rPr>
-              <a:t>“I am not ashamed of the gospel, for it is God’s power for salvation to everyone who believes… For in it the righteousness of God is revealed from faith to faith.” </a:t>
-            </a:r>
-            <a:pPr algn="l" indent="0" marL="0">
-              <a:buNone/>
-            </a:pPr>
-            <a:r>
-              <a:rPr lang="en-US" sz="1400" b="1" dirty="0">
+                <a:sym typeface="Wingdings" pitchFamily="2" charset="2"/>
+              </a:rPr>
+              <a:t></a:t>
+            </a:r>
+            <a:r>
+              <a:rPr lang="en-US" dirty="0">
                 <a:solidFill>
                   <a:srgbClr val="000000"/>
                 </a:solidFill>
@@ -1868,38 +1934,10 @@
                 <a:ea typeface="Arial" pitchFamily="34" charset="-122"/>
                 <a:cs typeface="Arial" pitchFamily="34" charset="-120"/>
               </a:rPr>
-              <a:t>(Romans 1:16–17)</a:t>
-            </a:r>
-            <a:endParaRPr lang="en-US" sz="1600" dirty="0"/>
-          </a:p>
-        </p:txBody>
-      </p:sp>
-      <p:sp>
-        <p:nvSpPr>
-          <p:cNvPr id="6" name="a3"/>
-          <p:cNvSpPr txBox="1"/>
-          <p:nvPr/>
-        </p:nvSpPr>
-        <p:spPr>
-          <a:xfrm>
-            <a:off x="365760" y="3337560"/>
-            <a:ext cx="8412480" cy="1371600"/>
-          </a:xfrm>
-          <a:prstGeom prst="rect">
-            <a:avLst/>
-          </a:prstGeom>
-          <a:noFill/>
-          <a:ln/>
-        </p:spPr>
-        <p:txBody>
-          <a:bodyPr wrap="square" lIns="0" tIns="0" rIns="0" bIns="0" rtlCol="0" anchor="t"/>
-          <a:lstStyle/>
-          <a:p>
-            <a:pPr algn="l" indent="0" marL="0">
-              <a:buNone/>
-            </a:pPr>
-            <a:r>
-              <a:rPr lang="en-US" sz="1450" dirty="0">
+              <a:t> it comes into focus through the obedience of faith (Rom 1:5). </a:t>
+            </a:r>
+            <a:r>
+              <a:rPr lang="en-US" i="1" dirty="0">
                 <a:solidFill>
                   <a:srgbClr val="000000"/>
                 </a:solidFill>
@@ -1907,133 +1945,9 @@
                 <a:ea typeface="Arial" pitchFamily="34" charset="-122"/>
                 <a:cs typeface="Arial" pitchFamily="34" charset="-120"/>
               </a:rPr>
-              <a:t>And it is </a:t>
-            </a:r>
-            <a:pPr algn="l" indent="0" marL="0">
-              <a:buNone/>
-            </a:pPr>
-            <a:r>
-              <a:rPr lang="en-US" sz="1450" b="1" i="1" dirty="0">
-                <a:solidFill>
-                  <a:srgbClr val="1F497D"/>
-                </a:solidFill>
-                <a:latin typeface="Arial" pitchFamily="34" charset="0"/>
-                <a:ea typeface="Arial" pitchFamily="34" charset="-122"/>
-                <a:cs typeface="Arial" pitchFamily="34" charset="-120"/>
-              </a:rPr>
-              <a:t>revealed</a:t>
-            </a:r>
-            <a:pPr algn="l" indent="0" marL="0">
-              <a:buNone/>
-            </a:pPr>
-            <a:r>
-              <a:rPr lang="en-US" sz="1450" dirty="0">
-                <a:solidFill>
-                  <a:srgbClr val="000000"/>
-                </a:solidFill>
-                <a:latin typeface="Arial" pitchFamily="34" charset="0"/>
-                <a:ea typeface="Arial" pitchFamily="34" charset="-122"/>
-                <a:cs typeface="Arial" pitchFamily="34" charset="-120"/>
-              </a:rPr>
-              <a:t> wisdom — not reasoned-to from the outside:
-</a:t>
-            </a:r>
-            <a:pPr algn="l" indent="0" marL="0">
-              <a:buNone/>
-            </a:pPr>
-            <a:r>
-              <a:rPr lang="en-US" sz="1450" b="1" i="1" dirty="0">
-                <a:solidFill>
-                  <a:srgbClr val="000000"/>
-                </a:solidFill>
-                <a:latin typeface="Arial" pitchFamily="34" charset="0"/>
-                <a:ea typeface="Arial" pitchFamily="34" charset="-122"/>
-                <a:cs typeface="Arial" pitchFamily="34" charset="-120"/>
-              </a:rPr>
-              <a:t>“We speak the wisdom of God, hidden in a mystery… God has revealed these to us by the Spirit. The unbeliever does not receive the things of the Spirit of God, for they are foolishness to him… they are spiritually discerned.” </a:t>
-            </a:r>
-            <a:pPr algn="l" indent="0" marL="0">
-              <a:buNone/>
-            </a:pPr>
-            <a:r>
-              <a:rPr lang="en-US" sz="1350" b="1" dirty="0">
-                <a:solidFill>
-                  <a:srgbClr val="000000"/>
-                </a:solidFill>
-                <a:latin typeface="Arial" pitchFamily="34" charset="0"/>
-                <a:ea typeface="Arial" pitchFamily="34" charset="-122"/>
-                <a:cs typeface="Arial" pitchFamily="34" charset="-120"/>
-              </a:rPr>
-              <a:t>(1 Corinthians 2:7, 10, 14)</a:t>
-            </a:r>
-            <a:endParaRPr lang="en-US" sz="1600" dirty="0"/>
-          </a:p>
-        </p:txBody>
-      </p:sp>
-      <p:sp>
-        <p:nvSpPr>
-          <p:cNvPr id="7" name="a4"/>
-          <p:cNvSpPr txBox="1"/>
-          <p:nvPr/>
-        </p:nvSpPr>
-        <p:spPr>
-          <a:xfrm>
-            <a:off x="365760" y="4846320"/>
-            <a:ext cx="8412480" cy="1325880"/>
-          </a:xfrm>
-          <a:prstGeom prst="rect">
-            <a:avLst/>
-          </a:prstGeom>
-          <a:noFill/>
-          <a:ln/>
-        </p:spPr>
-        <p:txBody>
-          <a:bodyPr wrap="square" lIns="0" tIns="0" rIns="0" bIns="0" rtlCol="0" anchor="t"/>
-          <a:lstStyle/>
-          <a:p>
-            <a:pPr algn="l" indent="0" marL="0">
-              <a:buNone/>
-            </a:pPr>
-            <a:r>
-              <a:rPr lang="en-US" sz="1500" b="1" dirty="0">
-                <a:solidFill>
-                  <a:srgbClr val="1F497D"/>
-                </a:solidFill>
-                <a:latin typeface="Arial" pitchFamily="34" charset="0"/>
-                <a:ea typeface="Arial" pitchFamily="34" charset="-122"/>
-                <a:cs typeface="Arial" pitchFamily="34" charset="-120"/>
-              </a:rPr>
-              <a:t>So discernment is possible at all only because the Spirit gives it. </a:t>
-            </a:r>
-            <a:pPr algn="l" indent="0" marL="0">
-              <a:buNone/>
-            </a:pPr>
-            <a:r>
-              <a:rPr lang="en-US" sz="1450" dirty="0">
-                <a:solidFill>
-                  <a:srgbClr val="000000"/>
-                </a:solidFill>
-                <a:latin typeface="Arial" pitchFamily="34" charset="0"/>
-                <a:ea typeface="Arial" pitchFamily="34" charset="-122"/>
-                <a:cs typeface="Arial" pitchFamily="34" charset="-120"/>
-              </a:rPr>
-              <a:t>The sacred does not come into focus by cleverness or credentials — it comes into focus through the obedience of faith (Rom 1:5). </a:t>
-            </a:r>
-            <a:pPr algn="l" indent="0" marL="0">
-              <a:buNone/>
-            </a:pPr>
-            <a:r>
-              <a:rPr lang="en-US" sz="1400" i="1" dirty="0">
-                <a:solidFill>
-                  <a:srgbClr val="000000"/>
-                </a:solidFill>
-                <a:latin typeface="Arial" pitchFamily="34" charset="0"/>
-                <a:ea typeface="Arial" pitchFamily="34" charset="-122"/>
-                <a:cs typeface="Arial" pitchFamily="34" charset="-120"/>
-              </a:rPr>
               <a:t>The Berean method is not human technique added to Scripture; it is the Spirit-given eye, exercised.</a:t>
             </a:r>
-            <a:endParaRPr lang="en-US" sz="1600" dirty="0"/>
+            <a:endParaRPr lang="en-US" sz="2000" dirty="0"/>
           </a:p>
         </p:txBody>
       </p:sp>
@@ -2051,26 +1965,26 @@
               <p:cTn id="2" dur="indefinite" nodeType="mainSeq">
                 <p:childTnLst>
                   <p:par>
-                    <p:cTn id="7" fill="hold">
+                    <p:cTn id="3" fill="hold">
                       <p:stCondLst>
                         <p:cond delay="indefinite"/>
                       </p:stCondLst>
                       <p:childTnLst>
                         <p:par>
-                          <p:cTn id="8" fill="hold">
+                          <p:cTn id="4" fill="hold">
                             <p:stCondLst>
                               <p:cond delay="0"/>
                             </p:stCondLst>
                             <p:childTnLst>
                               <p:par>
-                                <p:cTn id="3" presetID="42" presetClass="entr" presetSubtype="0" fill="hold" grpId="0" nodeType="clickEffect">
+                                <p:cTn id="5" presetID="42" presetClass="entr" presetSubtype="0" fill="hold" nodeType="clickEffect">
                                   <p:stCondLst>
                                     <p:cond delay="0"/>
                                   </p:stCondLst>
                                   <p:childTnLst>
                                     <p:set>
                                       <p:cBhvr>
-                                        <p:cTn id="4" dur="1" fill="hold">
+                                        <p:cTn id="6" dur="1" fill="hold">
                                           <p:stCondLst>
                                             <p:cond delay="0"/>
                                           </p:stCondLst>
@@ -2088,7 +2002,7 @@
                                     </p:set>
                                     <p:animEffect transition="in" filter="fade">
                                       <p:cBhvr>
-                                        <p:cTn id="5" dur="1000"/>
+                                        <p:cTn id="7" dur="1000"/>
                                         <p:tgtEl>
                                           <p:spTgt spid="4"/>
                                         </p:tgtEl>
@@ -2096,7 +2010,7 @@
                                     </p:animEffect>
                                     <p:anim calcmode="lin" valueType="num">
                                       <p:cBhvr>
-                                        <p:cTn id="6" dur="1000" fill="hold"/>
+                                        <p:cTn id="8" dur="1000" fill="hold"/>
                                         <p:tgtEl>
                                           <p:spTgt spid="4"/>
                                         </p:tgtEl>
@@ -2127,26 +2041,26 @@
                     </p:cTn>
                   </p:par>
                   <p:par>
-                    <p:cTn id="13" fill="hold">
+                    <p:cTn id="9" fill="hold">
                       <p:stCondLst>
                         <p:cond delay="indefinite"/>
                       </p:stCondLst>
                       <p:childTnLst>
                         <p:par>
-                          <p:cTn id="14" fill="hold">
+                          <p:cTn id="10" fill="hold">
                             <p:stCondLst>
                               <p:cond delay="0"/>
                             </p:stCondLst>
                             <p:childTnLst>
                               <p:par>
-                                <p:cTn id="9" presetID="42" presetClass="entr" presetSubtype="0" fill="hold" grpId="0" nodeType="clickEffect">
+                                <p:cTn id="11" presetID="42" presetClass="entr" presetSubtype="0" fill="hold" nodeType="clickEffect">
                                   <p:stCondLst>
                                     <p:cond delay="0"/>
                                   </p:stCondLst>
                                   <p:childTnLst>
                                     <p:set>
                                       <p:cBhvr>
-                                        <p:cTn id="10" dur="1" fill="hold">
+                                        <p:cTn id="12" dur="1" fill="hold">
                                           <p:stCondLst>
                                             <p:cond delay="0"/>
                                           </p:stCondLst>
@@ -2164,7 +2078,7 @@
                                     </p:set>
                                     <p:animEffect transition="in" filter="fade">
                                       <p:cBhvr>
-                                        <p:cTn id="11" dur="1000"/>
+                                        <p:cTn id="13" dur="1000"/>
                                         <p:tgtEl>
                                           <p:spTgt spid="5"/>
                                         </p:tgtEl>
@@ -2172,7 +2086,7 @@
                                     </p:animEffect>
                                     <p:anim calcmode="lin" valueType="num">
                                       <p:cBhvr>
-                                        <p:cTn id="12" dur="1000" fill="hold"/>
+                                        <p:cTn id="14" dur="1000" fill="hold"/>
                                         <p:tgtEl>
                                           <p:spTgt spid="5"/>
                                         </p:tgtEl>
@@ -2203,26 +2117,26 @@
                     </p:cTn>
                   </p:par>
                   <p:par>
-                    <p:cTn id="19" fill="hold">
+                    <p:cTn id="15" fill="hold">
                       <p:stCondLst>
                         <p:cond delay="indefinite"/>
                       </p:stCondLst>
                       <p:childTnLst>
                         <p:par>
-                          <p:cTn id="20" fill="hold">
+                          <p:cTn id="16" fill="hold">
                             <p:stCondLst>
                               <p:cond delay="0"/>
                             </p:stCondLst>
                             <p:childTnLst>
                               <p:par>
-                                <p:cTn id="15" presetID="42" presetClass="entr" presetSubtype="0" fill="hold" grpId="0" nodeType="clickEffect">
+                                <p:cTn id="17" presetID="42" presetClass="entr" presetSubtype="0" fill="hold" nodeType="clickEffect">
                                   <p:stCondLst>
                                     <p:cond delay="0"/>
                                   </p:stCondLst>
                                   <p:childTnLst>
                                     <p:set>
                                       <p:cBhvr>
-                                        <p:cTn id="16" dur="1" fill="hold">
+                                        <p:cTn id="18" dur="1" fill="hold">
                                           <p:stCondLst>
                                             <p:cond delay="0"/>
                                           </p:stCondLst>
@@ -2240,7 +2154,7 @@
                                     </p:set>
                                     <p:animEffect transition="in" filter="fade">
                                       <p:cBhvr>
-                                        <p:cTn id="17" dur="1000"/>
+                                        <p:cTn id="19" dur="1000"/>
                                         <p:tgtEl>
                                           <p:spTgt spid="6"/>
                                         </p:tgtEl>
@@ -2248,7 +2162,7 @@
                                     </p:animEffect>
                                     <p:anim calcmode="lin" valueType="num">
                                       <p:cBhvr>
-                                        <p:cTn id="18" dur="1000" fill="hold"/>
+                                        <p:cTn id="20" dur="1000" fill="hold"/>
                                         <p:tgtEl>
                                           <p:spTgt spid="6"/>
                                         </p:tgtEl>
@@ -2279,26 +2193,26 @@
                     </p:cTn>
                   </p:par>
                   <p:par>
-                    <p:cTn id="25" fill="hold">
+                    <p:cTn id="21" fill="hold">
                       <p:stCondLst>
                         <p:cond delay="indefinite"/>
                       </p:stCondLst>
                       <p:childTnLst>
                         <p:par>
-                          <p:cTn id="26" fill="hold">
+                          <p:cTn id="22" fill="hold">
                             <p:stCondLst>
                               <p:cond delay="0"/>
                             </p:stCondLst>
                             <p:childTnLst>
                               <p:par>
-                                <p:cTn id="21" presetID="42" presetClass="entr" presetSubtype="0" fill="hold" grpId="0" nodeType="clickEffect">
+                                <p:cTn id="23" presetID="42" presetClass="entr" presetSubtype="0" fill="hold" nodeType="clickEffect">
                                   <p:stCondLst>
                                     <p:cond delay="0"/>
                                   </p:stCondLst>
                                   <p:childTnLst>
                                     <p:set>
                                       <p:cBhvr>
-                                        <p:cTn id="22" dur="1" fill="hold">
+                                        <p:cTn id="24" dur="1" fill="hold">
                                           <p:stCondLst>
                                             <p:cond delay="0"/>
                                           </p:stCondLst>
@@ -2316,7 +2230,7 @@
                                     </p:set>
                                     <p:animEffect transition="in" filter="fade">
                                       <p:cBhvr>
-                                        <p:cTn id="23" dur="1000"/>
+                                        <p:cTn id="25" dur="1000"/>
                                         <p:tgtEl>
                                           <p:spTgt spid="7"/>
                                         </p:tgtEl>
@@ -2324,7 +2238,7 @@
                                     </p:animEffect>
                                     <p:anim calcmode="lin" valueType="num">
                                       <p:cBhvr>
-                                        <p:cTn id="24" dur="1000" fill="hold"/>
+                                        <p:cTn id="26" dur="1000" fill="hold"/>
                                         <p:tgtEl>
                                           <p:spTgt spid="7"/>
                                         </p:tgtEl>
@@ -2417,7 +2331,7 @@
           <a:bodyPr wrap="square" lIns="0" tIns="0" rIns="0" bIns="0" rtlCol="0" anchor="t"/>
           <a:lstStyle/>
           <a:p>
-            <a:pPr algn="l" indent="0" marL="0">
+            <a:pPr marL="0" indent="0" algn="l">
               <a:buNone/>
             </a:pPr>
             <a:r>
@@ -2456,11 +2370,11 @@
           <a:bodyPr wrap="square" lIns="0" tIns="0" rIns="0" bIns="0" rtlCol="0" anchor="t"/>
           <a:lstStyle/>
           <a:p>
-            <a:pPr algn="l" indent="0" marL="0">
+            <a:pPr marL="0" indent="0" algn="l">
               <a:buNone/>
             </a:pPr>
             <a:r>
-              <a:rPr lang="en-US" sz="1300" b="1" dirty="0">
+              <a:rPr lang="en-US" sz="2000" b="1" dirty="0">
                 <a:solidFill>
                   <a:srgbClr val="4F81BD"/>
                 </a:solidFill>
@@ -2470,7 +2384,7 @@
               </a:rPr>
               <a:t>Acts 17:11 — and Luke calls them noble for it</a:t>
             </a:r>
-            <a:endParaRPr lang="en-US" sz="1600" dirty="0"/>
+            <a:endParaRPr lang="en-US" sz="2800" dirty="0"/>
           </a:p>
         </p:txBody>
       </p:sp>
@@ -2495,11 +2409,11 @@
           <a:bodyPr wrap="square" lIns="0" tIns="0" rIns="0" bIns="0" rtlCol="0" anchor="t"/>
           <a:lstStyle/>
           <a:p>
-            <a:pPr algn="l" indent="0" marL="0">
+            <a:pPr marL="0" indent="0" algn="l">
               <a:buNone/>
             </a:pPr>
             <a:r>
-              <a:rPr lang="en-US" sz="1500" dirty="0">
+              <a:rPr lang="en-US" dirty="0">
                 <a:solidFill>
                   <a:srgbClr val="000000"/>
                 </a:solidFill>
@@ -2509,11 +2423,8 @@
               </a:rPr>
               <a:t>Paul preaches in Berea. Luke’s verdict on the hearers is one word: </a:t>
             </a:r>
-            <a:pPr algn="l" indent="0" marL="0">
-              <a:buNone/>
-            </a:pPr>
-            <a:r>
-              <a:rPr lang="en-US" sz="1500" b="1" dirty="0">
+            <a:r>
+              <a:rPr lang="en-US" b="1" dirty="0">
                 <a:solidFill>
                   <a:srgbClr val="1F497D"/>
                 </a:solidFill>
@@ -2521,13 +2432,33 @@
                 <a:ea typeface="Arial" pitchFamily="34" charset="-122"/>
                 <a:cs typeface="Arial" pitchFamily="34" charset="-120"/>
               </a:rPr>
-              <a:t>“more open-minded” — literally more noble</a:t>
-            </a:r>
-            <a:pPr algn="l" indent="0" marL="0">
-              <a:buNone/>
-            </a:pPr>
-            <a:r>
-              <a:rPr lang="en-US" sz="1500" dirty="0">
+              <a:t>“more open-minded” </a:t>
+            </a:r>
+            <a:r>
+              <a:rPr lang="en-US" b="1" dirty="0">
+                <a:solidFill>
+                  <a:srgbClr val="1F497D"/>
+                </a:solidFill>
+                <a:latin typeface="Arial" pitchFamily="34" charset="0"/>
+                <a:ea typeface="Arial" pitchFamily="34" charset="-122"/>
+                <a:cs typeface="Arial" pitchFamily="34" charset="-120"/>
+                <a:sym typeface="Wingdings" pitchFamily="2" charset="2"/>
+              </a:rPr>
+              <a:t></a:t>
+            </a:r>
+            <a:r>
+              <a:rPr lang="en-US" b="1" dirty="0">
+                <a:solidFill>
+                  <a:srgbClr val="1F497D"/>
+                </a:solidFill>
+                <a:latin typeface="Arial" pitchFamily="34" charset="0"/>
+                <a:ea typeface="Arial" pitchFamily="34" charset="-122"/>
+                <a:cs typeface="Arial" pitchFamily="34" charset="-120"/>
+              </a:rPr>
+              <a:t> literally more noble</a:t>
+            </a:r>
+            <a:r>
+              <a:rPr lang="en-US" dirty="0">
                 <a:solidFill>
                   <a:srgbClr val="000000"/>
                 </a:solidFill>
@@ -2537,7 +2468,7 @@
               </a:rPr>
               <a:t> than the Thessalonians. Why? Two habits, held together.</a:t>
             </a:r>
-            <a:endParaRPr lang="en-US" sz="1600" dirty="0"/>
+            <a:endParaRPr lang="en-US" sz="2000" dirty="0"/>
           </a:p>
         </p:txBody>
       </p:sp>
@@ -2569,6 +2500,13 @@
             <a:prstDash val="solid"/>
           </a:ln>
         </p:spPr>
+        <p:txBody>
+          <a:bodyPr/>
+          <a:lstStyle/>
+          <a:p>
+            <a:endParaRPr lang="en-US"/>
+          </a:p>
+        </p:txBody>
       </p:sp>
       <p:sp>
         <p:nvSpPr>
@@ -2591,11 +2529,11 @@
           <a:bodyPr wrap="square" lIns="0" tIns="0" rIns="0" bIns="0" rtlCol="0" anchor="t"/>
           <a:lstStyle/>
           <a:p>
-            <a:pPr algn="l" indent="0" marL="0">
+            <a:pPr marL="0" indent="0" algn="l">
               <a:buNone/>
             </a:pPr>
             <a:r>
-              <a:rPr lang="en-US" sz="1600" b="1" dirty="0">
+              <a:rPr lang="en-US" sz="2400" b="1" dirty="0">
                 <a:solidFill>
                   <a:srgbClr val="FFFFFF"/>
                 </a:solidFill>
@@ -2606,11 +2544,8 @@
               <a:t>EAGERLY RECEIVED
 </a:t>
             </a:r>
-            <a:pPr algn="l" indent="0" marL="0">
-              <a:buNone/>
-            </a:pPr>
-            <a:r>
-              <a:rPr lang="en-US" sz="1300" b="1" dirty="0">
+            <a:r>
+              <a:rPr lang="en-US" b="1" dirty="0">
                 <a:solidFill>
                   <a:srgbClr val="C9A227"/>
                 </a:solidFill>
@@ -2621,11 +2556,8 @@
               <a:t>Soft heart.
 </a:t>
             </a:r>
-            <a:pPr algn="l" indent="0" marL="0">
-              <a:buNone/>
-            </a:pPr>
-            <a:r>
-              <a:rPr lang="en-US" sz="1300" dirty="0">
+            <a:r>
+              <a:rPr lang="en-US" dirty="0">
                 <a:solidFill>
                   <a:srgbClr val="FFFFFF"/>
                 </a:solidFill>
@@ -2635,7 +2567,7 @@
               </a:rPr>
               <a:t>Not arms crossed. Not “impress me.” They WANTED it to be true — appetite, humility, readiness to receive.</a:t>
             </a:r>
-            <a:endParaRPr lang="en-US" sz="1600" dirty="0"/>
+            <a:endParaRPr lang="en-US" sz="2400" dirty="0"/>
           </a:p>
         </p:txBody>
       </p:sp>
@@ -2667,6 +2599,13 @@
             <a:prstDash val="solid"/>
           </a:ln>
         </p:spPr>
+        <p:txBody>
+          <a:bodyPr/>
+          <a:lstStyle/>
+          <a:p>
+            <a:endParaRPr lang="en-US"/>
+          </a:p>
+        </p:txBody>
       </p:sp>
       <p:sp>
         <p:nvSpPr>
@@ -2689,11 +2628,11 @@
           <a:bodyPr wrap="square" lIns="0" tIns="0" rIns="0" bIns="0" rtlCol="0" anchor="t"/>
           <a:lstStyle/>
           <a:p>
-            <a:pPr algn="l" indent="0" marL="0">
+            <a:pPr marL="0" indent="0" algn="l">
               <a:buNone/>
             </a:pPr>
             <a:r>
-              <a:rPr lang="en-US" sz="1600" b="1" dirty="0">
+              <a:rPr lang="en-US" sz="2400" b="1" dirty="0">
                 <a:solidFill>
                   <a:srgbClr val="FFFFFF"/>
                 </a:solidFill>
@@ -2704,11 +2643,8 @@
               <a:t>EXAMINED DAILY
 </a:t>
             </a:r>
-            <a:pPr algn="l" indent="0" marL="0">
-              <a:buNone/>
-            </a:pPr>
-            <a:r>
-              <a:rPr lang="en-US" sz="1300" b="1" dirty="0">
+            <a:r>
+              <a:rPr lang="en-US" b="1" dirty="0">
                 <a:solidFill>
                   <a:srgbClr val="C9A227"/>
                 </a:solidFill>
@@ -2719,11 +2655,8 @@
               <a:t>Hard questions.
 </a:t>
             </a:r>
-            <a:pPr algn="l" indent="0" marL="0">
-              <a:buNone/>
-            </a:pPr>
-            <a:r>
-              <a:rPr lang="en-US" sz="1300" dirty="0">
+            <a:r>
+              <a:rPr lang="en-US" dirty="0">
                 <a:solidFill>
                   <a:srgbClr val="FFFFFF"/>
                 </a:solidFill>
@@ -2733,7 +2666,7 @@
               </a:rPr>
               <a:t>They checked the message against Scripture — every day. They fact-checked an APOSTLE. Luke doesn’t scold them; he commends them.</a:t>
             </a:r>
-            <a:endParaRPr lang="en-US" sz="1600" dirty="0"/>
+            <a:endParaRPr lang="en-US" sz="2400" dirty="0"/>
           </a:p>
         </p:txBody>
       </p:sp>
@@ -2756,6 +2689,13 @@
           </a:solidFill>
           <a:ln/>
         </p:spPr>
+        <p:txBody>
+          <a:bodyPr/>
+          <a:lstStyle/>
+          <a:p>
+            <a:endParaRPr lang="en-US"/>
+          </a:p>
+        </p:txBody>
       </p:sp>
       <p:sp>
         <p:nvSpPr>
@@ -2766,7 +2706,7 @@
         <p:spPr>
           <a:xfrm>
             <a:off x="365760" y="4251960"/>
-            <a:ext cx="8412480" cy="960120"/>
+            <a:ext cx="8412480" cy="1367028"/>
           </a:xfrm>
           <a:prstGeom prst="rect">
             <a:avLst/>
@@ -2778,11 +2718,11 @@
           <a:bodyPr wrap="square" lIns="0" tIns="0" rIns="0" bIns="0" rtlCol="0" anchor="t"/>
           <a:lstStyle/>
           <a:p>
-            <a:pPr algn="l" indent="0" marL="0">
+            <a:pPr marL="0" indent="0" algn="l">
               <a:buNone/>
             </a:pPr>
             <a:r>
-              <a:rPr lang="en-US" sz="1600" b="1" dirty="0">
+              <a:rPr lang="en-US" b="1" dirty="0">
                 <a:solidFill>
                   <a:srgbClr val="1F497D"/>
                 </a:solidFill>
@@ -2793,11 +2733,105 @@
               <a:t>Most of us fail on exactly one side.
 </a:t>
             </a:r>
-            <a:pPr algn="l" indent="0" marL="0">
+            <a:r>
+              <a:rPr lang="en-US" dirty="0">
+                <a:solidFill>
+                  <a:srgbClr val="000000"/>
+                </a:solidFill>
+                <a:latin typeface="Arial" pitchFamily="34" charset="0"/>
+                <a:ea typeface="Arial" pitchFamily="34" charset="-122"/>
+                <a:cs typeface="Arial" pitchFamily="34" charset="-120"/>
+              </a:rPr>
+              <a:t>•  All heart, no examination </a:t>
+            </a:r>
+            <a:r>
+              <a:rPr lang="en-US" dirty="0">
+                <a:solidFill>
+                  <a:srgbClr val="000000"/>
+                </a:solidFill>
+                <a:latin typeface="Arial" pitchFamily="34" charset="0"/>
+                <a:ea typeface="Arial" pitchFamily="34" charset="-122"/>
+                <a:cs typeface="Arial" pitchFamily="34" charset="-120"/>
+                <a:sym typeface="Wingdings" pitchFamily="2" charset="2"/>
+              </a:rPr>
+              <a:t></a:t>
+            </a:r>
+            <a:r>
+              <a:rPr lang="en-US" dirty="0">
+                <a:solidFill>
+                  <a:srgbClr val="000000"/>
+                </a:solidFill>
+                <a:latin typeface="Arial" pitchFamily="34" charset="0"/>
+                <a:ea typeface="Arial" pitchFamily="34" charset="-122"/>
+                <a:cs typeface="Arial" pitchFamily="34" charset="-120"/>
+              </a:rPr>
+              <a:t> carried along by whoever preached last; every wind of doctrine.
+•  All examination, no heart </a:t>
+            </a:r>
+            <a:r>
+              <a:rPr lang="en-US" dirty="0">
+                <a:solidFill>
+                  <a:srgbClr val="000000"/>
+                </a:solidFill>
+                <a:latin typeface="Arial" pitchFamily="34" charset="0"/>
+                <a:ea typeface="Arial" pitchFamily="34" charset="-122"/>
+                <a:cs typeface="Arial" pitchFamily="34" charset="-120"/>
+                <a:sym typeface="Wingdings" pitchFamily="2" charset="2"/>
+              </a:rPr>
+              <a:t></a:t>
+            </a:r>
+            <a:r>
+              <a:rPr lang="en-US" dirty="0">
+                <a:solidFill>
+                  <a:srgbClr val="000000"/>
+                </a:solidFill>
+                <a:latin typeface="Arial" pitchFamily="34" charset="0"/>
+                <a:ea typeface="Arial" pitchFamily="34" charset="-122"/>
+                <a:cs typeface="Arial" pitchFamily="34" charset="-120"/>
+              </a:rPr>
+              <a:t> suspicion as a personality; nothing ever lands or changes us</a:t>
+            </a:r>
+            <a:r>
+              <a:rPr lang="en-US" sz="1600" dirty="0">
+                <a:solidFill>
+                  <a:srgbClr val="000000"/>
+                </a:solidFill>
+                <a:latin typeface="Arial" pitchFamily="34" charset="0"/>
+                <a:ea typeface="Arial" pitchFamily="34" charset="-122"/>
+                <a:cs typeface="Arial" pitchFamily="34" charset="-120"/>
+              </a:rPr>
+              <a:t>.</a:t>
+            </a:r>
+            <a:endParaRPr lang="en-US" dirty="0"/>
+          </a:p>
+        </p:txBody>
+      </p:sp>
+      <p:sp>
+        <p:nvSpPr>
+          <p:cNvPr id="11" name="b4"/>
+          <p:cNvSpPr txBox="1"/>
+          <p:nvPr/>
+        </p:nvSpPr>
+        <p:spPr>
+          <a:xfrm>
+            <a:off x="365760" y="5728716"/>
+            <a:ext cx="8412480" cy="868680"/>
+          </a:xfrm>
+          <a:prstGeom prst="rect">
+            <a:avLst/>
+          </a:prstGeom>
+          <a:noFill/>
+          <a:ln/>
+        </p:spPr>
+        <p:txBody>
+          <a:bodyPr wrap="square" lIns="0" tIns="0" rIns="0" bIns="0" rtlCol="0" anchor="t"/>
+          <a:lstStyle/>
+          <a:p>
+            <a:pPr marL="0" indent="0" algn="l">
               <a:buNone/>
             </a:pPr>
             <a:r>
-              <a:rPr lang="en-US" sz="1400" dirty="0">
+              <a:rPr lang="en-US" dirty="0">
                 <a:solidFill>
                   <a:srgbClr val="000000"/>
                 </a:solidFill>
@@ -2805,14 +2839,21 @@
                 <a:ea typeface="Arial" pitchFamily="34" charset="-122"/>
                 <a:cs typeface="Arial" pitchFamily="34" charset="-120"/>
               </a:rPr>
-              <a:t>•  All heart, no examination — carried along by whoever preached last; every wind of doctrine.
-</a:t>
-            </a:r>
-            <a:pPr algn="l" indent="0" marL="0">
-              <a:buNone/>
-            </a:pPr>
-            <a:r>
-              <a:rPr lang="en-US" sz="1400" dirty="0">
+              <a:t>The noble hearer holds both at once: </a:t>
+            </a:r>
+            <a:r>
+              <a:rPr lang="en-US" sz="2000" b="1" u="sng" dirty="0">
+                <a:solidFill>
+                  <a:srgbClr val="1F497D"/>
+                </a:solidFill>
+                <a:latin typeface="Arial" pitchFamily="34" charset="0"/>
+                <a:ea typeface="Arial" pitchFamily="34" charset="-122"/>
+                <a:cs typeface="Arial" pitchFamily="34" charset="-120"/>
+              </a:rPr>
+              <a:t>ready to believe, unwilling to be fooled.</a:t>
+            </a:r>
+            <a:r>
+              <a:rPr lang="en-US" sz="1600" i="1" dirty="0">
                 <a:solidFill>
                   <a:srgbClr val="000000"/>
                 </a:solidFill>
@@ -2820,38 +2861,10 @@
                 <a:ea typeface="Arial" pitchFamily="34" charset="-122"/>
                 <a:cs typeface="Arial" pitchFamily="34" charset="-120"/>
               </a:rPr>
-              <a:t>•  All examination, no heart — suspicion as a personality; nothing ever lands or changes us.</a:t>
-            </a:r>
-            <a:endParaRPr lang="en-US" sz="1600" dirty="0"/>
-          </a:p>
-        </p:txBody>
-      </p:sp>
-      <p:sp>
-        <p:nvSpPr>
-          <p:cNvPr id="11" name="b4"/>
-          <p:cNvSpPr txBox="1"/>
-          <p:nvPr/>
-        </p:nvSpPr>
-        <p:spPr>
-          <a:xfrm>
-            <a:off x="365760" y="5349240"/>
-            <a:ext cx="8412480" cy="868680"/>
-          </a:xfrm>
-          <a:prstGeom prst="rect">
-            <a:avLst/>
-          </a:prstGeom>
-          <a:noFill/>
-          <a:ln/>
-        </p:spPr>
-        <p:txBody>
-          <a:bodyPr wrap="square" lIns="0" tIns="0" rIns="0" bIns="0" rtlCol="0" anchor="t"/>
-          <a:lstStyle/>
-          <a:p>
-            <a:pPr algn="l" indent="0" marL="0">
-              <a:buNone/>
-            </a:pPr>
-            <a:r>
-              <a:rPr lang="en-US" sz="1500" dirty="0">
+              <a:t>  </a:t>
+            </a:r>
+            <a:r>
+              <a:rPr lang="en-US" i="1" dirty="0">
                 <a:solidFill>
                   <a:srgbClr val="000000"/>
                 </a:solidFill>
@@ -2859,37 +2872,9 @@
                 <a:ea typeface="Arial" pitchFamily="34" charset="-122"/>
                 <a:cs typeface="Arial" pitchFamily="34" charset="-120"/>
               </a:rPr>
-              <a:t>The noble hearer holds both at once: </a:t>
-            </a:r>
-            <a:pPr algn="l" indent="0" marL="0">
-              <a:buNone/>
-            </a:pPr>
-            <a:r>
-              <a:rPr lang="en-US" sz="1700" b="1" u="sng" dirty="0">
-                <a:solidFill>
-                  <a:srgbClr val="1F497D"/>
-                </a:solidFill>
-                <a:latin typeface="Arial" pitchFamily="34" charset="0"/>
-                <a:ea typeface="Arial" pitchFamily="34" charset="-122"/>
-                <a:cs typeface="Arial" pitchFamily="34" charset="-120"/>
-              </a:rPr>
-              <a:t>ready to believe, unwilling to be fooled.</a:t>
-            </a:r>
-            <a:pPr algn="l" indent="0" marL="0">
-              <a:buNone/>
-            </a:pPr>
-            <a:r>
-              <a:rPr lang="en-US" sz="1350" i="1" dirty="0">
-                <a:solidFill>
-                  <a:srgbClr val="000000"/>
-                </a:solidFill>
-                <a:latin typeface="Arial" pitchFamily="34" charset="0"/>
-                <a:ea typeface="Arial" pitchFamily="34" charset="-122"/>
-                <a:cs typeface="Arial" pitchFamily="34" charset="-120"/>
-              </a:rPr>
-              <a:t>  Eager because the truth is precious; examining because it is precious.</a:t>
-            </a:r>
-            <a:endParaRPr lang="en-US" sz="1600" dirty="0"/>
+              <a:t>Eager because the truth is precious; examining because it is precious.</a:t>
+            </a:r>
+            <a:endParaRPr lang="en-US" sz="2000" dirty="0"/>
           </a:p>
         </p:txBody>
       </p:sp>
@@ -2907,26 +2892,26 @@
               <p:cTn id="2" dur="indefinite" nodeType="mainSeq">
                 <p:childTnLst>
                   <p:par>
-                    <p:cTn id="7" fill="hold">
+                    <p:cTn id="3" fill="hold">
                       <p:stCondLst>
                         <p:cond delay="indefinite"/>
                       </p:stCondLst>
                       <p:childTnLst>
                         <p:par>
-                          <p:cTn id="8" fill="hold">
+                          <p:cTn id="4" fill="hold">
                             <p:stCondLst>
                               <p:cond delay="0"/>
                             </p:stCondLst>
                             <p:childTnLst>
                               <p:par>
-                                <p:cTn id="3" presetID="42" presetClass="entr" presetSubtype="0" fill="hold" grpId="0" nodeType="clickEffect">
+                                <p:cTn id="5" presetID="42" presetClass="entr" presetSubtype="0" fill="hold" nodeType="clickEffect">
                                   <p:stCondLst>
                                     <p:cond delay="0"/>
                                   </p:stCondLst>
                                   <p:childTnLst>
                                     <p:set>
                                       <p:cBhvr>
-                                        <p:cTn id="4" dur="1" fill="hold">
+                                        <p:cTn id="6" dur="1" fill="hold">
                                           <p:stCondLst>
                                             <p:cond delay="0"/>
                                           </p:stCondLst>
@@ -2944,7 +2929,7 @@
                                     </p:set>
                                     <p:animEffect transition="in" filter="fade">
                                       <p:cBhvr>
-                                        <p:cTn id="5" dur="1000"/>
+                                        <p:cTn id="7" dur="1000"/>
                                         <p:tgtEl>
                                           <p:spTgt spid="4"/>
                                         </p:tgtEl>
@@ -2952,7 +2937,7 @@
                                     </p:animEffect>
                                     <p:anim calcmode="lin" valueType="num">
                                       <p:cBhvr>
-                                        <p:cTn id="6" dur="1000" fill="hold"/>
+                                        <p:cTn id="8" dur="1000" fill="hold"/>
                                         <p:tgtEl>
                                           <p:spTgt spid="4"/>
                                         </p:tgtEl>
@@ -2983,26 +2968,26 @@
                     </p:cTn>
                   </p:par>
                   <p:par>
-                    <p:cTn id="17" fill="hold">
+                    <p:cTn id="9" fill="hold">
                       <p:stCondLst>
                         <p:cond delay="indefinite"/>
                       </p:stCondLst>
                       <p:childTnLst>
                         <p:par>
-                          <p:cTn id="18" fill="hold">
+                          <p:cTn id="10" fill="hold">
                             <p:stCondLst>
                               <p:cond delay="0"/>
                             </p:stCondLst>
                             <p:childTnLst>
                               <p:par>
-                                <p:cTn id="9" presetID="42" presetClass="entr" presetSubtype="0" fill="hold" grpId="0" nodeType="clickEffect">
+                                <p:cTn id="11" presetID="42" presetClass="entr" presetSubtype="0" fill="hold" nodeType="clickEffect">
                                   <p:stCondLst>
                                     <p:cond delay="0"/>
                                   </p:stCondLst>
                                   <p:childTnLst>
                                     <p:set>
                                       <p:cBhvr>
-                                        <p:cTn id="10" dur="1" fill="hold">
+                                        <p:cTn id="12" dur="1" fill="hold">
                                           <p:stCondLst>
                                             <p:cond delay="0"/>
                                           </p:stCondLst>
@@ -3020,7 +3005,7 @@
                                     </p:set>
                                     <p:animEffect transition="in" filter="fade">
                                       <p:cBhvr>
-                                        <p:cTn id="11" dur="1000"/>
+                                        <p:cTn id="13" dur="1000"/>
                                         <p:tgtEl>
                                           <p:spTgt spid="5"/>
                                         </p:tgtEl>
@@ -3028,7 +3013,7 @@
                                     </p:animEffect>
                                     <p:anim calcmode="lin" valueType="num">
                                       <p:cBhvr>
-                                        <p:cTn id="12" dur="1000" fill="hold"/>
+                                        <p:cTn id="14" dur="1000" fill="hold"/>
                                         <p:tgtEl>
                                           <p:spTgt spid="5"/>
                                         </p:tgtEl>
@@ -3053,14 +3038,14 @@
                                 </p:cTn>
                               </p:par>
                               <p:par>
-                                <p:cTn id="13" presetID="42" presetClass="entr" presetSubtype="0" fill="hold" grpId="0" nodeType="withEffect">
+                                <p:cTn id="15" presetID="42" presetClass="entr" presetSubtype="0" fill="hold" nodeType="withEffect">
                                   <p:stCondLst>
                                     <p:cond delay="0"/>
                                   </p:stCondLst>
                                   <p:childTnLst>
                                     <p:set>
                                       <p:cBhvr>
-                                        <p:cTn id="14" dur="1" fill="hold">
+                                        <p:cTn id="16" dur="1" fill="hold">
                                           <p:stCondLst>
                                             <p:cond delay="0"/>
                                           </p:stCondLst>
@@ -3078,7 +3063,7 @@
                                     </p:set>
                                     <p:animEffect transition="in" filter="fade">
                                       <p:cBhvr>
-                                        <p:cTn id="15" dur="1000"/>
+                                        <p:cTn id="17" dur="1000"/>
                                         <p:tgtEl>
                                           <p:spTgt spid="6"/>
                                         </p:tgtEl>
@@ -3086,7 +3071,7 @@
                                     </p:animEffect>
                                     <p:anim calcmode="lin" valueType="num">
                                       <p:cBhvr>
-                                        <p:cTn id="16" dur="1000" fill="hold"/>
+                                        <p:cTn id="18" dur="1000" fill="hold"/>
                                         <p:tgtEl>
                                           <p:spTgt spid="6"/>
                                         </p:tgtEl>
@@ -3117,26 +3102,26 @@
                     </p:cTn>
                   </p:par>
                   <p:par>
-                    <p:cTn id="31" fill="hold">
+                    <p:cTn id="19" fill="hold">
                       <p:stCondLst>
                         <p:cond delay="indefinite"/>
                       </p:stCondLst>
                       <p:childTnLst>
                         <p:par>
-                          <p:cTn id="32" fill="hold">
+                          <p:cTn id="20" fill="hold">
                             <p:stCondLst>
                               <p:cond delay="0"/>
                             </p:stCondLst>
                             <p:childTnLst>
                               <p:par>
-                                <p:cTn id="19" presetID="42" presetClass="entr" presetSubtype="0" fill="hold" grpId="0" nodeType="clickEffect">
+                                <p:cTn id="21" presetID="42" presetClass="entr" presetSubtype="0" fill="hold" nodeType="clickEffect">
                                   <p:stCondLst>
                                     <p:cond delay="0"/>
                                   </p:stCondLst>
                                   <p:childTnLst>
                                     <p:set>
                                       <p:cBhvr>
-                                        <p:cTn id="20" dur="1" fill="hold">
+                                        <p:cTn id="22" dur="1" fill="hold">
                                           <p:stCondLst>
                                             <p:cond delay="0"/>
                                           </p:stCondLst>
@@ -3154,7 +3139,7 @@
                                     </p:set>
                                     <p:animEffect transition="in" filter="fade">
                                       <p:cBhvr>
-                                        <p:cTn id="21" dur="1000"/>
+                                        <p:cTn id="23" dur="1000"/>
                                         <p:tgtEl>
                                           <p:spTgt spid="9"/>
                                         </p:tgtEl>
@@ -3162,7 +3147,7 @@
                                     </p:animEffect>
                                     <p:anim calcmode="lin" valueType="num">
                                       <p:cBhvr>
-                                        <p:cTn id="22" dur="1000" fill="hold"/>
+                                        <p:cTn id="24" dur="1000" fill="hold"/>
                                         <p:tgtEl>
                                           <p:spTgt spid="9"/>
                                         </p:tgtEl>
@@ -3187,14 +3172,14 @@
                                 </p:cTn>
                               </p:par>
                               <p:par>
-                                <p:cTn id="23" presetID="42" presetClass="entr" presetSubtype="0" fill="hold" grpId="0" nodeType="withEffect">
+                                <p:cTn id="25" presetID="42" presetClass="entr" presetSubtype="0" fill="hold" nodeType="withEffect">
                                   <p:stCondLst>
                                     <p:cond delay="0"/>
                                   </p:stCondLst>
                                   <p:childTnLst>
                                     <p:set>
                                       <p:cBhvr>
-                                        <p:cTn id="24" dur="1" fill="hold">
+                                        <p:cTn id="26" dur="1" fill="hold">
                                           <p:stCondLst>
                                             <p:cond delay="0"/>
                                           </p:stCondLst>
@@ -3212,7 +3197,7 @@
                                     </p:set>
                                     <p:animEffect transition="in" filter="fade">
                                       <p:cBhvr>
-                                        <p:cTn id="25" dur="1000"/>
+                                        <p:cTn id="27" dur="1000"/>
                                         <p:tgtEl>
                                           <p:spTgt spid="7"/>
                                         </p:tgtEl>
@@ -3220,7 +3205,7 @@
                                     </p:animEffect>
                                     <p:anim calcmode="lin" valueType="num">
                                       <p:cBhvr>
-                                        <p:cTn id="26" dur="1000" fill="hold"/>
+                                        <p:cTn id="28" dur="1000" fill="hold"/>
                                         <p:tgtEl>
                                           <p:spTgt spid="7"/>
                                         </p:tgtEl>
@@ -3245,14 +3230,14 @@
                                 </p:cTn>
                               </p:par>
                               <p:par>
-                                <p:cTn id="27" presetID="42" presetClass="entr" presetSubtype="0" fill="hold" grpId="0" nodeType="withEffect">
+                                <p:cTn id="29" presetID="42" presetClass="entr" presetSubtype="0" fill="hold" nodeType="withEffect">
                                   <p:stCondLst>
                                     <p:cond delay="0"/>
                                   </p:stCondLst>
                                   <p:childTnLst>
                                     <p:set>
                                       <p:cBhvr>
-                                        <p:cTn id="28" dur="1" fill="hold">
+                                        <p:cTn id="30" dur="1" fill="hold">
                                           <p:stCondLst>
                                             <p:cond delay="0"/>
                                           </p:stCondLst>
@@ -3270,7 +3255,7 @@
                                     </p:set>
                                     <p:animEffect transition="in" filter="fade">
                                       <p:cBhvr>
-                                        <p:cTn id="29" dur="1000"/>
+                                        <p:cTn id="31" dur="1000"/>
                                         <p:tgtEl>
                                           <p:spTgt spid="8"/>
                                         </p:tgtEl>
@@ -3278,7 +3263,7 @@
                                     </p:animEffect>
                                     <p:anim calcmode="lin" valueType="num">
                                       <p:cBhvr>
-                                        <p:cTn id="30" dur="1000" fill="hold"/>
+                                        <p:cTn id="32" dur="1000" fill="hold"/>
                                         <p:tgtEl>
                                           <p:spTgt spid="8"/>
                                         </p:tgtEl>
@@ -3309,26 +3294,26 @@
                     </p:cTn>
                   </p:par>
                   <p:par>
-                    <p:cTn id="37" fill="hold">
+                    <p:cTn id="33" fill="hold">
                       <p:stCondLst>
                         <p:cond delay="indefinite"/>
                       </p:stCondLst>
                       <p:childTnLst>
                         <p:par>
-                          <p:cTn id="38" fill="hold">
+                          <p:cTn id="34" fill="hold">
                             <p:stCondLst>
                               <p:cond delay="0"/>
                             </p:stCondLst>
                             <p:childTnLst>
                               <p:par>
-                                <p:cTn id="33" presetID="42" presetClass="entr" presetSubtype="0" fill="hold" grpId="0" nodeType="clickEffect">
+                                <p:cTn id="35" presetID="42" presetClass="entr" presetSubtype="0" fill="hold" nodeType="clickEffect">
                                   <p:stCondLst>
                                     <p:cond delay="0"/>
                                   </p:stCondLst>
                                   <p:childTnLst>
                                     <p:set>
                                       <p:cBhvr>
-                                        <p:cTn id="34" dur="1" fill="hold">
+                                        <p:cTn id="36" dur="1" fill="hold">
                                           <p:stCondLst>
                                             <p:cond delay="0"/>
                                           </p:stCondLst>
@@ -3346,7 +3331,7 @@
                                     </p:set>
                                     <p:animEffect transition="in" filter="fade">
                                       <p:cBhvr>
-                                        <p:cTn id="35" dur="1000"/>
+                                        <p:cTn id="37" dur="1000"/>
                                         <p:tgtEl>
                                           <p:spTgt spid="10"/>
                                         </p:tgtEl>
@@ -3354,7 +3339,7 @@
                                     </p:animEffect>
                                     <p:anim calcmode="lin" valueType="num">
                                       <p:cBhvr>
-                                        <p:cTn id="36" dur="1000" fill="hold"/>
+                                        <p:cTn id="38" dur="1000" fill="hold"/>
                                         <p:tgtEl>
                                           <p:spTgt spid="10"/>
                                         </p:tgtEl>
@@ -3385,26 +3370,26 @@
                     </p:cTn>
                   </p:par>
                   <p:par>
-                    <p:cTn id="43" fill="hold">
+                    <p:cTn id="39" fill="hold">
                       <p:stCondLst>
                         <p:cond delay="indefinite"/>
                       </p:stCondLst>
                       <p:childTnLst>
                         <p:par>
-                          <p:cTn id="44" fill="hold">
+                          <p:cTn id="40" fill="hold">
                             <p:stCondLst>
                               <p:cond delay="0"/>
                             </p:stCondLst>
                             <p:childTnLst>
                               <p:par>
-                                <p:cTn id="39" presetID="42" presetClass="entr" presetSubtype="0" fill="hold" grpId="0" nodeType="clickEffect">
+                                <p:cTn id="41" presetID="42" presetClass="entr" presetSubtype="0" fill="hold" nodeType="clickEffect">
                                   <p:stCondLst>
                                     <p:cond delay="0"/>
                                   </p:stCondLst>
                                   <p:childTnLst>
                                     <p:set>
                                       <p:cBhvr>
-                                        <p:cTn id="40" dur="1" fill="hold">
+                                        <p:cTn id="42" dur="1" fill="hold">
                                           <p:stCondLst>
                                             <p:cond delay="0"/>
                                           </p:stCondLst>
@@ -3422,7 +3407,7 @@
                                     </p:set>
                                     <p:animEffect transition="in" filter="fade">
                                       <p:cBhvr>
-                                        <p:cTn id="41" dur="1000"/>
+                                        <p:cTn id="43" dur="1000"/>
                                         <p:tgtEl>
                                           <p:spTgt spid="11"/>
                                         </p:tgtEl>
@@ -3430,7 +3415,7 @@
                                     </p:animEffect>
                                     <p:anim calcmode="lin" valueType="num">
                                       <p:cBhvr>
-                                        <p:cTn id="42" dur="1000" fill="hold"/>
+                                        <p:cTn id="44" dur="1000" fill="hold"/>
                                         <p:tgtEl>
                                           <p:spTgt spid="11"/>
                                         </p:tgtEl>
@@ -3523,7 +3508,7 @@
           <a:bodyPr wrap="square" lIns="0" tIns="0" rIns="0" bIns="0" rtlCol="0" anchor="t"/>
           <a:lstStyle/>
           <a:p>
-            <a:pPr algn="l" indent="0" marL="0">
+            <a:pPr marL="0" indent="0" algn="l">
               <a:buNone/>
             </a:pPr>
             <a:r>
@@ -3562,11 +3547,11 @@
           <a:bodyPr wrap="square" lIns="0" tIns="0" rIns="0" bIns="0" rtlCol="0" anchor="t"/>
           <a:lstStyle/>
           <a:p>
-            <a:pPr algn="l" indent="0" marL="0">
+            <a:pPr marL="0" indent="0" algn="l">
               <a:buNone/>
             </a:pPr>
             <a:r>
-              <a:rPr lang="en-US" sz="1300" b="1" dirty="0">
+              <a:rPr lang="en-US" sz="2000" b="1" dirty="0">
                 <a:solidFill>
                   <a:srgbClr val="4F81BD"/>
                 </a:solidFill>
@@ -3576,7 +3561,7 @@
               </a:rPr>
               <a:t>Scripture’s standing instructions for testing every claim</a:t>
             </a:r>
-            <a:endParaRPr lang="en-US" sz="1600" dirty="0"/>
+            <a:endParaRPr lang="en-US" sz="2800" dirty="0"/>
           </a:p>
         </p:txBody>
       </p:sp>
@@ -3588,7 +3573,7 @@
         </p:nvSpPr>
         <p:spPr>
           <a:xfrm>
-            <a:off x="365760" y="1353312"/>
+            <a:off x="365760" y="1069848"/>
             <a:ext cx="1325880" cy="365760"/>
           </a:xfrm>
           <a:prstGeom prst="rect">
@@ -3599,6 +3584,13 @@
           </a:solidFill>
           <a:ln/>
         </p:spPr>
+        <p:txBody>
+          <a:bodyPr/>
+          <a:lstStyle/>
+          <a:p>
+            <a:endParaRPr lang="en-US" sz="3200"/>
+          </a:p>
+        </p:txBody>
       </p:sp>
       <p:sp>
         <p:nvSpPr>
@@ -3608,7 +3600,7 @@
         </p:nvSpPr>
         <p:spPr>
           <a:xfrm>
-            <a:off x="438912" y="1399032"/>
+            <a:off x="438912" y="1115568"/>
             <a:ext cx="1216152" cy="274320"/>
           </a:xfrm>
           <a:prstGeom prst="rect">
@@ -3621,11 +3613,11 @@
           <a:bodyPr wrap="square" lIns="0" tIns="0" rIns="0" bIns="0" rtlCol="0" anchor="ctr"/>
           <a:lstStyle/>
           <a:p>
-            <a:pPr algn="l" indent="0" marL="0">
+            <a:pPr marL="0" indent="0" algn="l">
               <a:buNone/>
             </a:pPr>
             <a:r>
-              <a:rPr lang="en-US" sz="1150" b="1" dirty="0">
+              <a:rPr lang="en-US" b="1" dirty="0">
                 <a:solidFill>
                   <a:srgbClr val="FFFFFF"/>
                 </a:solidFill>
@@ -3635,7 +3627,7 @@
               </a:rPr>
               <a:t>Text</a:t>
             </a:r>
-            <a:endParaRPr lang="en-US" sz="1600" dirty="0"/>
+            <a:endParaRPr lang="en-US" sz="2800" dirty="0"/>
           </a:p>
         </p:txBody>
       </p:sp>
@@ -3647,7 +3639,7 @@
         </p:nvSpPr>
         <p:spPr>
           <a:xfrm>
-            <a:off x="1691640" y="1353312"/>
+            <a:off x="1691640" y="1069848"/>
             <a:ext cx="2880360" cy="365760"/>
           </a:xfrm>
           <a:prstGeom prst="rect">
@@ -3658,6 +3650,13 @@
           </a:solidFill>
           <a:ln/>
         </p:spPr>
+        <p:txBody>
+          <a:bodyPr/>
+          <a:lstStyle/>
+          <a:p>
+            <a:endParaRPr lang="en-US" sz="3200"/>
+          </a:p>
+        </p:txBody>
       </p:sp>
       <p:sp>
         <p:nvSpPr>
@@ -3667,7 +3666,7 @@
         </p:nvSpPr>
         <p:spPr>
           <a:xfrm>
-            <a:off x="1764792" y="1399032"/>
+            <a:off x="1764792" y="1115568"/>
             <a:ext cx="2770632" cy="274320"/>
           </a:xfrm>
           <a:prstGeom prst="rect">
@@ -3680,11 +3679,11 @@
           <a:bodyPr wrap="square" lIns="0" tIns="0" rIns="0" bIns="0" rtlCol="0" anchor="ctr"/>
           <a:lstStyle/>
           <a:p>
-            <a:pPr algn="l" indent="0" marL="0">
+            <a:pPr marL="0" indent="0" algn="l">
               <a:buNone/>
             </a:pPr>
             <a:r>
-              <a:rPr lang="en-US" sz="1150" b="1" dirty="0">
+              <a:rPr lang="en-US" b="1" dirty="0">
                 <a:solidFill>
                   <a:srgbClr val="FFFFFF"/>
                 </a:solidFill>
@@ -3694,7 +3693,7 @@
               </a:rPr>
               <a:t>What it says</a:t>
             </a:r>
-            <a:endParaRPr lang="en-US" sz="1600" dirty="0"/>
+            <a:endParaRPr lang="en-US" sz="2800" dirty="0"/>
           </a:p>
         </p:txBody>
       </p:sp>
@@ -3706,7 +3705,7 @@
         </p:nvSpPr>
         <p:spPr>
           <a:xfrm>
-            <a:off x="4572000" y="1353312"/>
+            <a:off x="4572000" y="1069848"/>
             <a:ext cx="4206240" cy="365760"/>
           </a:xfrm>
           <a:prstGeom prst="rect">
@@ -3717,6 +3716,13 @@
           </a:solidFill>
           <a:ln/>
         </p:spPr>
+        <p:txBody>
+          <a:bodyPr/>
+          <a:lstStyle/>
+          <a:p>
+            <a:endParaRPr lang="en-US" sz="3200"/>
+          </a:p>
+        </p:txBody>
       </p:sp>
       <p:sp>
         <p:nvSpPr>
@@ -3726,7 +3732,7 @@
         </p:nvSpPr>
         <p:spPr>
           <a:xfrm>
-            <a:off x="4645152" y="1399032"/>
+            <a:off x="4645152" y="1115568"/>
             <a:ext cx="4096512" cy="274320"/>
           </a:xfrm>
           <a:prstGeom prst="rect">
@@ -3739,11 +3745,11 @@
           <a:bodyPr wrap="square" lIns="0" tIns="0" rIns="0" bIns="0" rtlCol="0" anchor="ctr"/>
           <a:lstStyle/>
           <a:p>
-            <a:pPr algn="l" indent="0" marL="0">
+            <a:pPr marL="0" indent="0" algn="l">
               <a:buNone/>
             </a:pPr>
             <a:r>
-              <a:rPr lang="en-US" sz="1150" b="1" dirty="0">
+              <a:rPr lang="en-US" b="1" dirty="0">
                 <a:solidFill>
                   <a:srgbClr val="FFFFFF"/>
                 </a:solidFill>
@@ -3753,7 +3759,7 @@
               </a:rPr>
               <a:t>What it trains</a:t>
             </a:r>
-            <a:endParaRPr lang="en-US" sz="1600" dirty="0"/>
+            <a:endParaRPr lang="en-US" sz="2800" dirty="0"/>
           </a:p>
         </p:txBody>
       </p:sp>
@@ -3765,7 +3771,7 @@
         </p:nvSpPr>
         <p:spPr>
           <a:xfrm>
-            <a:off x="365760" y="1719072"/>
+            <a:off x="365760" y="1435608"/>
             <a:ext cx="1325880" cy="822960"/>
           </a:xfrm>
           <a:prstGeom prst="rect">
@@ -3781,6 +3787,13 @@
             <a:prstDash val="solid"/>
           </a:ln>
         </p:spPr>
+        <p:txBody>
+          <a:bodyPr/>
+          <a:lstStyle/>
+          <a:p>
+            <a:endParaRPr lang="en-US" sz="3200"/>
+          </a:p>
+        </p:txBody>
       </p:sp>
       <p:sp>
         <p:nvSpPr>
@@ -3790,7 +3803,7 @@
         </p:nvSpPr>
         <p:spPr>
           <a:xfrm>
-            <a:off x="438912" y="1764792"/>
+            <a:off x="438912" y="1481328"/>
             <a:ext cx="1197864" cy="749808"/>
           </a:xfrm>
           <a:prstGeom prst="rect">
@@ -3803,11 +3816,11 @@
           <a:bodyPr wrap="square" lIns="0" tIns="0" rIns="0" bIns="0" rtlCol="0" anchor="ctr"/>
           <a:lstStyle/>
           <a:p>
-            <a:pPr algn="l" indent="0" marL="0">
+            <a:pPr marL="0" indent="0" algn="l">
               <a:buNone/>
             </a:pPr>
             <a:r>
-              <a:rPr lang="en-US" sz="1050" b="1" dirty="0">
+              <a:rPr lang="en-US" sz="1600" b="1" dirty="0">
                 <a:solidFill>
                   <a:srgbClr val="1F497D"/>
                 </a:solidFill>
@@ -3817,7 +3830,7 @@
               </a:rPr>
               <a:t>1 Thess 5:21</a:t>
             </a:r>
-            <a:endParaRPr lang="en-US" sz="1600" dirty="0"/>
+            <a:endParaRPr lang="en-US" sz="2800" dirty="0"/>
           </a:p>
         </p:txBody>
       </p:sp>
@@ -3829,7 +3842,7 @@
         </p:nvSpPr>
         <p:spPr>
           <a:xfrm>
-            <a:off x="1691640" y="1719072"/>
+            <a:off x="1691640" y="1435608"/>
             <a:ext cx="2880360" cy="822960"/>
           </a:xfrm>
           <a:prstGeom prst="rect">
@@ -3845,6 +3858,13 @@
             <a:prstDash val="solid"/>
           </a:ln>
         </p:spPr>
+        <p:txBody>
+          <a:bodyPr/>
+          <a:lstStyle/>
+          <a:p>
+            <a:endParaRPr lang="en-US" sz="3200"/>
+          </a:p>
+        </p:txBody>
       </p:sp>
       <p:sp>
         <p:nvSpPr>
@@ -3854,7 +3874,7 @@
         </p:nvSpPr>
         <p:spPr>
           <a:xfrm>
-            <a:off x="1764792" y="1764792"/>
+            <a:off x="1764792" y="1481328"/>
             <a:ext cx="2752344" cy="749808"/>
           </a:xfrm>
           <a:prstGeom prst="rect">
@@ -3867,11 +3887,11 @@
           <a:bodyPr wrap="square" lIns="0" tIns="0" rIns="0" bIns="0" rtlCol="0" anchor="ctr"/>
           <a:lstStyle/>
           <a:p>
-            <a:pPr algn="l" indent="0" marL="0">
+            <a:pPr marL="0" indent="0" algn="l">
               <a:buNone/>
             </a:pPr>
             <a:r>
-              <a:rPr lang="en-US" sz="1050" i="1" dirty="0">
+              <a:rPr lang="en-US" sz="1600" i="1" dirty="0">
                 <a:solidFill>
                   <a:srgbClr val="000000"/>
                 </a:solidFill>
@@ -3881,7 +3901,7 @@
               </a:rPr>
               <a:t>“But examine all things; hold fast to what is good.”</a:t>
             </a:r>
-            <a:endParaRPr lang="en-US" sz="1600" dirty="0"/>
+            <a:endParaRPr lang="en-US" sz="2800" dirty="0"/>
           </a:p>
         </p:txBody>
       </p:sp>
@@ -3893,7 +3913,7 @@
         </p:nvSpPr>
         <p:spPr>
           <a:xfrm>
-            <a:off x="4572000" y="1719072"/>
+            <a:off x="4572000" y="1435608"/>
             <a:ext cx="4206240" cy="822960"/>
           </a:xfrm>
           <a:prstGeom prst="rect">
@@ -3909,6 +3929,13 @@
             <a:prstDash val="solid"/>
           </a:ln>
         </p:spPr>
+        <p:txBody>
+          <a:bodyPr/>
+          <a:lstStyle/>
+          <a:p>
+            <a:endParaRPr lang="en-US" sz="3200"/>
+          </a:p>
+        </p:txBody>
       </p:sp>
       <p:sp>
         <p:nvSpPr>
@@ -3918,7 +3945,7 @@
         </p:nvSpPr>
         <p:spPr>
           <a:xfrm>
-            <a:off x="4645152" y="1764792"/>
+            <a:off x="4645152" y="1481328"/>
             <a:ext cx="4078224" cy="749808"/>
           </a:xfrm>
           <a:prstGeom prst="rect">
@@ -3931,11 +3958,11 @@
           <a:bodyPr wrap="square" lIns="0" tIns="0" rIns="0" bIns="0" rtlCol="0" anchor="ctr"/>
           <a:lstStyle/>
           <a:p>
-            <a:pPr algn="l" indent="0" marL="0">
+            <a:pPr marL="0" indent="0" algn="l">
               <a:buNone/>
             </a:pPr>
             <a:r>
-              <a:rPr lang="en-US" sz="1000" dirty="0">
+              <a:rPr lang="en-US" sz="1400" dirty="0">
                 <a:solidFill>
                   <a:srgbClr val="000000"/>
                 </a:solidFill>
@@ -3943,9 +3970,32 @@
                 <a:ea typeface="Arial" pitchFamily="34" charset="-122"/>
                 <a:cs typeface="Arial" pitchFamily="34" charset="-120"/>
               </a:rPr>
-              <a:t>Test everything — then KEEP the good. Testing isn’t rejecting; it’s sorting.</a:t>
-            </a:r>
-            <a:endParaRPr lang="en-US" sz="1600" dirty="0"/>
+              <a:t>Test everything </a:t>
+            </a:r>
+            <a:r>
+              <a:rPr lang="en-US" sz="1400" dirty="0">
+                <a:solidFill>
+                  <a:srgbClr val="000000"/>
+                </a:solidFill>
+                <a:latin typeface="Arial" pitchFamily="34" charset="0"/>
+                <a:ea typeface="Arial" pitchFamily="34" charset="-122"/>
+                <a:cs typeface="Arial" pitchFamily="34" charset="-120"/>
+                <a:sym typeface="Wingdings" pitchFamily="2" charset="2"/>
+              </a:rPr>
+              <a:t> </a:t>
+            </a:r>
+            <a:r>
+              <a:rPr lang="en-US" sz="1400" dirty="0">
+                <a:solidFill>
+                  <a:srgbClr val="000000"/>
+                </a:solidFill>
+                <a:latin typeface="Arial" pitchFamily="34" charset="0"/>
+                <a:ea typeface="Arial" pitchFamily="34" charset="-122"/>
+                <a:cs typeface="Arial" pitchFamily="34" charset="-120"/>
+              </a:rPr>
+              <a:t>then KEEP the good. Testing isn’t rejecting; it’s sorting.</a:t>
+            </a:r>
+            <a:endParaRPr lang="en-US" sz="2800" dirty="0"/>
           </a:p>
         </p:txBody>
       </p:sp>
@@ -3957,7 +4007,7 @@
         </p:nvSpPr>
         <p:spPr>
           <a:xfrm>
-            <a:off x="365760" y="2542032"/>
+            <a:off x="365760" y="2258568"/>
             <a:ext cx="1325880" cy="822960"/>
           </a:xfrm>
           <a:prstGeom prst="rect">
@@ -3973,6 +4023,13 @@
             <a:prstDash val="solid"/>
           </a:ln>
         </p:spPr>
+        <p:txBody>
+          <a:bodyPr/>
+          <a:lstStyle/>
+          <a:p>
+            <a:endParaRPr lang="en-US" sz="3200"/>
+          </a:p>
+        </p:txBody>
       </p:sp>
       <p:sp>
         <p:nvSpPr>
@@ -3982,7 +4039,7 @@
         </p:nvSpPr>
         <p:spPr>
           <a:xfrm>
-            <a:off x="438912" y="2587752"/>
+            <a:off x="438912" y="2304288"/>
             <a:ext cx="1197864" cy="749808"/>
           </a:xfrm>
           <a:prstGeom prst="rect">
@@ -3995,11 +4052,11 @@
           <a:bodyPr wrap="square" lIns="0" tIns="0" rIns="0" bIns="0" rtlCol="0" anchor="ctr"/>
           <a:lstStyle/>
           <a:p>
-            <a:pPr algn="l" indent="0" marL="0">
+            <a:pPr marL="0" indent="0" algn="l">
               <a:buNone/>
             </a:pPr>
             <a:r>
-              <a:rPr lang="en-US" sz="1050" b="1" dirty="0">
+              <a:rPr lang="en-US" sz="1600" b="1" dirty="0">
                 <a:solidFill>
                   <a:srgbClr val="1F497D"/>
                 </a:solidFill>
@@ -4009,7 +4066,7 @@
               </a:rPr>
               <a:t>1 John 4:1</a:t>
             </a:r>
-            <a:endParaRPr lang="en-US" sz="1600" dirty="0"/>
+            <a:endParaRPr lang="en-US" sz="2800" dirty="0"/>
           </a:p>
         </p:txBody>
       </p:sp>
@@ -4021,7 +4078,7 @@
         </p:nvSpPr>
         <p:spPr>
           <a:xfrm>
-            <a:off x="1691640" y="2542032"/>
+            <a:off x="1691640" y="2258568"/>
             <a:ext cx="2880360" cy="822960"/>
           </a:xfrm>
           <a:prstGeom prst="rect">
@@ -4037,6 +4094,13 @@
             <a:prstDash val="solid"/>
           </a:ln>
         </p:spPr>
+        <p:txBody>
+          <a:bodyPr/>
+          <a:lstStyle/>
+          <a:p>
+            <a:endParaRPr lang="en-US" sz="3200"/>
+          </a:p>
+        </p:txBody>
       </p:sp>
       <p:sp>
         <p:nvSpPr>
@@ -4046,7 +4110,7 @@
         </p:nvSpPr>
         <p:spPr>
           <a:xfrm>
-            <a:off x="1764792" y="2587752"/>
+            <a:off x="1764792" y="2304288"/>
             <a:ext cx="2752344" cy="749808"/>
           </a:xfrm>
           <a:prstGeom prst="rect">
@@ -4059,11 +4123,11 @@
           <a:bodyPr wrap="square" lIns="0" tIns="0" rIns="0" bIns="0" rtlCol="0" anchor="ctr"/>
           <a:lstStyle/>
           <a:p>
-            <a:pPr algn="l" indent="0" marL="0">
+            <a:pPr marL="0" indent="0" algn="l">
               <a:buNone/>
             </a:pPr>
             <a:r>
-              <a:rPr lang="en-US" sz="1050" i="1" dirty="0">
+              <a:rPr lang="en-US" sz="1600" i="1" dirty="0">
                 <a:solidFill>
                   <a:srgbClr val="000000"/>
                 </a:solidFill>
@@ -4073,7 +4137,7 @@
               </a:rPr>
               <a:t>“Do not believe every spirit, but test the spirits…”</a:t>
             </a:r>
-            <a:endParaRPr lang="en-US" sz="1600" dirty="0"/>
+            <a:endParaRPr lang="en-US" sz="2800" dirty="0"/>
           </a:p>
         </p:txBody>
       </p:sp>
@@ -4085,7 +4149,7 @@
         </p:nvSpPr>
         <p:spPr>
           <a:xfrm>
-            <a:off x="4572000" y="2542032"/>
+            <a:off x="4572000" y="2258568"/>
             <a:ext cx="4206240" cy="822960"/>
           </a:xfrm>
           <a:prstGeom prst="rect">
@@ -4101,6 +4165,13 @@
             <a:prstDash val="solid"/>
           </a:ln>
         </p:spPr>
+        <p:txBody>
+          <a:bodyPr/>
+          <a:lstStyle/>
+          <a:p>
+            <a:endParaRPr lang="en-US" sz="3200"/>
+          </a:p>
+        </p:txBody>
       </p:sp>
       <p:sp>
         <p:nvSpPr>
@@ -4110,7 +4181,7 @@
         </p:nvSpPr>
         <p:spPr>
           <a:xfrm>
-            <a:off x="4645152" y="2587752"/>
+            <a:off x="4645152" y="2304288"/>
             <a:ext cx="4078224" cy="749808"/>
           </a:xfrm>
           <a:prstGeom prst="rect">
@@ -4123,11 +4194,11 @@
           <a:bodyPr wrap="square" lIns="0" tIns="0" rIns="0" bIns="0" rtlCol="0" anchor="ctr"/>
           <a:lstStyle/>
           <a:p>
-            <a:pPr algn="l" indent="0" marL="0">
+            <a:pPr marL="0" indent="0" algn="l">
               <a:buNone/>
             </a:pPr>
             <a:r>
-              <a:rPr lang="en-US" sz="1000" dirty="0">
+              <a:rPr lang="en-US" sz="1400" dirty="0">
                 <a:solidFill>
                   <a:srgbClr val="000000"/>
                 </a:solidFill>
@@ -4137,7 +4208,7 @@
               </a:rPr>
               <a:t>Not every spiritual-sounding voice is from God. Confession of Christ is the assay (4:2–3).</a:t>
             </a:r>
-            <a:endParaRPr lang="en-US" sz="1600" dirty="0"/>
+            <a:endParaRPr lang="en-US" sz="2800" dirty="0"/>
           </a:p>
         </p:txBody>
       </p:sp>
@@ -4149,7 +4220,7 @@
         </p:nvSpPr>
         <p:spPr>
           <a:xfrm>
-            <a:off x="365760" y="3364992"/>
+            <a:off x="365760" y="3081528"/>
             <a:ext cx="1325880" cy="822960"/>
           </a:xfrm>
           <a:prstGeom prst="rect">
@@ -4165,6 +4236,13 @@
             <a:prstDash val="solid"/>
           </a:ln>
         </p:spPr>
+        <p:txBody>
+          <a:bodyPr/>
+          <a:lstStyle/>
+          <a:p>
+            <a:endParaRPr lang="en-US" sz="3200"/>
+          </a:p>
+        </p:txBody>
       </p:sp>
       <p:sp>
         <p:nvSpPr>
@@ -4174,7 +4252,7 @@
         </p:nvSpPr>
         <p:spPr>
           <a:xfrm>
-            <a:off x="438912" y="3410712"/>
+            <a:off x="438912" y="3127248"/>
             <a:ext cx="1197864" cy="749808"/>
           </a:xfrm>
           <a:prstGeom prst="rect">
@@ -4187,11 +4265,11 @@
           <a:bodyPr wrap="square" lIns="0" tIns="0" rIns="0" bIns="0" rtlCol="0" anchor="ctr"/>
           <a:lstStyle/>
           <a:p>
-            <a:pPr algn="l" indent="0" marL="0">
+            <a:pPr marL="0" indent="0" algn="l">
               <a:buNone/>
             </a:pPr>
             <a:r>
-              <a:rPr lang="en-US" sz="1050" b="1" dirty="0">
+              <a:rPr lang="en-US" sz="1600" b="1" dirty="0">
                 <a:solidFill>
                   <a:srgbClr val="1F497D"/>
                 </a:solidFill>
@@ -4201,7 +4279,7 @@
               </a:rPr>
               <a:t>2 Tim 2:15</a:t>
             </a:r>
-            <a:endParaRPr lang="en-US" sz="1600" dirty="0"/>
+            <a:endParaRPr lang="en-US" sz="2800" dirty="0"/>
           </a:p>
         </p:txBody>
       </p:sp>
@@ -4213,7 +4291,7 @@
         </p:nvSpPr>
         <p:spPr>
           <a:xfrm>
-            <a:off x="1691640" y="3364992"/>
+            <a:off x="1691640" y="3081528"/>
             <a:ext cx="2880360" cy="822960"/>
           </a:xfrm>
           <a:prstGeom prst="rect">
@@ -4229,6 +4307,13 @@
             <a:prstDash val="solid"/>
           </a:ln>
         </p:spPr>
+        <p:txBody>
+          <a:bodyPr/>
+          <a:lstStyle/>
+          <a:p>
+            <a:endParaRPr lang="en-US" sz="3200"/>
+          </a:p>
+        </p:txBody>
       </p:sp>
       <p:sp>
         <p:nvSpPr>
@@ -4238,7 +4323,7 @@
         </p:nvSpPr>
         <p:spPr>
           <a:xfrm>
-            <a:off x="1764792" y="3410712"/>
+            <a:off x="1764792" y="3127248"/>
             <a:ext cx="2752344" cy="749808"/>
           </a:xfrm>
           <a:prstGeom prst="rect">
@@ -4251,11 +4336,11 @@
           <a:bodyPr wrap="square" lIns="0" tIns="0" rIns="0" bIns="0" rtlCol="0" anchor="ctr"/>
           <a:lstStyle/>
           <a:p>
-            <a:pPr algn="l" indent="0" marL="0">
+            <a:pPr marL="0" indent="0" algn="l">
               <a:buNone/>
             </a:pPr>
             <a:r>
-              <a:rPr lang="en-US" sz="1050" i="1" dirty="0">
+              <a:rPr lang="en-US" sz="1600" i="1" dirty="0">
                 <a:solidFill>
                   <a:srgbClr val="000000"/>
                 </a:solidFill>
@@ -4265,7 +4350,7 @@
               </a:rPr>
               <a:t>“…accurately handling the word of truth.”</a:t>
             </a:r>
-            <a:endParaRPr lang="en-US" sz="1600" dirty="0"/>
+            <a:endParaRPr lang="en-US" sz="2800" dirty="0"/>
           </a:p>
         </p:txBody>
       </p:sp>
@@ -4277,7 +4362,7 @@
         </p:nvSpPr>
         <p:spPr>
           <a:xfrm>
-            <a:off x="4572000" y="3364992"/>
+            <a:off x="4572000" y="3081528"/>
             <a:ext cx="4206240" cy="822960"/>
           </a:xfrm>
           <a:prstGeom prst="rect">
@@ -4293,6 +4378,13 @@
             <a:prstDash val="solid"/>
           </a:ln>
         </p:spPr>
+        <p:txBody>
+          <a:bodyPr/>
+          <a:lstStyle/>
+          <a:p>
+            <a:endParaRPr lang="en-US" sz="3200"/>
+          </a:p>
+        </p:txBody>
       </p:sp>
       <p:sp>
         <p:nvSpPr>
@@ -4302,7 +4394,7 @@
         </p:nvSpPr>
         <p:spPr>
           <a:xfrm>
-            <a:off x="4645152" y="3410712"/>
+            <a:off x="4645152" y="3127248"/>
             <a:ext cx="4078224" cy="749808"/>
           </a:xfrm>
           <a:prstGeom prst="rect">
@@ -4315,11 +4407,11 @@
           <a:bodyPr wrap="square" lIns="0" tIns="0" rIns="0" bIns="0" rtlCol="0" anchor="ctr"/>
           <a:lstStyle/>
           <a:p>
-            <a:pPr algn="l" indent="0" marL="0">
+            <a:pPr marL="0" indent="0" algn="l">
               <a:buNone/>
             </a:pPr>
             <a:r>
-              <a:rPr lang="en-US" sz="1000" dirty="0">
+              <a:rPr lang="en-US" sz="1400" dirty="0">
                 <a:solidFill>
                   <a:srgbClr val="000000"/>
                 </a:solidFill>
@@ -4327,9 +4419,32 @@
                 <a:ea typeface="Arial" pitchFamily="34" charset="-122"/>
                 <a:cs typeface="Arial" pitchFamily="34" charset="-120"/>
               </a:rPr>
-              <a:t>Rightly dividing takes work and care — “be diligent.” Sloppy handling is not innocent.</a:t>
-            </a:r>
-            <a:endParaRPr lang="en-US" sz="1600" dirty="0"/>
+              <a:t>Rightly dividing takes work and care </a:t>
+            </a:r>
+            <a:r>
+              <a:rPr lang="en-US" sz="1400" dirty="0">
+                <a:solidFill>
+                  <a:srgbClr val="000000"/>
+                </a:solidFill>
+                <a:latin typeface="Arial" pitchFamily="34" charset="0"/>
+                <a:ea typeface="Arial" pitchFamily="34" charset="-122"/>
+                <a:cs typeface="Arial" pitchFamily="34" charset="-120"/>
+                <a:sym typeface="Wingdings" pitchFamily="2" charset="2"/>
+              </a:rPr>
+              <a:t></a:t>
+            </a:r>
+            <a:r>
+              <a:rPr lang="en-US" sz="1400" dirty="0">
+                <a:solidFill>
+                  <a:srgbClr val="000000"/>
+                </a:solidFill>
+                <a:latin typeface="Arial" pitchFamily="34" charset="0"/>
+                <a:ea typeface="Arial" pitchFamily="34" charset="-122"/>
+                <a:cs typeface="Arial" pitchFamily="34" charset="-120"/>
+              </a:rPr>
+              <a:t> “be diligent.” Sloppy handling is not innocent.</a:t>
+            </a:r>
+            <a:endParaRPr lang="en-US" sz="2800" dirty="0"/>
           </a:p>
         </p:txBody>
       </p:sp>
@@ -4341,7 +4456,7 @@
         </p:nvSpPr>
         <p:spPr>
           <a:xfrm>
-            <a:off x="365760" y="4187952"/>
+            <a:off x="365760" y="3904488"/>
             <a:ext cx="1325880" cy="822960"/>
           </a:xfrm>
           <a:prstGeom prst="rect">
@@ -4357,6 +4472,13 @@
             <a:prstDash val="solid"/>
           </a:ln>
         </p:spPr>
+        <p:txBody>
+          <a:bodyPr/>
+          <a:lstStyle/>
+          <a:p>
+            <a:endParaRPr lang="en-US" sz="3200"/>
+          </a:p>
+        </p:txBody>
       </p:sp>
       <p:sp>
         <p:nvSpPr>
@@ -4366,7 +4488,7 @@
         </p:nvSpPr>
         <p:spPr>
           <a:xfrm>
-            <a:off x="438912" y="4233672"/>
+            <a:off x="438912" y="3950208"/>
             <a:ext cx="1197864" cy="749808"/>
           </a:xfrm>
           <a:prstGeom prst="rect">
@@ -4379,11 +4501,11 @@
           <a:bodyPr wrap="square" lIns="0" tIns="0" rIns="0" bIns="0" rtlCol="0" anchor="ctr"/>
           <a:lstStyle/>
           <a:p>
-            <a:pPr algn="l" indent="0" marL="0">
+            <a:pPr marL="0" indent="0" algn="l">
               <a:buNone/>
             </a:pPr>
             <a:r>
-              <a:rPr lang="en-US" sz="1050" b="1" dirty="0">
+              <a:rPr lang="en-US" sz="1600" b="1" dirty="0">
                 <a:solidFill>
                   <a:srgbClr val="1F497D"/>
                 </a:solidFill>
@@ -4393,7 +4515,7 @@
               </a:rPr>
               <a:t>Col 2:8</a:t>
             </a:r>
-            <a:endParaRPr lang="en-US" sz="1600" dirty="0"/>
+            <a:endParaRPr lang="en-US" sz="2800" dirty="0"/>
           </a:p>
         </p:txBody>
       </p:sp>
@@ -4405,7 +4527,7 @@
         </p:nvSpPr>
         <p:spPr>
           <a:xfrm>
-            <a:off x="1691640" y="4187952"/>
+            <a:off x="1691640" y="3904488"/>
             <a:ext cx="2880360" cy="822960"/>
           </a:xfrm>
           <a:prstGeom prst="rect">
@@ -4421,6 +4543,13 @@
             <a:prstDash val="solid"/>
           </a:ln>
         </p:spPr>
+        <p:txBody>
+          <a:bodyPr/>
+          <a:lstStyle/>
+          <a:p>
+            <a:endParaRPr lang="en-US" sz="3200"/>
+          </a:p>
+        </p:txBody>
       </p:sp>
       <p:sp>
         <p:nvSpPr>
@@ -4430,7 +4559,7 @@
         </p:nvSpPr>
         <p:spPr>
           <a:xfrm>
-            <a:off x="1764792" y="4233672"/>
+            <a:off x="1764792" y="3950208"/>
             <a:ext cx="2752344" cy="749808"/>
           </a:xfrm>
           <a:prstGeom prst="rect">
@@ -4443,11 +4572,11 @@
           <a:bodyPr wrap="square" lIns="0" tIns="0" rIns="0" bIns="0" rtlCol="0" anchor="ctr"/>
           <a:lstStyle/>
           <a:p>
-            <a:pPr algn="l" indent="0" marL="0">
+            <a:pPr marL="0" indent="0" algn="l">
               <a:buNone/>
             </a:pPr>
             <a:r>
-              <a:rPr lang="en-US" sz="1050" i="1" dirty="0">
+              <a:rPr lang="en-US" sz="1600" i="1" dirty="0">
                 <a:solidFill>
                   <a:srgbClr val="000000"/>
                 </a:solidFill>
@@ -4457,7 +4586,7 @@
               </a:rPr>
               <a:t>“Be careful that no one captures you through philosophy and empty deceit…”</a:t>
             </a:r>
-            <a:endParaRPr lang="en-US" sz="1600" dirty="0"/>
+            <a:endParaRPr lang="en-US" sz="2800" dirty="0"/>
           </a:p>
         </p:txBody>
       </p:sp>
@@ -4469,7 +4598,7 @@
         </p:nvSpPr>
         <p:spPr>
           <a:xfrm>
-            <a:off x="4572000" y="4187952"/>
+            <a:off x="4572000" y="3904488"/>
             <a:ext cx="4206240" cy="822960"/>
           </a:xfrm>
           <a:prstGeom prst="rect">
@@ -4485,6 +4614,13 @@
             <a:prstDash val="solid"/>
           </a:ln>
         </p:spPr>
+        <p:txBody>
+          <a:bodyPr/>
+          <a:lstStyle/>
+          <a:p>
+            <a:endParaRPr lang="en-US" sz="3200"/>
+          </a:p>
+        </p:txBody>
       </p:sp>
       <p:sp>
         <p:nvSpPr>
@@ -4494,7 +4630,7 @@
         </p:nvSpPr>
         <p:spPr>
           <a:xfrm>
-            <a:off x="4645152" y="4233672"/>
+            <a:off x="4645152" y="3950208"/>
             <a:ext cx="4078224" cy="749808"/>
           </a:xfrm>
           <a:prstGeom prst="rect">
@@ -4507,11 +4643,11 @@
           <a:bodyPr wrap="square" lIns="0" tIns="0" rIns="0" bIns="0" rtlCol="0" anchor="ctr"/>
           <a:lstStyle/>
           <a:p>
-            <a:pPr algn="l" indent="0" marL="0">
+            <a:pPr marL="0" indent="0" algn="l">
               <a:buNone/>
             </a:pPr>
             <a:r>
-              <a:rPr lang="en-US" sz="1000" dirty="0">
+              <a:rPr lang="en-US" sz="1400" dirty="0">
                 <a:solidFill>
                   <a:srgbClr val="000000"/>
                 </a:solidFill>
@@ -4521,7 +4657,7 @@
               </a:rPr>
               <a:t>Persuasive ≠ true. Human systems can sound wise and lead away from Christ.</a:t>
             </a:r>
-            <a:endParaRPr lang="en-US" sz="1600" dirty="0"/>
+            <a:endParaRPr lang="en-US" sz="2800" dirty="0"/>
           </a:p>
         </p:txBody>
       </p:sp>
@@ -4533,7 +4669,7 @@
         </p:nvSpPr>
         <p:spPr>
           <a:xfrm>
-            <a:off x="365760" y="5010912"/>
+            <a:off x="365760" y="4727448"/>
             <a:ext cx="1325880" cy="822960"/>
           </a:xfrm>
           <a:prstGeom prst="rect">
@@ -4549,6 +4685,13 @@
             <a:prstDash val="solid"/>
           </a:ln>
         </p:spPr>
+        <p:txBody>
+          <a:bodyPr/>
+          <a:lstStyle/>
+          <a:p>
+            <a:endParaRPr lang="en-US" sz="3200"/>
+          </a:p>
+        </p:txBody>
       </p:sp>
       <p:sp>
         <p:nvSpPr>
@@ -4558,7 +4701,7 @@
         </p:nvSpPr>
         <p:spPr>
           <a:xfrm>
-            <a:off x="438912" y="5056632"/>
+            <a:off x="438912" y="4773168"/>
             <a:ext cx="1197864" cy="749808"/>
           </a:xfrm>
           <a:prstGeom prst="rect">
@@ -4571,11 +4714,11 @@
           <a:bodyPr wrap="square" lIns="0" tIns="0" rIns="0" bIns="0" rtlCol="0" anchor="ctr"/>
           <a:lstStyle/>
           <a:p>
-            <a:pPr algn="l" indent="0" marL="0">
+            <a:pPr marL="0" indent="0" algn="l">
               <a:buNone/>
             </a:pPr>
             <a:r>
-              <a:rPr lang="en-US" sz="1050" b="1" dirty="0">
+              <a:rPr lang="en-US" sz="1600" b="1" dirty="0">
                 <a:solidFill>
                   <a:srgbClr val="1F497D"/>
                 </a:solidFill>
@@ -4585,7 +4728,7 @@
               </a:rPr>
               <a:t>Heb 5:14</a:t>
             </a:r>
-            <a:endParaRPr lang="en-US" sz="1600" dirty="0"/>
+            <a:endParaRPr lang="en-US" sz="2800" dirty="0"/>
           </a:p>
         </p:txBody>
       </p:sp>
@@ -4597,7 +4740,7 @@
         </p:nvSpPr>
         <p:spPr>
           <a:xfrm>
-            <a:off x="1691640" y="5010912"/>
+            <a:off x="1691640" y="4727448"/>
             <a:ext cx="2880360" cy="822960"/>
           </a:xfrm>
           <a:prstGeom prst="rect">
@@ -4613,6 +4756,13 @@
             <a:prstDash val="solid"/>
           </a:ln>
         </p:spPr>
+        <p:txBody>
+          <a:bodyPr/>
+          <a:lstStyle/>
+          <a:p>
+            <a:endParaRPr lang="en-US" sz="3200"/>
+          </a:p>
+        </p:txBody>
       </p:sp>
       <p:sp>
         <p:nvSpPr>
@@ -4622,7 +4772,7 @@
         </p:nvSpPr>
         <p:spPr>
           <a:xfrm>
-            <a:off x="1764792" y="5056632"/>
+            <a:off x="1764792" y="4773168"/>
             <a:ext cx="2752344" cy="749808"/>
           </a:xfrm>
           <a:prstGeom prst="rect">
@@ -4635,11 +4785,11 @@
           <a:bodyPr wrap="square" lIns="0" tIns="0" rIns="0" bIns="0" rtlCol="0" anchor="ctr"/>
           <a:lstStyle/>
           <a:p>
-            <a:pPr algn="l" indent="0" marL="0">
+            <a:pPr marL="0" indent="0" algn="l">
               <a:buNone/>
             </a:pPr>
             <a:r>
-              <a:rPr lang="en-US" sz="1050" i="1" dirty="0">
+              <a:rPr lang="en-US" sz="1600" i="1" dirty="0">
                 <a:solidFill>
                   <a:srgbClr val="000000"/>
                 </a:solidFill>
@@ -4649,7 +4799,7 @@
               </a:rPr>
               <a:t>“…perceptions trained by practice to discern both good and evil.”</a:t>
             </a:r>
-            <a:endParaRPr lang="en-US" sz="1600" dirty="0"/>
+            <a:endParaRPr lang="en-US" sz="2800" dirty="0"/>
           </a:p>
         </p:txBody>
       </p:sp>
@@ -4661,7 +4811,7 @@
         </p:nvSpPr>
         <p:spPr>
           <a:xfrm>
-            <a:off x="4572000" y="5010912"/>
+            <a:off x="4572000" y="4727448"/>
             <a:ext cx="4206240" cy="822960"/>
           </a:xfrm>
           <a:prstGeom prst="rect">
@@ -4677,6 +4827,13 @@
             <a:prstDash val="solid"/>
           </a:ln>
         </p:spPr>
+        <p:txBody>
+          <a:bodyPr/>
+          <a:lstStyle/>
+          <a:p>
+            <a:endParaRPr lang="en-US" sz="3200"/>
+          </a:p>
+        </p:txBody>
       </p:sp>
       <p:sp>
         <p:nvSpPr>
@@ -4686,7 +4843,7 @@
         </p:nvSpPr>
         <p:spPr>
           <a:xfrm>
-            <a:off x="4645152" y="5056632"/>
+            <a:off x="4645152" y="4773168"/>
             <a:ext cx="4078224" cy="749808"/>
           </a:xfrm>
           <a:prstGeom prst="rect">
@@ -4699,11 +4856,11 @@
           <a:bodyPr wrap="square" lIns="0" tIns="0" rIns="0" bIns="0" rtlCol="0" anchor="ctr"/>
           <a:lstStyle/>
           <a:p>
-            <a:pPr algn="l" indent="0" marL="0">
+            <a:pPr marL="0" indent="0" algn="l">
               <a:buNone/>
             </a:pPr>
             <a:r>
-              <a:rPr lang="en-US" sz="1000" dirty="0">
+              <a:rPr lang="en-US" sz="1400" dirty="0">
                 <a:solidFill>
                   <a:srgbClr val="000000"/>
                 </a:solidFill>
@@ -4713,7 +4870,7 @@
               </a:rPr>
               <a:t>The faculty itself is built by USE. The other four are the reps.</a:t>
             </a:r>
-            <a:endParaRPr lang="en-US" sz="1600" dirty="0"/>
+            <a:endParaRPr lang="en-US" sz="2800" dirty="0"/>
           </a:p>
         </p:txBody>
       </p:sp>
@@ -4725,7 +4882,7 @@
         </p:nvSpPr>
         <p:spPr>
           <a:xfrm>
-            <a:off x="365760" y="5989320"/>
+            <a:off x="365760" y="5868740"/>
             <a:ext cx="8412480" cy="594360"/>
           </a:xfrm>
           <a:prstGeom prst="rect">
@@ -4738,11 +4895,11 @@
           <a:bodyPr wrap="square" lIns="0" tIns="0" rIns="0" bIns="0" rtlCol="0" anchor="t"/>
           <a:lstStyle/>
           <a:p>
-            <a:pPr algn="l" indent="0" marL="0">
+            <a:pPr marL="0" indent="0" algn="l">
               <a:buNone/>
             </a:pPr>
             <a:r>
-              <a:rPr lang="en-US" sz="1300" b="1" dirty="0">
+              <a:rPr lang="en-US" b="1" dirty="0">
                 <a:solidFill>
                   <a:srgbClr val="1F497D"/>
                 </a:solidFill>
@@ -4752,11 +4909,8 @@
               </a:rPr>
               <a:t>Four commands to test — and one promise (Heb 5:14): </a:t>
             </a:r>
-            <a:pPr algn="l" indent="0" marL="0">
-              <a:buNone/>
-            </a:pPr>
-            <a:r>
-              <a:rPr lang="en-US" sz="1300" i="1" dirty="0">
+            <a:r>
+              <a:rPr lang="en-US" i="1" dirty="0">
                 <a:solidFill>
                   <a:srgbClr val="000000"/>
                 </a:solidFill>
@@ -4766,7 +4920,7 @@
               </a:rPr>
               <a:t>do the testing long enough and the eye itself gets trained. The toolkit is not a checklist; it is a gym.</a:t>
             </a:r>
-            <a:endParaRPr lang="en-US" sz="1600" dirty="0"/>
+            <a:endParaRPr lang="en-US" sz="2400" dirty="0"/>
           </a:p>
         </p:txBody>
       </p:sp>
@@ -4816,7 +4970,7 @@
           <a:bodyPr wrap="square" lIns="0" tIns="0" rIns="0" bIns="0" rtlCol="0" anchor="t"/>
           <a:lstStyle/>
           <a:p>
-            <a:pPr algn="l" indent="0" marL="0">
+            <a:pPr marL="0" indent="0" algn="l">
               <a:buNone/>
             </a:pPr>
             <a:r>
@@ -4855,11 +5009,11 @@
           <a:bodyPr wrap="square" lIns="0" tIns="0" rIns="0" bIns="0" rtlCol="0" anchor="t"/>
           <a:lstStyle/>
           <a:p>
-            <a:pPr algn="l" indent="0" marL="0">
+            <a:pPr marL="0" indent="0" algn="l">
               <a:buNone/>
             </a:pPr>
             <a:r>
-              <a:rPr lang="en-US" sz="1300" b="1" dirty="0">
+              <a:rPr lang="en-US" sz="2000" b="1" dirty="0">
                 <a:solidFill>
                   <a:srgbClr val="4F81BD"/>
                 </a:solidFill>
@@ -4867,9 +5021,32 @@
                 <a:ea typeface="Arial" pitchFamily="34" charset="-122"/>
                 <a:cs typeface="Arial" pitchFamily="34" charset="-120"/>
               </a:rPr>
-              <a:t>Hebrews 5:14 — the payoff of the whole course</a:t>
-            </a:r>
-            <a:endParaRPr lang="en-US" sz="1600" dirty="0"/>
+              <a:t>Hebrews 5:14 </a:t>
+            </a:r>
+            <a:r>
+              <a:rPr lang="en-US" sz="2000" b="1" dirty="0">
+                <a:solidFill>
+                  <a:srgbClr val="4F81BD"/>
+                </a:solidFill>
+                <a:latin typeface="Arial" pitchFamily="34" charset="0"/>
+                <a:ea typeface="Arial" pitchFamily="34" charset="-122"/>
+                <a:cs typeface="Arial" pitchFamily="34" charset="-120"/>
+                <a:sym typeface="Wingdings" pitchFamily="2" charset="2"/>
+              </a:rPr>
+              <a:t></a:t>
+            </a:r>
+            <a:r>
+              <a:rPr lang="en-US" sz="2000" b="1" dirty="0">
+                <a:solidFill>
+                  <a:srgbClr val="4F81BD"/>
+                </a:solidFill>
+                <a:latin typeface="Arial" pitchFamily="34" charset="0"/>
+                <a:ea typeface="Arial" pitchFamily="34" charset="-122"/>
+                <a:cs typeface="Arial" pitchFamily="34" charset="-120"/>
+              </a:rPr>
+              <a:t> the payoff of the whole course</a:t>
+            </a:r>
+            <a:endParaRPr lang="en-US" sz="2800" dirty="0"/>
           </a:p>
         </p:txBody>
       </p:sp>
@@ -4881,8 +5058,8 @@
         </p:nvSpPr>
         <p:spPr>
           <a:xfrm>
-            <a:off x="365760" y="1143000"/>
-            <a:ext cx="8412480" cy="1051560"/>
+            <a:off x="365760" y="1024128"/>
+            <a:ext cx="8412480" cy="1216152"/>
           </a:xfrm>
           <a:prstGeom prst="rect">
             <a:avLst/>
@@ -4894,11 +5071,11 @@
           <a:bodyPr wrap="square" lIns="0" tIns="0" rIns="0" bIns="0" rtlCol="0" anchor="t"/>
           <a:lstStyle/>
           <a:p>
-            <a:pPr algn="l" indent="0" marL="0">
+            <a:pPr marL="0" indent="0" algn="l">
               <a:buNone/>
             </a:pPr>
             <a:r>
-              <a:rPr lang="en-US" sz="1700" b="1" i="1" dirty="0">
+              <a:rPr lang="en-US" sz="2000" b="1" i="1" dirty="0">
                 <a:solidFill>
                   <a:srgbClr val="000000"/>
                 </a:solidFill>
@@ -4908,31 +5085,149 @@
               </a:rPr>
               <a:t>“Solid food is for the mature, whose perceptions are trained by practice to discern both good and evil.” </a:t>
             </a:r>
-            <a:pPr algn="l" indent="0" marL="0">
+            <a:r>
+              <a:rPr lang="en-US" sz="2000" b="1" dirty="0">
+                <a:solidFill>
+                  <a:srgbClr val="000000"/>
+                </a:solidFill>
+                <a:latin typeface="Arial" pitchFamily="34" charset="0"/>
+                <a:ea typeface="Arial" pitchFamily="34" charset="-122"/>
+                <a:cs typeface="Arial" pitchFamily="34" charset="-120"/>
+              </a:rPr>
+              <a:t>(Hebrews 5:14)</a:t>
+            </a:r>
+            <a:endParaRPr lang="en-US" sz="2000" dirty="0"/>
+          </a:p>
+          <a:p>
+            <a:pPr marL="0" indent="0" algn="l">
               <a:buNone/>
             </a:pPr>
             <a:r>
-              <a:rPr lang="en-US" sz="1600" b="1" dirty="0">
-                <a:solidFill>
-                  <a:srgbClr val="000000"/>
-                </a:solidFill>
-                <a:latin typeface="Arial" pitchFamily="34" charset="0"/>
-                <a:ea typeface="Arial" pitchFamily="34" charset="-122"/>
-                <a:cs typeface="Arial" pitchFamily="34" charset="-120"/>
-              </a:rPr>
-              <a:t>(Hebrews 5:14)</a:t>
-            </a:r>
-            <a:pPr algn="l" indent="0" marL="0">
+              <a:rPr lang="en-US" b="1" dirty="0">
+                <a:solidFill>
+                  <a:srgbClr val="1F497D"/>
+                </a:solidFill>
+                <a:latin typeface="Arial" pitchFamily="34" charset="0"/>
+                <a:ea typeface="Arial" pitchFamily="34" charset="-122"/>
+                <a:cs typeface="Arial" pitchFamily="34" charset="-120"/>
+              </a:rPr>
+              <a:t>Trained </a:t>
+            </a:r>
+            <a:r>
+              <a:rPr lang="en-US" b="1" dirty="0">
+                <a:solidFill>
+                  <a:srgbClr val="1F497D"/>
+                </a:solidFill>
+                <a:latin typeface="Arial" pitchFamily="34" charset="0"/>
+                <a:ea typeface="Arial" pitchFamily="34" charset="-122"/>
+                <a:cs typeface="Arial" pitchFamily="34" charset="-120"/>
+                <a:sym typeface="Wingdings" pitchFamily="2" charset="2"/>
+              </a:rPr>
+              <a:t> </a:t>
+            </a:r>
+            <a:r>
+              <a:rPr lang="en-US" b="1" dirty="0">
+                <a:solidFill>
+                  <a:srgbClr val="1F497D"/>
+                </a:solidFill>
+                <a:latin typeface="Arial" pitchFamily="34" charset="0"/>
+                <a:ea typeface="Arial" pitchFamily="34" charset="-122"/>
+                <a:cs typeface="Arial" pitchFamily="34" charset="-120"/>
+              </a:rPr>
+              <a:t>by practice. Not downloaded at baptism. Not absorbed from a good sermon.</a:t>
+            </a:r>
+            <a:endParaRPr lang="en-US" sz="2000" dirty="0"/>
+          </a:p>
+        </p:txBody>
+      </p:sp>
+      <p:sp>
+        <p:nvSpPr>
+          <p:cNvPr id="5" name="c2"/>
+          <p:cNvSpPr txBox="1"/>
+          <p:nvPr/>
+        </p:nvSpPr>
+        <p:spPr>
+          <a:xfrm>
+            <a:off x="365760" y="2377440"/>
+            <a:ext cx="8412480" cy="1143000"/>
+          </a:xfrm>
+          <a:prstGeom prst="rect">
+            <a:avLst/>
+          </a:prstGeom>
+          <a:noFill/>
+          <a:ln/>
+        </p:spPr>
+        <p:txBody>
+          <a:bodyPr wrap="square" lIns="0" tIns="0" rIns="0" bIns="0" rtlCol="0" anchor="t"/>
+          <a:lstStyle/>
+          <a:p>
+            <a:pPr marL="0" indent="0" algn="l">
               <a:buNone/>
             </a:pPr>
-            <a:endParaRPr lang="en-US" sz="1600" dirty="0"/>
-          </a:p>
-          <a:p>
-            <a:pPr algn="l" indent="0" marL="0">
+            <a:r>
+              <a:rPr lang="en-US" dirty="0">
+                <a:solidFill>
+                  <a:srgbClr val="000000"/>
+                </a:solidFill>
+                <a:latin typeface="Arial" pitchFamily="34" charset="0"/>
+                <a:ea typeface="Arial" pitchFamily="34" charset="-122"/>
+                <a:cs typeface="Arial" pitchFamily="34" charset="-120"/>
+              </a:rPr>
+              <a:t>Discernment works like any skilled trade. The carpenter spots the crooked joint without a tape measure. The nurse reads the patient at a glance. The rancher knows the sick animal across the field. Nobody downloaded that. They apprenticed </a:t>
+            </a:r>
+            <a:r>
+              <a:rPr lang="en-US" dirty="0">
+                <a:solidFill>
+                  <a:srgbClr val="000000"/>
+                </a:solidFill>
+                <a:latin typeface="Arial" pitchFamily="34" charset="0"/>
+                <a:ea typeface="Arial" pitchFamily="34" charset="-122"/>
+                <a:cs typeface="Arial" pitchFamily="34" charset="-120"/>
+                <a:sym typeface="Wingdings" pitchFamily="2" charset="2"/>
+              </a:rPr>
+              <a:t></a:t>
+            </a:r>
+            <a:r>
+              <a:rPr lang="en-US" dirty="0">
+                <a:solidFill>
+                  <a:srgbClr val="000000"/>
+                </a:solidFill>
+                <a:latin typeface="Arial" pitchFamily="34" charset="0"/>
+                <a:ea typeface="Arial" pitchFamily="34" charset="-122"/>
+                <a:cs typeface="Arial" pitchFamily="34" charset="-120"/>
+              </a:rPr>
+              <a:t> reps, daily, for years, until perception knew things the mouth couldn’t explain.</a:t>
+            </a:r>
+            <a:endParaRPr lang="en-US" sz="2000" dirty="0"/>
+          </a:p>
+        </p:txBody>
+      </p:sp>
+      <p:sp>
+        <p:nvSpPr>
+          <p:cNvPr id="6" name="c3"/>
+          <p:cNvSpPr txBox="1"/>
+          <p:nvPr/>
+        </p:nvSpPr>
+        <p:spPr>
+          <a:xfrm>
+            <a:off x="365760" y="3657600"/>
+            <a:ext cx="8412480" cy="1234440"/>
+          </a:xfrm>
+          <a:prstGeom prst="rect">
+            <a:avLst/>
+          </a:prstGeom>
+          <a:noFill/>
+          <a:ln/>
+        </p:spPr>
+        <p:txBody>
+          <a:bodyPr wrap="square" lIns="0" tIns="0" rIns="0" bIns="0" rtlCol="0" anchor="t"/>
+          <a:lstStyle/>
+          <a:p>
+            <a:pPr marL="0" indent="0" algn="l">
               <a:buNone/>
             </a:pPr>
             <a:r>
-              <a:rPr lang="en-US" sz="1500" b="1" dirty="0">
+              <a:rPr lang="en-US" b="1" dirty="0">
                 <a:solidFill>
                   <a:srgbClr val="1F497D"/>
                 </a:solidFill>
@@ -4940,22 +5235,33 @@
                 <a:ea typeface="Arial" pitchFamily="34" charset="-122"/>
                 <a:cs typeface="Arial" pitchFamily="34" charset="-120"/>
               </a:rPr>
-              <a:t>Trained — by practice. Not downloaded at baptism. Not absorbed from a good sermon.</a:t>
-            </a:r>
-            <a:endParaRPr lang="en-US" sz="1600" dirty="0"/>
-          </a:p>
-        </p:txBody>
-      </p:sp>
-      <p:sp>
-        <p:nvSpPr>
-          <p:cNvPr id="5" name="c2"/>
+              <a:t>What are the reps? </a:t>
+            </a:r>
+            <a:r>
+              <a:rPr lang="en-US" dirty="0">
+                <a:solidFill>
+                  <a:srgbClr val="000000"/>
+                </a:solidFill>
+                <a:latin typeface="Arial" pitchFamily="34" charset="0"/>
+                <a:ea typeface="Arial" pitchFamily="34" charset="-122"/>
+                <a:cs typeface="Arial" pitchFamily="34" charset="-120"/>
+              </a:rPr>
+              <a:t>Watching God draw the line, across hundreds of texts,  between what He accepts and what He rejects: Cain and Abel · Nadab · Saul · Uzzah · Malachi · Ananias · the Pharisees. Every passage is another rep. The daily reader is calibrating his eye to God’s own judgments.</a:t>
+            </a:r>
+            <a:endParaRPr lang="en-US" sz="2000" dirty="0"/>
+          </a:p>
+        </p:txBody>
+      </p:sp>
+      <p:sp>
+        <p:nvSpPr>
+          <p:cNvPr id="7" name="c4"/>
           <p:cNvSpPr txBox="1"/>
           <p:nvPr/>
         </p:nvSpPr>
         <p:spPr>
           <a:xfrm>
-            <a:off x="365760" y="2377440"/>
-            <a:ext cx="8412480" cy="1143000"/>
+            <a:off x="365760" y="5029200"/>
+            <a:ext cx="8412480" cy="1188720"/>
           </a:xfrm>
           <a:prstGeom prst="rect">
             <a:avLst/>
@@ -4967,11 +5273,11 @@
           <a:bodyPr wrap="square" lIns="0" tIns="0" rIns="0" bIns="0" rtlCol="0" anchor="t"/>
           <a:lstStyle/>
           <a:p>
-            <a:pPr algn="l" indent="0" marL="0">
+            <a:pPr marL="0" indent="0" algn="l">
               <a:buNone/>
             </a:pPr>
             <a:r>
-              <a:rPr lang="en-US" sz="1500" dirty="0">
+              <a:rPr lang="en-US" dirty="0">
                 <a:solidFill>
                   <a:srgbClr val="000000"/>
                 </a:solidFill>
@@ -4979,27 +5285,22 @@
                 <a:ea typeface="Arial" pitchFamily="34" charset="-122"/>
                 <a:cs typeface="Arial" pitchFamily="34" charset="-120"/>
               </a:rPr>
-              <a:t>Discernment works like any skilled trade. </a:t>
-            </a:r>
-            <a:pPr algn="l" indent="0" marL="0">
-              <a:buNone/>
-            </a:pPr>
-            <a:r>
-              <a:rPr lang="en-US" sz="1500" dirty="0">
+              <a:t>So “read like a Berean” is not this course’s slogan </a:t>
+            </a:r>
+            <a:r>
+              <a:rPr lang="en-US" dirty="0">
                 <a:solidFill>
                   <a:srgbClr val="000000"/>
                 </a:solidFill>
                 <a:latin typeface="Arial" pitchFamily="34" charset="0"/>
                 <a:ea typeface="Arial" pitchFamily="34" charset="-122"/>
                 <a:cs typeface="Arial" pitchFamily="34" charset="-120"/>
-              </a:rPr>
-              <a:t>The carpenter spots the crooked joint without a tape measure. The nurse reads the patient at a glance. The rancher knows the sick animal across the field. </a:t>
-            </a:r>
-            <a:pPr algn="l" indent="0" marL="0">
-              <a:buNone/>
-            </a:pPr>
-            <a:r>
-              <a:rPr lang="en-US" sz="1500" dirty="0">
+                <a:sym typeface="Wingdings" pitchFamily="2" charset="2"/>
+              </a:rPr>
+              <a:t></a:t>
+            </a:r>
+            <a:r>
+              <a:rPr lang="en-US" dirty="0">
                 <a:solidFill>
                   <a:srgbClr val="000000"/>
                 </a:solidFill>
@@ -5007,105 +5308,10 @@
                 <a:ea typeface="Arial" pitchFamily="34" charset="-122"/>
                 <a:cs typeface="Arial" pitchFamily="34" charset="-120"/>
               </a:rPr>
-              <a:t>Nobody downloaded that. They apprenticed — reps, daily, for years, until perception knew things the mouth couldn’t explain.</a:t>
-            </a:r>
-            <a:endParaRPr lang="en-US" sz="1600" dirty="0"/>
-          </a:p>
-        </p:txBody>
-      </p:sp>
-      <p:sp>
-        <p:nvSpPr>
-          <p:cNvPr id="6" name="c3"/>
-          <p:cNvSpPr txBox="1"/>
-          <p:nvPr/>
-        </p:nvSpPr>
-        <p:spPr>
-          <a:xfrm>
-            <a:off x="365760" y="3657600"/>
-            <a:ext cx="8412480" cy="1234440"/>
-          </a:xfrm>
-          <a:prstGeom prst="rect">
-            <a:avLst/>
-          </a:prstGeom>
-          <a:noFill/>
-          <a:ln/>
-        </p:spPr>
-        <p:txBody>
-          <a:bodyPr wrap="square" lIns="0" tIns="0" rIns="0" bIns="0" rtlCol="0" anchor="t"/>
-          <a:lstStyle/>
-          <a:p>
-            <a:pPr algn="l" indent="0" marL="0">
-              <a:buNone/>
-            </a:pPr>
-            <a:r>
-              <a:rPr lang="en-US" sz="1500" b="1" dirty="0">
-                <a:solidFill>
-                  <a:srgbClr val="1F497D"/>
-                </a:solidFill>
-                <a:latin typeface="Arial" pitchFamily="34" charset="0"/>
-                <a:ea typeface="Arial" pitchFamily="34" charset="-122"/>
-                <a:cs typeface="Arial" pitchFamily="34" charset="-120"/>
-              </a:rPr>
-              <a:t>What are the reps? </a:t>
-            </a:r>
-            <a:pPr algn="l" indent="0" marL="0">
-              <a:buNone/>
-            </a:pPr>
-            <a:r>
-              <a:rPr lang="en-US" sz="1450" dirty="0">
-                <a:solidFill>
-                  <a:srgbClr val="000000"/>
-                </a:solidFill>
-                <a:latin typeface="Arial" pitchFamily="34" charset="0"/>
-                <a:ea typeface="Arial" pitchFamily="34" charset="-122"/>
-                <a:cs typeface="Arial" pitchFamily="34" charset="-120"/>
-              </a:rPr>
-              <a:t>Watching God draw the line — across hundreds of texts — between what He accepts and what He rejects: Cain and Abel · Nadab · Saul · Uzzah · Malachi · Ananias · the Pharisees. Every passage is another rep. The daily reader is calibrating his eye to God’s own judgments.</a:t>
-            </a:r>
-            <a:endParaRPr lang="en-US" sz="1600" dirty="0"/>
-          </a:p>
-        </p:txBody>
-      </p:sp>
-      <p:sp>
-        <p:nvSpPr>
-          <p:cNvPr id="7" name="c4"/>
-          <p:cNvSpPr txBox="1"/>
-          <p:nvPr/>
-        </p:nvSpPr>
-        <p:spPr>
-          <a:xfrm>
-            <a:off x="365760" y="5029200"/>
-            <a:ext cx="8412480" cy="1188720"/>
-          </a:xfrm>
-          <a:prstGeom prst="rect">
-            <a:avLst/>
-          </a:prstGeom>
-          <a:noFill/>
-          <a:ln/>
-        </p:spPr>
-        <p:txBody>
-          <a:bodyPr wrap="square" lIns="0" tIns="0" rIns="0" bIns="0" rtlCol="0" anchor="t"/>
-          <a:lstStyle/>
-          <a:p>
-            <a:pPr algn="l" indent="0" marL="0">
-              <a:buNone/>
-            </a:pPr>
-            <a:r>
-              <a:rPr lang="en-US" sz="1500" dirty="0">
-                <a:solidFill>
-                  <a:srgbClr val="000000"/>
-                </a:solidFill>
-                <a:latin typeface="Arial" pitchFamily="34" charset="0"/>
-                <a:ea typeface="Arial" pitchFamily="34" charset="-122"/>
-                <a:cs typeface="Arial" pitchFamily="34" charset="-120"/>
-              </a:rPr>
-              <a:t>So “read like a Berean” is not this course’s slogan — it is its </a:t>
-            </a:r>
-            <a:pPr algn="l" indent="0" marL="0">
-              <a:buNone/>
-            </a:pPr>
-            <a:r>
-              <a:rPr lang="en-US" sz="1500" b="1" dirty="0">
+              <a:t> it is its </a:t>
+            </a:r>
+            <a:r>
+              <a:rPr lang="en-US" b="1" dirty="0">
                 <a:solidFill>
                   <a:srgbClr val="1F497D"/>
                 </a:solidFill>
@@ -5116,11 +5322,8 @@
               <a:t>engine.
 </a:t>
             </a:r>
-            <a:pPr algn="l" indent="0" marL="0">
-              <a:buNone/>
-            </a:pPr>
-            <a:r>
-              <a:rPr lang="en-US" sz="1450" dirty="0">
+            <a:r>
+              <a:rPr lang="en-US" dirty="0">
                 <a:solidFill>
                   <a:srgbClr val="000000"/>
                 </a:solidFill>
@@ -5128,13 +5331,33 @@
                 <a:ea typeface="Arial" pitchFamily="34" charset="-122"/>
                 <a:cs typeface="Arial" pitchFamily="34" charset="-120"/>
               </a:rPr>
-              <a:t>The man not in the Word daily isn’t merely under-informed. He is missing the training data — sincere, and uncalibrated. </a:t>
-            </a:r>
-            <a:pPr algn="l" indent="0" marL="0">
-              <a:buNone/>
-            </a:pPr>
-            <a:r>
-              <a:rPr lang="en-US" sz="1450" b="1" i="1" dirty="0">
+              <a:t>The man not in the Word daily isn’t merely under-informed. He is missing the training data </a:t>
+            </a:r>
+            <a:r>
+              <a:rPr lang="en-US" dirty="0">
+                <a:solidFill>
+                  <a:srgbClr val="000000"/>
+                </a:solidFill>
+                <a:latin typeface="Arial" pitchFamily="34" charset="0"/>
+                <a:ea typeface="Arial" pitchFamily="34" charset="-122"/>
+                <a:cs typeface="Arial" pitchFamily="34" charset="-120"/>
+                <a:sym typeface="Wingdings" pitchFamily="2" charset="2"/>
+              </a:rPr>
+              <a:t></a:t>
+            </a:r>
+            <a:r>
+              <a:rPr lang="en-US" dirty="0">
+                <a:solidFill>
+                  <a:srgbClr val="000000"/>
+                </a:solidFill>
+                <a:latin typeface="Arial" pitchFamily="34" charset="0"/>
+                <a:ea typeface="Arial" pitchFamily="34" charset="-122"/>
+                <a:cs typeface="Arial" pitchFamily="34" charset="-120"/>
+              </a:rPr>
+              <a:t> sincere, and uncalibrated. </a:t>
+            </a:r>
+            <a:r>
+              <a:rPr lang="en-US" b="1" i="1" dirty="0">
                 <a:solidFill>
                   <a:srgbClr val="1F497D"/>
                 </a:solidFill>
@@ -5144,7 +5367,7 @@
               </a:rPr>
               <a:t>One chapter a day, eager and examining, is how the eye is built.</a:t>
             </a:r>
-            <a:endParaRPr lang="en-US" sz="1600" dirty="0"/>
+            <a:endParaRPr lang="en-US" sz="2000" dirty="0"/>
           </a:p>
         </p:txBody>
       </p:sp>
@@ -5162,26 +5385,26 @@
               <p:cTn id="2" dur="indefinite" nodeType="mainSeq">
                 <p:childTnLst>
                   <p:par>
-                    <p:cTn id="7" fill="hold">
+                    <p:cTn id="3" fill="hold">
                       <p:stCondLst>
                         <p:cond delay="indefinite"/>
                       </p:stCondLst>
                       <p:childTnLst>
                         <p:par>
-                          <p:cTn id="8" fill="hold">
+                          <p:cTn id="4" fill="hold">
                             <p:stCondLst>
                               <p:cond delay="0"/>
                             </p:stCondLst>
                             <p:childTnLst>
                               <p:par>
-                                <p:cTn id="3" presetID="42" presetClass="entr" presetSubtype="0" fill="hold" grpId="0" nodeType="clickEffect">
+                                <p:cTn id="5" presetID="42" presetClass="entr" presetSubtype="0" fill="hold" nodeType="clickEffect">
                                   <p:stCondLst>
                                     <p:cond delay="0"/>
                                   </p:stCondLst>
                                   <p:childTnLst>
                                     <p:set>
                                       <p:cBhvr>
-                                        <p:cTn id="4" dur="1" fill="hold">
+                                        <p:cTn id="6" dur="1" fill="hold">
                                           <p:stCondLst>
                                             <p:cond delay="0"/>
                                           </p:stCondLst>
@@ -5199,7 +5422,7 @@
                                     </p:set>
                                     <p:animEffect transition="in" filter="fade">
                                       <p:cBhvr>
-                                        <p:cTn id="5" dur="1000"/>
+                                        <p:cTn id="7" dur="1000"/>
                                         <p:tgtEl>
                                           <p:spTgt spid="4"/>
                                         </p:tgtEl>
@@ -5207,7 +5430,7 @@
                                     </p:animEffect>
                                     <p:anim calcmode="lin" valueType="num">
                                       <p:cBhvr>
-                                        <p:cTn id="6" dur="1000" fill="hold"/>
+                                        <p:cTn id="8" dur="1000" fill="hold"/>
                                         <p:tgtEl>
                                           <p:spTgt spid="4"/>
                                         </p:tgtEl>
@@ -5238,26 +5461,26 @@
                     </p:cTn>
                   </p:par>
                   <p:par>
-                    <p:cTn id="13" fill="hold">
+                    <p:cTn id="9" fill="hold">
                       <p:stCondLst>
                         <p:cond delay="indefinite"/>
                       </p:stCondLst>
                       <p:childTnLst>
                         <p:par>
-                          <p:cTn id="14" fill="hold">
+                          <p:cTn id="10" fill="hold">
                             <p:stCondLst>
                               <p:cond delay="0"/>
                             </p:stCondLst>
                             <p:childTnLst>
                               <p:par>
-                                <p:cTn id="9" presetID="42" presetClass="entr" presetSubtype="0" fill="hold" grpId="0" nodeType="clickEffect">
+                                <p:cTn id="11" presetID="42" presetClass="entr" presetSubtype="0" fill="hold" nodeType="clickEffect">
                                   <p:stCondLst>
                                     <p:cond delay="0"/>
                                   </p:stCondLst>
                                   <p:childTnLst>
                                     <p:set>
                                       <p:cBhvr>
-                                        <p:cTn id="10" dur="1" fill="hold">
+                                        <p:cTn id="12" dur="1" fill="hold">
                                           <p:stCondLst>
                                             <p:cond delay="0"/>
                                           </p:stCondLst>
@@ -5275,7 +5498,7 @@
                                     </p:set>
                                     <p:animEffect transition="in" filter="fade">
                                       <p:cBhvr>
-                                        <p:cTn id="11" dur="1000"/>
+                                        <p:cTn id="13" dur="1000"/>
                                         <p:tgtEl>
                                           <p:spTgt spid="5"/>
                                         </p:tgtEl>
@@ -5283,7 +5506,7 @@
                                     </p:animEffect>
                                     <p:anim calcmode="lin" valueType="num">
                                       <p:cBhvr>
-                                        <p:cTn id="12" dur="1000" fill="hold"/>
+                                        <p:cTn id="14" dur="1000" fill="hold"/>
                                         <p:tgtEl>
                                           <p:spTgt spid="5"/>
                                         </p:tgtEl>
@@ -5314,26 +5537,26 @@
                     </p:cTn>
                   </p:par>
                   <p:par>
-                    <p:cTn id="19" fill="hold">
+                    <p:cTn id="15" fill="hold">
                       <p:stCondLst>
                         <p:cond delay="indefinite"/>
                       </p:stCondLst>
                       <p:childTnLst>
                         <p:par>
-                          <p:cTn id="20" fill="hold">
+                          <p:cTn id="16" fill="hold">
                             <p:stCondLst>
                               <p:cond delay="0"/>
                             </p:stCondLst>
                             <p:childTnLst>
                               <p:par>
-                                <p:cTn id="15" presetID="42" presetClass="entr" presetSubtype="0" fill="hold" grpId="0" nodeType="clickEffect">
+                                <p:cTn id="17" presetID="42" presetClass="entr" presetSubtype="0" fill="hold" nodeType="clickEffect">
                                   <p:stCondLst>
                                     <p:cond delay="0"/>
                                   </p:stCondLst>
                                   <p:childTnLst>
                                     <p:set>
                                       <p:cBhvr>
-                                        <p:cTn id="16" dur="1" fill="hold">
+                                        <p:cTn id="18" dur="1" fill="hold">
                                           <p:stCondLst>
                                             <p:cond delay="0"/>
                                           </p:stCondLst>
@@ -5351,7 +5574,7 @@
                                     </p:set>
                                     <p:animEffect transition="in" filter="fade">
                                       <p:cBhvr>
-                                        <p:cTn id="17" dur="1000"/>
+                                        <p:cTn id="19" dur="1000"/>
                                         <p:tgtEl>
                                           <p:spTgt spid="6"/>
                                         </p:tgtEl>
@@ -5359,7 +5582,7 @@
                                     </p:animEffect>
                                     <p:anim calcmode="lin" valueType="num">
                                       <p:cBhvr>
-                                        <p:cTn id="18" dur="1000" fill="hold"/>
+                                        <p:cTn id="20" dur="1000" fill="hold"/>
                                         <p:tgtEl>
                                           <p:spTgt spid="6"/>
                                         </p:tgtEl>
@@ -5390,26 +5613,26 @@
                     </p:cTn>
                   </p:par>
                   <p:par>
-                    <p:cTn id="25" fill="hold">
+                    <p:cTn id="21" fill="hold">
                       <p:stCondLst>
                         <p:cond delay="indefinite"/>
                       </p:stCondLst>
                       <p:childTnLst>
                         <p:par>
-                          <p:cTn id="26" fill="hold">
+                          <p:cTn id="22" fill="hold">
                             <p:stCondLst>
                               <p:cond delay="0"/>
                             </p:stCondLst>
                             <p:childTnLst>
                               <p:par>
-                                <p:cTn id="21" presetID="42" presetClass="entr" presetSubtype="0" fill="hold" grpId="0" nodeType="clickEffect">
+                                <p:cTn id="23" presetID="42" presetClass="entr" presetSubtype="0" fill="hold" nodeType="clickEffect">
                                   <p:stCondLst>
                                     <p:cond delay="0"/>
                                   </p:stCondLst>
                                   <p:childTnLst>
                                     <p:set>
                                       <p:cBhvr>
-                                        <p:cTn id="22" dur="1" fill="hold">
+                                        <p:cTn id="24" dur="1" fill="hold">
                                           <p:stCondLst>
                                             <p:cond delay="0"/>
                                           </p:stCondLst>
@@ -5427,7 +5650,7 @@
                                     </p:set>
                                     <p:animEffect transition="in" filter="fade">
                                       <p:cBhvr>
-                                        <p:cTn id="23" dur="1000"/>
+                                        <p:cTn id="25" dur="1000"/>
                                         <p:tgtEl>
                                           <p:spTgt spid="7"/>
                                         </p:tgtEl>
@@ -5435,7 +5658,7 @@
                                     </p:animEffect>
                                     <p:anim calcmode="lin" valueType="num">
                                       <p:cBhvr>
-                                        <p:cTn id="24" dur="1000" fill="hold"/>
+                                        <p:cTn id="26" dur="1000" fill="hold"/>
                                         <p:tgtEl>
                                           <p:spTgt spid="7"/>
                                         </p:tgtEl>
@@ -5528,7 +5751,7 @@
           <a:bodyPr wrap="square" lIns="0" tIns="0" rIns="0" bIns="0" rtlCol="0" anchor="t"/>
           <a:lstStyle/>
           <a:p>
-            <a:pPr algn="l" indent="0" marL="0">
+            <a:pPr marL="0" indent="0" algn="l">
               <a:buNone/>
             </a:pPr>
             <a:r>
@@ -5567,11 +5790,11 @@
           <a:bodyPr wrap="square" lIns="0" tIns="0" rIns="0" bIns="0" rtlCol="0" anchor="t"/>
           <a:lstStyle/>
           <a:p>
-            <a:pPr algn="l" indent="0" marL="0">
+            <a:pPr marL="0" indent="0" algn="l">
               <a:buNone/>
             </a:pPr>
             <a:r>
-              <a:rPr lang="en-US" sz="1300" b="1" dirty="0">
+              <a:rPr lang="en-US" sz="2000" b="1" dirty="0">
                 <a:solidFill>
                   <a:srgbClr val="4F81BD"/>
                 </a:solidFill>
@@ -5581,7 +5804,7 @@
               </a:rPr>
               <a:t>Ten minutes — this is the week’s practice</a:t>
             </a:r>
-            <a:endParaRPr lang="en-US" sz="1600" dirty="0"/>
+            <a:endParaRPr lang="en-US" sz="2800" dirty="0"/>
           </a:p>
         </p:txBody>
       </p:sp>
@@ -5606,11 +5829,11 @@
           <a:bodyPr wrap="square" lIns="0" tIns="0" rIns="0" bIns="0" rtlCol="0" anchor="t"/>
           <a:lstStyle/>
           <a:p>
-            <a:pPr algn="l" indent="0" marL="0">
+            <a:pPr marL="0" indent="0" algn="l">
               <a:buNone/>
             </a:pPr>
             <a:r>
-              <a:rPr lang="en-US" sz="2000" b="1" dirty="0">
+              <a:rPr lang="en-US" sz="2400" b="1" dirty="0">
                 <a:solidFill>
                   <a:srgbClr val="1F497D"/>
                 </a:solidFill>
@@ -5620,11 +5843,81 @@
               </a:rPr>
               <a:t>1.  </a:t>
             </a:r>
-            <a:pPr algn="l" indent="0" marL="0">
+            <a:r>
+              <a:rPr lang="en-US" sz="2000" dirty="0">
+                <a:solidFill>
+                  <a:srgbClr val="000000"/>
+                </a:solidFill>
+                <a:latin typeface="Arial" pitchFamily="34" charset="0"/>
+                <a:ea typeface="Arial" pitchFamily="34" charset="-122"/>
+                <a:cs typeface="Arial" pitchFamily="34" charset="-120"/>
+              </a:rPr>
+              <a:t>Which half of the Berean posture is harder for you </a:t>
+            </a:r>
+            <a:r>
+              <a:rPr lang="en-US" sz="2000" dirty="0">
+                <a:solidFill>
+                  <a:srgbClr val="000000"/>
+                </a:solidFill>
+                <a:latin typeface="Arial" pitchFamily="34" charset="0"/>
+                <a:ea typeface="Arial" pitchFamily="34" charset="-122"/>
+                <a:cs typeface="Arial" pitchFamily="34" charset="-120"/>
+                <a:sym typeface="Wingdings" pitchFamily="2" charset="2"/>
+              </a:rPr>
+              <a:t></a:t>
+            </a:r>
+            <a:r>
+              <a:rPr lang="en-US" sz="2000" dirty="0">
+                <a:solidFill>
+                  <a:srgbClr val="000000"/>
+                </a:solidFill>
+                <a:latin typeface="Arial" pitchFamily="34" charset="0"/>
+                <a:ea typeface="Arial" pitchFamily="34" charset="-122"/>
+                <a:cs typeface="Arial" pitchFamily="34" charset="-120"/>
+              </a:rPr>
+              <a:t> receiving eagerly, or examining daily? What does your harder half cost you?</a:t>
+            </a:r>
+            <a:endParaRPr lang="en-US" dirty="0"/>
+          </a:p>
+        </p:txBody>
+      </p:sp>
+      <p:sp>
+        <p:nvSpPr>
+          <p:cNvPr id="5" name="x2"/>
+          <p:cNvSpPr txBox="1"/>
+          <p:nvPr/>
+        </p:nvSpPr>
+        <p:spPr>
+          <a:xfrm>
+            <a:off x="457200" y="2971800"/>
+            <a:ext cx="8229600" cy="1417320"/>
+          </a:xfrm>
+          <a:prstGeom prst="rect">
+            <a:avLst/>
+          </a:prstGeom>
+          <a:noFill/>
+          <a:ln/>
+        </p:spPr>
+        <p:txBody>
+          <a:bodyPr wrap="square" lIns="0" tIns="0" rIns="0" bIns="0" rtlCol="0" anchor="t"/>
+          <a:lstStyle/>
+          <a:p>
+            <a:pPr marL="0" indent="0" algn="l">
               <a:buNone/>
             </a:pPr>
             <a:r>
-              <a:rPr lang="en-US" sz="1800" dirty="0">
+              <a:rPr lang="en-US" sz="2400" b="1" dirty="0">
+                <a:solidFill>
+                  <a:srgbClr val="1F497D"/>
+                </a:solidFill>
+                <a:latin typeface="Arial" pitchFamily="34" charset="0"/>
+                <a:ea typeface="Arial" pitchFamily="34" charset="-122"/>
+                <a:cs typeface="Arial" pitchFamily="34" charset="-120"/>
+              </a:rPr>
+              <a:t>2.  </a:t>
+            </a:r>
+            <a:r>
+              <a:rPr lang="en-US" sz="2000" dirty="0">
                 <a:solidFill>
                   <a:srgbClr val="000000"/>
                 </a:solidFill>
@@ -5632,22 +5925,45 @@
                 <a:ea typeface="Arial" pitchFamily="34" charset="-122"/>
                 <a:cs typeface="Arial" pitchFamily="34" charset="-120"/>
               </a:rPr>
-              <a:t>Which half of the Berean posture is harder for you — receiving eagerly, or examining daily? What does your harder half cost you?</a:t>
-            </a:r>
-            <a:endParaRPr lang="en-US" sz="1600" dirty="0"/>
-          </a:p>
-        </p:txBody>
-      </p:sp>
-      <p:sp>
-        <p:nvSpPr>
-          <p:cNvPr id="5" name="x2"/>
+              <a:t>What was the last teaching you actually tested against Scripture </a:t>
+            </a:r>
+            <a:r>
+              <a:rPr lang="en-US" sz="2000" dirty="0">
+                <a:solidFill>
+                  <a:srgbClr val="000000"/>
+                </a:solidFill>
+                <a:latin typeface="Arial" pitchFamily="34" charset="0"/>
+                <a:ea typeface="Arial" pitchFamily="34" charset="-122"/>
+                <a:cs typeface="Arial" pitchFamily="34" charset="-120"/>
+                <a:sym typeface="Wingdings" pitchFamily="2" charset="2"/>
+              </a:rPr>
+              <a:t></a:t>
+            </a:r>
+            <a:r>
+              <a:rPr lang="en-US" sz="2000" dirty="0">
+                <a:solidFill>
+                  <a:srgbClr val="000000"/>
+                </a:solidFill>
+                <a:latin typeface="Arial" pitchFamily="34" charset="0"/>
+                <a:ea typeface="Arial" pitchFamily="34" charset="-122"/>
+                <a:cs typeface="Arial" pitchFamily="34" charset="-120"/>
+              </a:rPr>
+              <a:t> rather than simply absorbed? How did you test it?</a:t>
+            </a:r>
+            <a:endParaRPr lang="en-US" dirty="0"/>
+          </a:p>
+        </p:txBody>
+      </p:sp>
+      <p:sp>
+        <p:nvSpPr>
+          <p:cNvPr id="6" name="x3"/>
           <p:cNvSpPr txBox="1"/>
           <p:nvPr/>
         </p:nvSpPr>
         <p:spPr>
           <a:xfrm>
-            <a:off x="457200" y="2971800"/>
-            <a:ext cx="8229600" cy="1417320"/>
+            <a:off x="457200" y="4800600"/>
+            <a:ext cx="8229600" cy="1097280"/>
           </a:xfrm>
           <a:prstGeom prst="rect">
             <a:avLst/>
@@ -5659,7 +5975,7 @@
           <a:bodyPr wrap="square" lIns="0" tIns="0" rIns="0" bIns="0" rtlCol="0" anchor="t"/>
           <a:lstStyle/>
           <a:p>
-            <a:pPr algn="l" indent="0" marL="0">
+            <a:pPr marL="0" indent="0" algn="l">
               <a:buNone/>
             </a:pPr>
             <a:r>
@@ -5671,13 +5987,33 @@
                 <a:ea typeface="Arial" pitchFamily="34" charset="-122"/>
                 <a:cs typeface="Arial" pitchFamily="34" charset="-120"/>
               </a:rPr>
-              <a:t>2.  </a:t>
-            </a:r>
-            <a:pPr algn="l" indent="0" marL="0">
-              <a:buNone/>
-            </a:pPr>
-            <a:r>
-              <a:rPr lang="en-US" sz="1800" dirty="0">
+              <a:t>And yes </a:t>
+            </a:r>
+            <a:r>
+              <a:rPr lang="en-US" sz="2000" b="1" dirty="0">
+                <a:solidFill>
+                  <a:srgbClr val="1F497D"/>
+                </a:solidFill>
+                <a:latin typeface="Arial" pitchFamily="34" charset="0"/>
+                <a:ea typeface="Arial" pitchFamily="34" charset="-122"/>
+                <a:cs typeface="Arial" pitchFamily="34" charset="-120"/>
+                <a:sym typeface="Wingdings" pitchFamily="2" charset="2"/>
+              </a:rPr>
+              <a:t></a:t>
+            </a:r>
+            <a:r>
+              <a:rPr lang="en-US" sz="2000" b="1" dirty="0">
+                <a:solidFill>
+                  <a:srgbClr val="1F497D"/>
+                </a:solidFill>
+                <a:latin typeface="Arial" pitchFamily="34" charset="0"/>
+                <a:ea typeface="Arial" pitchFamily="34" charset="-122"/>
+                <a:cs typeface="Arial" pitchFamily="34" charset="-120"/>
+              </a:rPr>
+              <a:t> that includes this class. </a:t>
+            </a:r>
+            <a:r>
+              <a:rPr lang="en-US" sz="2000" i="1" dirty="0">
                 <a:solidFill>
                   <a:srgbClr val="000000"/>
                 </a:solidFill>
@@ -5685,62 +6021,9 @@
                 <a:ea typeface="Arial" pitchFamily="34" charset="-122"/>
                 <a:cs typeface="Arial" pitchFamily="34" charset="-120"/>
               </a:rPr>
-              <a:t>What was the last teaching you actually tested against Scripture — rather than simply absorbed? How did you test it?</a:t>
-            </a:r>
-            <a:endParaRPr lang="en-US" sz="1600" dirty="0"/>
-          </a:p>
-        </p:txBody>
-      </p:sp>
-      <p:sp>
-        <p:nvSpPr>
-          <p:cNvPr id="6" name="x3"/>
-          <p:cNvSpPr txBox="1"/>
-          <p:nvPr/>
-        </p:nvSpPr>
-        <p:spPr>
-          <a:xfrm>
-            <a:off x="457200" y="4800600"/>
-            <a:ext cx="8229600" cy="1097280"/>
-          </a:xfrm>
-          <a:prstGeom prst="rect">
-            <a:avLst/>
-          </a:prstGeom>
-          <a:noFill/>
-          <a:ln/>
-        </p:spPr>
-        <p:txBody>
-          <a:bodyPr wrap="square" lIns="0" tIns="0" rIns="0" bIns="0" rtlCol="0" anchor="t"/>
-          <a:lstStyle/>
-          <a:p>
-            <a:pPr algn="l" indent="0" marL="0">
-              <a:buNone/>
-            </a:pPr>
-            <a:r>
-              <a:rPr lang="en-US" sz="1400" b="1" dirty="0">
-                <a:solidFill>
-                  <a:srgbClr val="1F497D"/>
-                </a:solidFill>
-                <a:latin typeface="Arial" pitchFamily="34" charset="0"/>
-                <a:ea typeface="Arial" pitchFamily="34" charset="-122"/>
-                <a:cs typeface="Arial" pitchFamily="34" charset="-120"/>
-              </a:rPr>
-              <a:t>And yes — that includes this class. </a:t>
-            </a:r>
-            <a:pPr algn="l" indent="0" marL="0">
-              <a:buNone/>
-            </a:pPr>
-            <a:r>
-              <a:rPr lang="en-US" sz="1400" i="1" dirty="0">
-                <a:solidFill>
-                  <a:srgbClr val="000000"/>
-                </a:solidFill>
-                <a:latin typeface="Arial" pitchFamily="34" charset="0"/>
-                <a:ea typeface="Arial" pitchFamily="34" charset="-122"/>
-                <a:cs typeface="Arial" pitchFamily="34" charset="-120"/>
-              </a:rPr>
               <a:t>Test what you hear here against the text. That is the whole point.</a:t>
             </a:r>
-            <a:endParaRPr lang="en-US" sz="1600" dirty="0"/>
+            <a:endParaRPr lang="en-US" sz="2400" dirty="0"/>
           </a:p>
         </p:txBody>
       </p:sp>
@@ -5758,26 +6041,26 @@
               <p:cTn id="2" dur="indefinite" nodeType="mainSeq">
                 <p:childTnLst>
                   <p:par>
-                    <p:cTn id="7" fill="hold">
+                    <p:cTn id="3" fill="hold">
                       <p:stCondLst>
                         <p:cond delay="indefinite"/>
                       </p:stCondLst>
                       <p:childTnLst>
                         <p:par>
-                          <p:cTn id="8" fill="hold">
+                          <p:cTn id="4" fill="hold">
                             <p:stCondLst>
                               <p:cond delay="0"/>
                             </p:stCondLst>
                             <p:childTnLst>
                               <p:par>
-                                <p:cTn id="3" presetID="42" presetClass="entr" presetSubtype="0" fill="hold" grpId="0" nodeType="clickEffect">
+                                <p:cTn id="5" presetID="42" presetClass="entr" presetSubtype="0" fill="hold" nodeType="clickEffect">
                                   <p:stCondLst>
                                     <p:cond delay="0"/>
                                   </p:stCondLst>
                                   <p:childTnLst>
                                     <p:set>
                                       <p:cBhvr>
-                                        <p:cTn id="4" dur="1" fill="hold">
+                                        <p:cTn id="6" dur="1" fill="hold">
                                           <p:stCondLst>
                                             <p:cond delay="0"/>
                                           </p:stCondLst>
@@ -5795,7 +6078,7 @@
                                     </p:set>
                                     <p:animEffect transition="in" filter="fade">
                                       <p:cBhvr>
-                                        <p:cTn id="5" dur="1000"/>
+                                        <p:cTn id="7" dur="1000"/>
                                         <p:tgtEl>
                                           <p:spTgt spid="4"/>
                                         </p:tgtEl>
@@ -5803,7 +6086,7 @@
                                     </p:animEffect>
                                     <p:anim calcmode="lin" valueType="num">
                                       <p:cBhvr>
-                                        <p:cTn id="6" dur="1000" fill="hold"/>
+                                        <p:cTn id="8" dur="1000" fill="hold"/>
                                         <p:tgtEl>
                                           <p:spTgt spid="4"/>
                                         </p:tgtEl>
@@ -5834,26 +6117,26 @@
                     </p:cTn>
                   </p:par>
                   <p:par>
-                    <p:cTn id="13" fill="hold">
+                    <p:cTn id="9" fill="hold">
                       <p:stCondLst>
                         <p:cond delay="indefinite"/>
                       </p:stCondLst>
                       <p:childTnLst>
                         <p:par>
-                          <p:cTn id="14" fill="hold">
+                          <p:cTn id="10" fill="hold">
                             <p:stCondLst>
                               <p:cond delay="0"/>
                             </p:stCondLst>
                             <p:childTnLst>
                               <p:par>
-                                <p:cTn id="9" presetID="42" presetClass="entr" presetSubtype="0" fill="hold" grpId="0" nodeType="clickEffect">
+                                <p:cTn id="11" presetID="42" presetClass="entr" presetSubtype="0" fill="hold" nodeType="clickEffect">
                                   <p:stCondLst>
                                     <p:cond delay="0"/>
                                   </p:stCondLst>
                                   <p:childTnLst>
                                     <p:set>
                                       <p:cBhvr>
-                                        <p:cTn id="10" dur="1" fill="hold">
+                                        <p:cTn id="12" dur="1" fill="hold">
                                           <p:stCondLst>
                                             <p:cond delay="0"/>
                                           </p:stCondLst>
@@ -5871,7 +6154,7 @@
                                     </p:set>
                                     <p:animEffect transition="in" filter="fade">
                                       <p:cBhvr>
-                                        <p:cTn id="11" dur="1000"/>
+                                        <p:cTn id="13" dur="1000"/>
                                         <p:tgtEl>
                                           <p:spTgt spid="5"/>
                                         </p:tgtEl>
@@ -5879,7 +6162,7 @@
                                     </p:animEffect>
                                     <p:anim calcmode="lin" valueType="num">
                                       <p:cBhvr>
-                                        <p:cTn id="12" dur="1000" fill="hold"/>
+                                        <p:cTn id="14" dur="1000" fill="hold"/>
                                         <p:tgtEl>
                                           <p:spTgt spid="5"/>
                                         </p:tgtEl>
@@ -5910,26 +6193,26 @@
                     </p:cTn>
                   </p:par>
                   <p:par>
-                    <p:cTn id="19" fill="hold">
+                    <p:cTn id="15" fill="hold">
                       <p:stCondLst>
                         <p:cond delay="indefinite"/>
                       </p:stCondLst>
                       <p:childTnLst>
                         <p:par>
-                          <p:cTn id="20" fill="hold">
+                          <p:cTn id="16" fill="hold">
                             <p:stCondLst>
                               <p:cond delay="0"/>
                             </p:stCondLst>
                             <p:childTnLst>
                               <p:par>
-                                <p:cTn id="15" presetID="42" presetClass="entr" presetSubtype="0" fill="hold" grpId="0" nodeType="clickEffect">
+                                <p:cTn id="17" presetID="42" presetClass="entr" presetSubtype="0" fill="hold" nodeType="clickEffect">
                                   <p:stCondLst>
                                     <p:cond delay="0"/>
                                   </p:stCondLst>
                                   <p:childTnLst>
                                     <p:set>
                                       <p:cBhvr>
-                                        <p:cTn id="16" dur="1" fill="hold">
+                                        <p:cTn id="18" dur="1" fill="hold">
                                           <p:stCondLst>
                                             <p:cond delay="0"/>
                                           </p:stCondLst>
@@ -5947,7 +6230,7 @@
                                     </p:set>
                                     <p:animEffect transition="in" filter="fade">
                                       <p:cBhvr>
-                                        <p:cTn id="17" dur="1000"/>
+                                        <p:cTn id="19" dur="1000"/>
                                         <p:tgtEl>
                                           <p:spTgt spid="6"/>
                                         </p:tgtEl>
@@ -5955,7 +6238,7 @@
                                     </p:animEffect>
                                     <p:anim calcmode="lin" valueType="num">
                                       <p:cBhvr>
-                                        <p:cTn id="18" dur="1000" fill="hold"/>
+                                        <p:cTn id="20" dur="1000" fill="hold"/>
                                         <p:tgtEl>
                                           <p:spTgt spid="6"/>
                                         </p:tgtEl>
@@ -6048,7 +6331,7 @@
           <a:bodyPr wrap="square" lIns="0" tIns="0" rIns="0" bIns="0" rtlCol="0" anchor="t"/>
           <a:lstStyle/>
           <a:p>
-            <a:pPr algn="l" indent="0" marL="0">
+            <a:pPr marL="0" indent="0" algn="l">
               <a:buNone/>
             </a:pPr>
             <a:r>
@@ -6087,11 +6370,11 @@
           <a:bodyPr wrap="square" lIns="0" tIns="0" rIns="0" bIns="0" rtlCol="0" anchor="t"/>
           <a:lstStyle/>
           <a:p>
-            <a:pPr algn="l" indent="0" marL="0">
+            <a:pPr marL="0" indent="0" algn="l">
               <a:buNone/>
             </a:pPr>
             <a:r>
-              <a:rPr lang="en-US" sz="1300" b="1" dirty="0">
+              <a:rPr lang="en-US" sz="2000" b="1" dirty="0">
                 <a:solidFill>
                   <a:srgbClr val="4F81BD"/>
                 </a:solidFill>
@@ -6099,9 +6382,32 @@
                 <a:ea typeface="Arial" pitchFamily="34" charset="-122"/>
                 <a:cs typeface="Arial" pitchFamily="34" charset="-120"/>
               </a:rPr>
-              <a:t>For next week — eager, and examining</a:t>
-            </a:r>
-            <a:endParaRPr lang="en-US" sz="1600" dirty="0"/>
+              <a:t>For next week </a:t>
+            </a:r>
+            <a:r>
+              <a:rPr lang="en-US" sz="2000" b="1" dirty="0">
+                <a:solidFill>
+                  <a:srgbClr val="4F81BD"/>
+                </a:solidFill>
+                <a:latin typeface="Arial" pitchFamily="34" charset="0"/>
+                <a:ea typeface="Arial" pitchFamily="34" charset="-122"/>
+                <a:cs typeface="Arial" pitchFamily="34" charset="-120"/>
+                <a:sym typeface="Wingdings" pitchFamily="2" charset="2"/>
+              </a:rPr>
+              <a:t></a:t>
+            </a:r>
+            <a:r>
+              <a:rPr lang="en-US" sz="2000" b="1" dirty="0">
+                <a:solidFill>
+                  <a:srgbClr val="4F81BD"/>
+                </a:solidFill>
+                <a:latin typeface="Arial" pitchFamily="34" charset="0"/>
+                <a:ea typeface="Arial" pitchFamily="34" charset="-122"/>
+                <a:cs typeface="Arial" pitchFamily="34" charset="-120"/>
+              </a:rPr>
+              <a:t> eager, and examining</a:t>
+            </a:r>
+            <a:endParaRPr lang="en-US" sz="2800" dirty="0"/>
           </a:p>
         </p:txBody>
       </p:sp>
@@ -6126,11 +6432,11 @@
           <a:bodyPr wrap="square" lIns="0" tIns="0" rIns="0" bIns="0" rtlCol="0" anchor="t"/>
           <a:lstStyle/>
           <a:p>
-            <a:pPr algn="l" indent="0" marL="0">
+            <a:pPr marL="0" indent="0" algn="l">
               <a:buNone/>
             </a:pPr>
             <a:r>
-              <a:rPr lang="en-US" sz="1700" b="1" dirty="0">
+              <a:rPr lang="en-US" sz="2000" b="1" dirty="0">
                 <a:solidFill>
                   <a:srgbClr val="1F497D"/>
                 </a:solidFill>
@@ -6141,11 +6447,48 @@
               <a:t>For next week, read:
 </a:t>
             </a:r>
-            <a:pPr algn="l" indent="0" marL="0">
+            <a:r>
+              <a:rPr lang="en-US" dirty="0">
+                <a:solidFill>
+                  <a:srgbClr val="000000"/>
+                </a:solidFill>
+                <a:latin typeface="Arial" pitchFamily="34" charset="0"/>
+                <a:ea typeface="Arial" pitchFamily="34" charset="-122"/>
+                <a:cs typeface="Arial" pitchFamily="34" charset="-120"/>
+              </a:rPr>
+              <a:t>•  Genesis 3:1–13  — the serpent’s method. What exactly does he attack first? Notice it is not her morals.
+•  1 Corinthians 13  — what does love do with the truth (v.6)? Can love and truth ever be separated?</a:t>
+            </a:r>
+            <a:endParaRPr lang="en-US" sz="2000" dirty="0"/>
+          </a:p>
+        </p:txBody>
+      </p:sp>
+      <p:sp>
+        <p:nvSpPr>
+          <p:cNvPr id="5" name="z2"/>
+          <p:cNvSpPr txBox="1"/>
+          <p:nvPr/>
+        </p:nvSpPr>
+        <p:spPr>
+          <a:xfrm>
+            <a:off x="365760" y="2834640"/>
+            <a:ext cx="8412480" cy="914400"/>
+          </a:xfrm>
+          <a:prstGeom prst="rect">
+            <a:avLst/>
+          </a:prstGeom>
+          <a:noFill/>
+          <a:ln/>
+        </p:spPr>
+        <p:txBody>
+          <a:bodyPr wrap="square" lIns="0" tIns="0" rIns="0" bIns="0" rtlCol="0" anchor="t"/>
+          <a:lstStyle/>
+          <a:p>
+            <a:pPr marL="0" indent="0" algn="l">
               <a:buNone/>
             </a:pPr>
             <a:r>
-              <a:rPr lang="en-US" sz="1550" dirty="0">
+              <a:rPr lang="en-US" b="1" dirty="0">
                 <a:solidFill>
                   <a:srgbClr val="000000"/>
                 </a:solidFill>
@@ -6153,14 +6496,49 @@
                 <a:ea typeface="Arial" pitchFamily="34" charset="-122"/>
                 <a:cs typeface="Arial" pitchFamily="34" charset="-120"/>
               </a:rPr>
-              <a:t>•  Genesis 3:1–13  — the serpent’s method. What exactly does he attack first? Notice it is not her morals.
-</a:t>
-            </a:r>
-            <a:pPr algn="l" indent="0" marL="0">
+              <a:t>Next week: </a:t>
+            </a:r>
+            <a:r>
+              <a:rPr lang="en-US" i="1" dirty="0">
+                <a:solidFill>
+                  <a:srgbClr val="000000"/>
+                </a:solidFill>
+                <a:latin typeface="Arial" pitchFamily="34" charset="0"/>
+                <a:ea typeface="Arial" pitchFamily="34" charset="-122"/>
+                <a:cs typeface="Arial" pitchFamily="34" charset="-120"/>
+              </a:rPr>
+              <a:t>Love, Compassion, and Truth — why compassion cut loose from truth becomes a weapon, beginning in Eden.</a:t>
+            </a:r>
+            <a:endParaRPr lang="en-US" dirty="0"/>
+          </a:p>
+        </p:txBody>
+      </p:sp>
+      <p:sp>
+        <p:nvSpPr>
+          <p:cNvPr id="6" name="z3"/>
+          <p:cNvSpPr txBox="1"/>
+          <p:nvPr/>
+        </p:nvSpPr>
+        <p:spPr>
+          <a:xfrm>
+            <a:off x="365760" y="3977640"/>
+            <a:ext cx="8412480" cy="1051560"/>
+          </a:xfrm>
+          <a:prstGeom prst="rect">
+            <a:avLst/>
+          </a:prstGeom>
+          <a:noFill/>
+          <a:ln/>
+        </p:spPr>
+        <p:txBody>
+          <a:bodyPr wrap="square" lIns="0" tIns="0" rIns="0" bIns="0" rtlCol="0" anchor="t"/>
+          <a:lstStyle/>
+          <a:p>
+            <a:pPr marL="0" indent="0" algn="l">
               <a:buNone/>
             </a:pPr>
             <a:r>
-              <a:rPr lang="en-US" sz="1550" dirty="0">
+              <a:rPr lang="en-US" b="1" dirty="0">
                 <a:solidFill>
                   <a:srgbClr val="000000"/>
                 </a:solidFill>
@@ -6168,22 +6546,57 @@
                 <a:ea typeface="Arial" pitchFamily="34" charset="-122"/>
                 <a:cs typeface="Arial" pitchFamily="34" charset="-120"/>
               </a:rPr>
-              <a:t>•  1 Corinthians 13  — what does love do with the truth (v.6)? Can love and truth ever be separated?</a:t>
-            </a:r>
-            <a:endParaRPr lang="en-US" sz="1600" dirty="0"/>
-          </a:p>
-        </p:txBody>
-      </p:sp>
-      <p:sp>
-        <p:nvSpPr>
-          <p:cNvPr id="5" name="z2"/>
+              <a:t>Carry this week in one sentence:
+</a:t>
+            </a:r>
+            <a:r>
+              <a:rPr lang="en-US" sz="2000" b="1" i="1" dirty="0">
+                <a:solidFill>
+                  <a:srgbClr val="1F497D"/>
+                </a:solidFill>
+                <a:latin typeface="Arial" pitchFamily="34" charset="0"/>
+                <a:ea typeface="Arial" pitchFamily="34" charset="-122"/>
+                <a:cs typeface="Arial" pitchFamily="34" charset="-120"/>
+              </a:rPr>
+              <a:t>Soft heart, hard questions </a:t>
+            </a:r>
+            <a:r>
+              <a:rPr lang="en-US" sz="2000" b="1" i="1" dirty="0">
+                <a:solidFill>
+                  <a:srgbClr val="1F497D"/>
+                </a:solidFill>
+                <a:latin typeface="Arial" pitchFamily="34" charset="0"/>
+                <a:ea typeface="Arial" pitchFamily="34" charset="-122"/>
+                <a:cs typeface="Arial" pitchFamily="34" charset="-120"/>
+                <a:sym typeface="Wingdings" pitchFamily="2" charset="2"/>
+              </a:rPr>
+              <a:t></a:t>
+            </a:r>
+            <a:r>
+              <a:rPr lang="en-US" sz="2000" b="1" i="1" dirty="0">
+                <a:solidFill>
+                  <a:srgbClr val="1F497D"/>
+                </a:solidFill>
+                <a:latin typeface="Arial" pitchFamily="34" charset="0"/>
+                <a:ea typeface="Arial" pitchFamily="34" charset="-122"/>
+                <a:cs typeface="Arial" pitchFamily="34" charset="-120"/>
+              </a:rPr>
+              <a:t> and daily, because the eye is trained, not downloaded.</a:t>
+            </a:r>
+            <a:endParaRPr lang="en-US" sz="2000" dirty="0"/>
+          </a:p>
+        </p:txBody>
+      </p:sp>
+      <p:sp>
+        <p:nvSpPr>
+          <p:cNvPr id="7" name="z4"/>
           <p:cNvSpPr txBox="1"/>
           <p:nvPr/>
         </p:nvSpPr>
         <p:spPr>
           <a:xfrm>
-            <a:off x="365760" y="2834640"/>
-            <a:ext cx="8412480" cy="914400"/>
+            <a:off x="365760" y="5166360"/>
+            <a:ext cx="8412480" cy="822960"/>
           </a:xfrm>
           <a:prstGeom prst="rect">
             <a:avLst/>
@@ -6195,48 +6608,50 @@
           <a:bodyPr wrap="square" lIns="0" tIns="0" rIns="0" bIns="0" rtlCol="0" anchor="t"/>
           <a:lstStyle/>
           <a:p>
-            <a:pPr algn="l" indent="0" marL="0">
+            <a:pPr marL="0" indent="0" algn="ctr">
               <a:buNone/>
             </a:pPr>
             <a:r>
-              <a:rPr lang="en-US" sz="1600" b="1" dirty="0">
-                <a:solidFill>
-                  <a:srgbClr val="000000"/>
-                </a:solidFill>
-                <a:latin typeface="Arial" pitchFamily="34" charset="0"/>
-                <a:ea typeface="Arial" pitchFamily="34" charset="-122"/>
-                <a:cs typeface="Arial" pitchFamily="34" charset="-120"/>
-              </a:rPr>
-              <a:t>Next week: </a:t>
-            </a:r>
-            <a:pPr algn="l" indent="0" marL="0">
+              <a:rPr lang="en-US" sz="2000" b="1" i="1" dirty="0">
+                <a:solidFill>
+                  <a:srgbClr val="1F497D"/>
+                </a:solidFill>
+                <a:latin typeface="Arial" pitchFamily="34" charset="0"/>
+                <a:ea typeface="Arial" pitchFamily="34" charset="-122"/>
+                <a:cs typeface="Arial" pitchFamily="34" charset="-120"/>
+              </a:rPr>
+              <a:t>“Examine all things; hold fast to what is good.”  </a:t>
+            </a:r>
+          </a:p>
+          <a:p>
+            <a:pPr marL="0" indent="0" algn="ctr">
               <a:buNone/>
             </a:pPr>
             <a:r>
-              <a:rPr lang="en-US" sz="1600" i="1" dirty="0">
-                <a:solidFill>
-                  <a:srgbClr val="000000"/>
-                </a:solidFill>
-                <a:latin typeface="Arial" pitchFamily="34" charset="0"/>
-                <a:ea typeface="Arial" pitchFamily="34" charset="-122"/>
-                <a:cs typeface="Arial" pitchFamily="34" charset="-120"/>
-              </a:rPr>
-              <a:t>Love, Compassion, and Truth — why compassion cut loose from truth becomes a weapon, beginning in Eden.</a:t>
-            </a:r>
-            <a:endParaRPr lang="en-US" sz="1600" dirty="0"/>
-          </a:p>
-        </p:txBody>
-      </p:sp>
-      <p:sp>
-        <p:nvSpPr>
-          <p:cNvPr id="6" name="z3"/>
+              <a:rPr lang="en-US" sz="2000" b="1" i="1" dirty="0">
+                <a:solidFill>
+                  <a:srgbClr val="1F497D"/>
+                </a:solidFill>
+                <a:latin typeface="Arial" pitchFamily="34" charset="0"/>
+                <a:ea typeface="Arial" pitchFamily="34" charset="-122"/>
+                <a:cs typeface="Arial" pitchFamily="34" charset="-120"/>
+              </a:rPr>
+              <a:t>(1 Thessalonians 5:21)</a:t>
+            </a:r>
+            <a:endParaRPr lang="en-US" dirty="0"/>
+          </a:p>
+        </p:txBody>
+      </p:sp>
+      <p:sp>
+        <p:nvSpPr>
+          <p:cNvPr id="8" name="z5"/>
           <p:cNvSpPr txBox="1"/>
           <p:nvPr/>
         </p:nvSpPr>
         <p:spPr>
           <a:xfrm>
-            <a:off x="365760" y="3977640"/>
-            <a:ext cx="8412480" cy="1051560"/>
+            <a:off x="365760" y="6035040"/>
+            <a:ext cx="8412480" cy="365760"/>
           </a:xfrm>
           <a:prstGeom prst="rect">
             <a:avLst/>
@@ -6248,103 +6663,10 @@
           <a:bodyPr wrap="square" lIns="0" tIns="0" rIns="0" bIns="0" rtlCol="0" anchor="t"/>
           <a:lstStyle/>
           <a:p>
-            <a:pPr algn="l" indent="0" marL="0">
+            <a:pPr marL="0" indent="0" algn="ctr">
               <a:buNone/>
             </a:pPr>
             <a:r>
-              <a:rPr lang="en-US" sz="1500" b="1" dirty="0">
-                <a:solidFill>
-                  <a:srgbClr val="000000"/>
-                </a:solidFill>
-                <a:latin typeface="Arial" pitchFamily="34" charset="0"/>
-                <a:ea typeface="Arial" pitchFamily="34" charset="-122"/>
-                <a:cs typeface="Arial" pitchFamily="34" charset="-120"/>
-              </a:rPr>
-              <a:t>Carry this week in one sentence:
-</a:t>
-            </a:r>
-            <a:pPr algn="l" indent="0" marL="0">
-              <a:buNone/>
-            </a:pPr>
-            <a:r>
-              <a:rPr lang="en-US" sz="1650" b="1" i="1" dirty="0">
-                <a:solidFill>
-                  <a:srgbClr val="1F497D"/>
-                </a:solidFill>
-                <a:latin typeface="Arial" pitchFamily="34" charset="0"/>
-                <a:ea typeface="Arial" pitchFamily="34" charset="-122"/>
-                <a:cs typeface="Arial" pitchFamily="34" charset="-120"/>
-              </a:rPr>
-              <a:t>Soft heart, hard questions — and daily, because the eye is trained, not downloaded.</a:t>
-            </a:r>
-            <a:endParaRPr lang="en-US" sz="1600" dirty="0"/>
-          </a:p>
-        </p:txBody>
-      </p:sp>
-      <p:sp>
-        <p:nvSpPr>
-          <p:cNvPr id="7" name="z4"/>
-          <p:cNvSpPr txBox="1"/>
-          <p:nvPr/>
-        </p:nvSpPr>
-        <p:spPr>
-          <a:xfrm>
-            <a:off x="365760" y="5166360"/>
-            <a:ext cx="8412480" cy="822960"/>
-          </a:xfrm>
-          <a:prstGeom prst="rect">
-            <a:avLst/>
-          </a:prstGeom>
-          <a:noFill/>
-          <a:ln/>
-        </p:spPr>
-        <p:txBody>
-          <a:bodyPr wrap="square" lIns="0" tIns="0" rIns="0" bIns="0" rtlCol="0" anchor="t"/>
-          <a:lstStyle/>
-          <a:p>
-            <a:pPr algn="ctr" indent="0" marL="0">
-              <a:buNone/>
-            </a:pPr>
-            <a:r>
-              <a:rPr lang="en-US" sz="1800" b="1" i="1" dirty="0">
-                <a:solidFill>
-                  <a:srgbClr val="1F497D"/>
-                </a:solidFill>
-                <a:latin typeface="Arial" pitchFamily="34" charset="0"/>
-                <a:ea typeface="Arial" pitchFamily="34" charset="-122"/>
-                <a:cs typeface="Arial" pitchFamily="34" charset="-120"/>
-              </a:rPr>
-              <a:t>“Examine all things; hold fast to what is good.”  (1 Thessalonians 5:21)</a:t>
-            </a:r>
-            <a:endParaRPr lang="en-US" sz="1600" dirty="0"/>
-          </a:p>
-        </p:txBody>
-      </p:sp>
-      <p:sp>
-        <p:nvSpPr>
-          <p:cNvPr id="8" name="z5"/>
-          <p:cNvSpPr txBox="1"/>
-          <p:nvPr/>
-        </p:nvSpPr>
-        <p:spPr>
-          <a:xfrm>
-            <a:off x="365760" y="6035040"/>
-            <a:ext cx="8412480" cy="365760"/>
-          </a:xfrm>
-          <a:prstGeom prst="rect">
-            <a:avLst/>
-          </a:prstGeom>
-          <a:noFill/>
-          <a:ln/>
-        </p:spPr>
-        <p:txBody>
-          <a:bodyPr wrap="square" lIns="0" tIns="0" rIns="0" bIns="0" rtlCol="0" anchor="t"/>
-          <a:lstStyle/>
-          <a:p>
-            <a:pPr algn="ctr" indent="0" marL="0">
-              <a:buNone/>
-            </a:pPr>
-            <a:r>
               <a:rPr lang="en-US" sz="1300" b="1" u="sng" dirty="0">
                 <a:solidFill>
                   <a:srgbClr val="4F81BD"/>
@@ -6352,7 +6674,7 @@
                 <a:latin typeface="Arial" pitchFamily="34" charset="0"/>
                 <a:ea typeface="Arial" pitchFamily="34" charset="-122"/>
                 <a:cs typeface="Arial" pitchFamily="34" charset="-120"/>
-                <a:hlinkClick r:id="rId1" invalidUrl="" action="" tgtFrame="" tooltip="" history="1" highlightClick="0" endSnd="0">
+                <a:hlinkClick r:id="rId3">
                   <a:extLst>
                     <a:ext uri="{A12FA001-AC4F-418D-AE19-62706E023703}">
                       <ahyp:hlinkClr xmlns:ahyp="http://schemas.microsoft.com/office/drawing/2018/hyperlinkcolor" val="tx"/>
@@ -6360,7 +6682,36 @@
                   </a:extLst>
                 </a:hlinkClick>
               </a:rPr>
-              <a:t>https://tinyurl.com/TeachTheWord</a:t>
+              <a:t>https://</a:t>
+            </a:r>
+            <a:r>
+              <a:rPr lang="en-US" sz="1300" b="1" u="sng">
+                <a:solidFill>
+                  <a:srgbClr val="4F81BD"/>
+                </a:solidFill>
+                <a:latin typeface="Arial" pitchFamily="34" charset="0"/>
+                <a:ea typeface="Arial" pitchFamily="34" charset="-122"/>
+                <a:cs typeface="Arial" pitchFamily="34" charset="-120"/>
+                <a:hlinkClick r:id="rId3">
+                  <a:extLst>
+                    <a:ext uri="{A12FA001-AC4F-418D-AE19-62706E023703}">
+                      <ahyp:hlinkClr xmlns:ahyp="http://schemas.microsoft.com/office/drawing/2018/hyperlinkcolor" val="tx"/>
+                    </a:ext>
+                  </a:extLst>
+                </a:hlinkClick>
+              </a:rPr>
+              <a:t>TeachTheWord</a:t>
+            </a:r>
+            <a:r>
+              <a:rPr lang="en-US" sz="1300" b="1" u="sng">
+                <a:solidFill>
+                  <a:srgbClr val="4F81BD"/>
+                </a:solidFill>
+                <a:latin typeface="Arial" pitchFamily="34" charset="0"/>
+                <a:ea typeface="Arial" pitchFamily="34" charset="-122"/>
+                <a:cs typeface="Arial" pitchFamily="34" charset="-120"/>
+              </a:rPr>
+              <a:t>.Church</a:t>
             </a:r>
             <a:endParaRPr lang="en-US" sz="1600" dirty="0"/>
           </a:p>
@@ -6380,26 +6731,26 @@
               <p:cTn id="2" dur="indefinite" nodeType="mainSeq">
                 <p:childTnLst>
                   <p:par>
-                    <p:cTn id="7" fill="hold">
+                    <p:cTn id="3" fill="hold">
                       <p:stCondLst>
                         <p:cond delay="indefinite"/>
                       </p:stCondLst>
                       <p:childTnLst>
                         <p:par>
-                          <p:cTn id="8" fill="hold">
+                          <p:cTn id="4" fill="hold">
                             <p:stCondLst>
                               <p:cond delay="0"/>
                             </p:stCondLst>
                             <p:childTnLst>
                               <p:par>
-                                <p:cTn id="3" presetID="42" presetClass="entr" presetSubtype="0" fill="hold" grpId="0" nodeType="clickEffect">
+                                <p:cTn id="5" presetID="42" presetClass="entr" presetSubtype="0" fill="hold" nodeType="clickEffect">
                                   <p:stCondLst>
                                     <p:cond delay="0"/>
                                   </p:stCondLst>
                                   <p:childTnLst>
                                     <p:set>
                                       <p:cBhvr>
-                                        <p:cTn id="4" dur="1" fill="hold">
+                                        <p:cTn id="6" dur="1" fill="hold">
                                           <p:stCondLst>
                                             <p:cond delay="0"/>
                                           </p:stCondLst>
@@ -6417,7 +6768,7 @@
                                     </p:set>
                                     <p:animEffect transition="in" filter="fade">
                                       <p:cBhvr>
-                                        <p:cTn id="5" dur="1000"/>
+                                        <p:cTn id="7" dur="1000"/>
                                         <p:tgtEl>
                                           <p:spTgt spid="4"/>
                                         </p:tgtEl>
@@ -6425,7 +6776,7 @@
                                     </p:animEffect>
                                     <p:anim calcmode="lin" valueType="num">
                                       <p:cBhvr>
-                                        <p:cTn id="6" dur="1000" fill="hold"/>
+                                        <p:cTn id="8" dur="1000" fill="hold"/>
                                         <p:tgtEl>
                                           <p:spTgt spid="4"/>
                                         </p:tgtEl>
@@ -6456,26 +6807,26 @@
                     </p:cTn>
                   </p:par>
                   <p:par>
-                    <p:cTn id="13" fill="hold">
+                    <p:cTn id="9" fill="hold">
                       <p:stCondLst>
                         <p:cond delay="indefinite"/>
                       </p:stCondLst>
                       <p:childTnLst>
                         <p:par>
-                          <p:cTn id="14" fill="hold">
+                          <p:cTn id="10" fill="hold">
                             <p:stCondLst>
                               <p:cond delay="0"/>
                             </p:stCondLst>
                             <p:childTnLst>
                               <p:par>
-                                <p:cTn id="9" presetID="42" presetClass="entr" presetSubtype="0" fill="hold" grpId="0" nodeType="clickEffect">
+                                <p:cTn id="11" presetID="42" presetClass="entr" presetSubtype="0" fill="hold" nodeType="clickEffect">
                                   <p:stCondLst>
                                     <p:cond delay="0"/>
                                   </p:stCondLst>
                                   <p:childTnLst>
                                     <p:set>
                                       <p:cBhvr>
-                                        <p:cTn id="10" dur="1" fill="hold">
+                                        <p:cTn id="12" dur="1" fill="hold">
                                           <p:stCondLst>
                                             <p:cond delay="0"/>
                                           </p:stCondLst>
@@ -6493,7 +6844,7 @@
                                     </p:set>
                                     <p:animEffect transition="in" filter="fade">
                                       <p:cBhvr>
-                                        <p:cTn id="11" dur="1000"/>
+                                        <p:cTn id="13" dur="1000"/>
                                         <p:tgtEl>
                                           <p:spTgt spid="5"/>
                                         </p:tgtEl>
@@ -6501,7 +6852,7 @@
                                     </p:animEffect>
                                     <p:anim calcmode="lin" valueType="num">
                                       <p:cBhvr>
-                                        <p:cTn id="12" dur="1000" fill="hold"/>
+                                        <p:cTn id="14" dur="1000" fill="hold"/>
                                         <p:tgtEl>
                                           <p:spTgt spid="5"/>
                                         </p:tgtEl>
@@ -6532,26 +6883,26 @@
                     </p:cTn>
                   </p:par>
                   <p:par>
-                    <p:cTn id="19" fill="hold">
+                    <p:cTn id="15" fill="hold">
                       <p:stCondLst>
                         <p:cond delay="indefinite"/>
                       </p:stCondLst>
                       <p:childTnLst>
                         <p:par>
-                          <p:cTn id="20" fill="hold">
+                          <p:cTn id="16" fill="hold">
                             <p:stCondLst>
                               <p:cond delay="0"/>
                             </p:stCondLst>
                             <p:childTnLst>
                               <p:par>
-                                <p:cTn id="15" presetID="42" presetClass="entr" presetSubtype="0" fill="hold" grpId="0" nodeType="clickEffect">
+                                <p:cTn id="17" presetID="42" presetClass="entr" presetSubtype="0" fill="hold" nodeType="clickEffect">
                                   <p:stCondLst>
                                     <p:cond delay="0"/>
                                   </p:stCondLst>
                                   <p:childTnLst>
                                     <p:set>
                                       <p:cBhvr>
-                                        <p:cTn id="16" dur="1" fill="hold">
+                                        <p:cTn id="18" dur="1" fill="hold">
                                           <p:stCondLst>
                                             <p:cond delay="0"/>
                                           </p:stCondLst>
@@ -6569,7 +6920,7 @@
                                     </p:set>
                                     <p:animEffect transition="in" filter="fade">
                                       <p:cBhvr>
-                                        <p:cTn id="17" dur="1000"/>
+                                        <p:cTn id="19" dur="1000"/>
                                         <p:tgtEl>
                                           <p:spTgt spid="6"/>
                                         </p:tgtEl>
@@ -6577,7 +6928,7 @@
                                     </p:animEffect>
                                     <p:anim calcmode="lin" valueType="num">
                                       <p:cBhvr>
-                                        <p:cTn id="18" dur="1000" fill="hold"/>
+                                        <p:cTn id="20" dur="1000" fill="hold"/>
                                         <p:tgtEl>
                                           <p:spTgt spid="6"/>
                                         </p:tgtEl>
@@ -6608,26 +6959,26 @@
                     </p:cTn>
                   </p:par>
                   <p:par>
-                    <p:cTn id="25" fill="hold">
+                    <p:cTn id="21" fill="hold">
                       <p:stCondLst>
                         <p:cond delay="indefinite"/>
                       </p:stCondLst>
                       <p:childTnLst>
                         <p:par>
-                          <p:cTn id="26" fill="hold">
+                          <p:cTn id="22" fill="hold">
                             <p:stCondLst>
                               <p:cond delay="0"/>
                             </p:stCondLst>
                             <p:childTnLst>
                               <p:par>
-                                <p:cTn id="21" presetID="42" presetClass="entr" presetSubtype="0" fill="hold" grpId="0" nodeType="clickEffect">
+                                <p:cTn id="23" presetID="42" presetClass="entr" presetSubtype="0" fill="hold" nodeType="clickEffect">
                                   <p:stCondLst>
                                     <p:cond delay="0"/>
                                   </p:stCondLst>
                                   <p:childTnLst>
                                     <p:set>
                                       <p:cBhvr>
-                                        <p:cTn id="22" dur="1" fill="hold">
+                                        <p:cTn id="24" dur="1" fill="hold">
                                           <p:stCondLst>
                                             <p:cond delay="0"/>
                                           </p:stCondLst>
@@ -6645,7 +6996,7 @@
                                     </p:set>
                                     <p:animEffect transition="in" filter="fade">
                                       <p:cBhvr>
-                                        <p:cTn id="23" dur="1000"/>
+                                        <p:cTn id="25" dur="1000"/>
                                         <p:tgtEl>
                                           <p:spTgt spid="7"/>
                                         </p:tgtEl>
@@ -6653,7 +7004,7 @@
                                     </p:animEffect>
                                     <p:anim calcmode="lin" valueType="num">
                                       <p:cBhvr>
-                                        <p:cTn id="24" dur="1000" fill="hold"/>
+                                        <p:cTn id="26" dur="1000" fill="hold"/>
                                         <p:tgtEl>
                                           <p:spTgt spid="7"/>
                                         </p:tgtEl>
@@ -7001,4 +7352,319 @@
     </a:ext>
   </a:extLst>
 </a:theme>
+</file>
+
+<file path=ppt/theme/theme2.xml><?xml version="1.0" encoding="utf-8"?>
+<a:theme xmlns:a="http://schemas.openxmlformats.org/drawingml/2006/main" name="Office Theme">
+  <a:themeElements>
+    <a:clrScheme name="Office">
+      <a:dk1>
+        <a:sysClr val="windowText" lastClr="000000"/>
+      </a:dk1>
+      <a:lt1>
+        <a:sysClr val="window" lastClr="FFFFFF"/>
+      </a:lt1>
+      <a:dk2>
+        <a:srgbClr val="0E2841"/>
+      </a:dk2>
+      <a:lt2>
+        <a:srgbClr val="E8E8E8"/>
+      </a:lt2>
+      <a:accent1>
+        <a:srgbClr val="156082"/>
+      </a:accent1>
+      <a:accent2>
+        <a:srgbClr val="E97132"/>
+      </a:accent2>
+      <a:accent3>
+        <a:srgbClr val="196B24"/>
+      </a:accent3>
+      <a:accent4>
+        <a:srgbClr val="0F9ED5"/>
+      </a:accent4>
+      <a:accent5>
+        <a:srgbClr val="A02B93"/>
+      </a:accent5>
+      <a:accent6>
+        <a:srgbClr val="4EA72E"/>
+      </a:accent6>
+      <a:hlink>
+        <a:srgbClr val="467886"/>
+      </a:hlink>
+      <a:folHlink>
+        <a:srgbClr val="96607D"/>
+      </a:folHlink>
+    </a:clrScheme>
+    <a:fontScheme name="Office">
+      <a:majorFont>
+        <a:latin typeface="Aptos Display" panose="02110004020202020204"/>
+        <a:ea typeface=""/>
+        <a:cs typeface=""/>
+        <a:font script="Jpan" typeface="游ゴシック Light"/>
+        <a:font script="Hang" typeface="맑은 고딕"/>
+        <a:font script="Hans" typeface="等线 Light"/>
+        <a:font script="Hant" typeface="新細明體"/>
+        <a:font script="Arab" typeface="Times New Roman"/>
+        <a:font script="Hebr" typeface="Times New Roman"/>
+        <a:font script="Thai" typeface="Angsana New"/>
+        <a:font script="Ethi" typeface="Nyala"/>
+        <a:font script="Beng" typeface="Vrinda"/>
+        <a:font script="Gujr" typeface="Shruti"/>
+        <a:font script="Khmr" typeface="MoolBoran"/>
+        <a:font script="Knda" typeface="Tunga"/>
+        <a:font script="Guru" typeface="Raavi"/>
+        <a:font script="Cans" typeface="Euphemia"/>
+        <a:font script="Cher" typeface="Plantagenet Cherokee"/>
+        <a:font script="Yiii" typeface="Microsoft Yi Baiti"/>
+        <a:font script="Tibt" typeface="Microsoft Himalaya"/>
+        <a:font script="Thaa" typeface="MV Boli"/>
+        <a:font script="Deva" typeface="Mangal"/>
+        <a:font script="Telu" typeface="Gautami"/>
+        <a:font script="Taml" typeface="Latha"/>
+        <a:font script="Syrc" typeface="Estrangelo Edessa"/>
+        <a:font script="Orya" typeface="Kalinga"/>
+        <a:font script="Mlym" typeface="Kartika"/>
+        <a:font script="Laoo" typeface="DokChampa"/>
+        <a:font script="Sinh" typeface="Iskoola Pota"/>
+        <a:font script="Mong" typeface="Mongolian Baiti"/>
+        <a:font script="Viet" typeface="Times New Roman"/>
+        <a:font script="Uigh" typeface="Microsoft Uighur"/>
+        <a:font script="Geor" typeface="Sylfaen"/>
+        <a:font script="Armn" typeface="Arial"/>
+        <a:font script="Bugi" typeface="Leelawadee UI"/>
+        <a:font script="Bopo" typeface="Microsoft JhengHei"/>
+        <a:font script="Java" typeface="Javanese Text"/>
+        <a:font script="Lisu" typeface="Segoe UI"/>
+        <a:font script="Mymr" typeface="Myanmar Text"/>
+        <a:font script="Nkoo" typeface="Ebrima"/>
+        <a:font script="Olck" typeface="Nirmala UI"/>
+        <a:font script="Osma" typeface="Ebrima"/>
+        <a:font script="Phag" typeface="Phagspa"/>
+        <a:font script="Syrn" typeface="Estrangelo Edessa"/>
+        <a:font script="Syrj" typeface="Estrangelo Edessa"/>
+        <a:font script="Syre" typeface="Estrangelo Edessa"/>
+        <a:font script="Sora" typeface="Nirmala UI"/>
+        <a:font script="Tale" typeface="Microsoft Tai Le"/>
+        <a:font script="Talu" typeface="Microsoft New Tai Lue"/>
+        <a:font script="Tfng" typeface="Ebrima"/>
+      </a:majorFont>
+      <a:minorFont>
+        <a:latin typeface="Aptos" panose="02110004020202020204"/>
+        <a:ea typeface=""/>
+        <a:cs typeface=""/>
+        <a:font script="Jpan" typeface="游ゴシック"/>
+        <a:font script="Hang" typeface="맑은 고딕"/>
+        <a:font script="Hans" typeface="等线"/>
+        <a:font script="Hant" typeface="新細明體"/>
+        <a:font script="Arab" typeface="Arial"/>
+        <a:font script="Hebr" typeface="Arial"/>
+        <a:font script="Thai" typeface="Cordia New"/>
+        <a:font script="Ethi" typeface="Nyala"/>
+        <a:font script="Beng" typeface="Vrinda"/>
+        <a:font script="Gujr" typeface="Shruti"/>
+        <a:font script="Khmr" typeface="DaunPenh"/>
+        <a:font script="Knda" typeface="Tunga"/>
+        <a:font script="Guru" typeface="Raavi"/>
+        <a:font script="Cans" typeface="Euphemia"/>
+        <a:font script="Cher" typeface="Plantagenet Cherokee"/>
+        <a:font script="Yiii" typeface="Microsoft Yi Baiti"/>
+        <a:font script="Tibt" typeface="Microsoft Himalaya"/>
+        <a:font script="Thaa" typeface="MV Boli"/>
+        <a:font script="Deva" typeface="Mangal"/>
+        <a:font script="Telu" typeface="Gautami"/>
+        <a:font script="Taml" typeface="Latha"/>
+        <a:font script="Syrc" typeface="Estrangelo Edessa"/>
+        <a:font script="Orya" typeface="Kalinga"/>
+        <a:font script="Mlym" typeface="Kartika"/>
+        <a:font script="Laoo" typeface="DokChampa"/>
+        <a:font script="Sinh" typeface="Iskoola Pota"/>
+        <a:font script="Mong" typeface="Mongolian Baiti"/>
+        <a:font script="Viet" typeface="Arial"/>
+        <a:font script="Uigh" typeface="Microsoft Uighur"/>
+        <a:font script="Geor" typeface="Sylfaen"/>
+        <a:font script="Armn" typeface="Arial"/>
+        <a:font script="Bugi" typeface="Leelawadee UI"/>
+        <a:font script="Bopo" typeface="Microsoft JhengHei"/>
+        <a:font script="Java" typeface="Javanese Text"/>
+        <a:font script="Lisu" typeface="Segoe UI"/>
+        <a:font script="Mymr" typeface="Myanmar Text"/>
+        <a:font script="Nkoo" typeface="Ebrima"/>
+        <a:font script="Olck" typeface="Nirmala UI"/>
+        <a:font script="Osma" typeface="Ebrima"/>
+        <a:font script="Phag" typeface="Phagspa"/>
+        <a:font script="Syrn" typeface="Estrangelo Edessa"/>
+        <a:font script="Syrj" typeface="Estrangelo Edessa"/>
+        <a:font script="Syre" typeface="Estrangelo Edessa"/>
+        <a:font script="Sora" typeface="Nirmala UI"/>
+        <a:font script="Tale" typeface="Microsoft Tai Le"/>
+        <a:font script="Talu" typeface="Microsoft New Tai Lue"/>
+        <a:font script="Tfng" typeface="Ebrima"/>
+      </a:minorFont>
+    </a:fontScheme>
+    <a:fmtScheme name="Office">
+      <a:fillStyleLst>
+        <a:solidFill>
+          <a:schemeClr val="phClr"/>
+        </a:solidFill>
+        <a:gradFill rotWithShape="1">
+          <a:gsLst>
+            <a:gs pos="0">
+              <a:schemeClr val="phClr">
+                <a:lumMod val="110000"/>
+                <a:satMod val="105000"/>
+                <a:tint val="67000"/>
+              </a:schemeClr>
+            </a:gs>
+            <a:gs pos="50000">
+              <a:schemeClr val="phClr">
+                <a:lumMod val="105000"/>
+                <a:satMod val="103000"/>
+                <a:tint val="73000"/>
+              </a:schemeClr>
+            </a:gs>
+            <a:gs pos="100000">
+              <a:schemeClr val="phClr">
+                <a:lumMod val="105000"/>
+                <a:satMod val="109000"/>
+                <a:tint val="81000"/>
+              </a:schemeClr>
+            </a:gs>
+          </a:gsLst>
+          <a:lin ang="5400000" scaled="0"/>
+        </a:gradFill>
+        <a:gradFill rotWithShape="1">
+          <a:gsLst>
+            <a:gs pos="0">
+              <a:schemeClr val="phClr">
+                <a:satMod val="103000"/>
+                <a:lumMod val="102000"/>
+                <a:tint val="94000"/>
+              </a:schemeClr>
+            </a:gs>
+            <a:gs pos="50000">
+              <a:schemeClr val="phClr">
+                <a:satMod val="110000"/>
+                <a:lumMod val="100000"/>
+                <a:shade val="100000"/>
+              </a:schemeClr>
+            </a:gs>
+            <a:gs pos="100000">
+              <a:schemeClr val="phClr">
+                <a:lumMod val="99000"/>
+                <a:satMod val="120000"/>
+                <a:shade val="78000"/>
+              </a:schemeClr>
+            </a:gs>
+          </a:gsLst>
+          <a:lin ang="5400000" scaled="0"/>
+        </a:gradFill>
+      </a:fillStyleLst>
+      <a:lnStyleLst>
+        <a:ln w="12700" cap="flat" cmpd="sng" algn="ctr">
+          <a:solidFill>
+            <a:schemeClr val="phClr"/>
+          </a:solidFill>
+          <a:prstDash val="solid"/>
+          <a:miter lim="800000"/>
+        </a:ln>
+        <a:ln w="19050" cap="flat" cmpd="sng" algn="ctr">
+          <a:solidFill>
+            <a:schemeClr val="phClr"/>
+          </a:solidFill>
+          <a:prstDash val="solid"/>
+          <a:miter lim="800000"/>
+        </a:ln>
+        <a:ln w="25400" cap="flat" cmpd="sng" algn="ctr">
+          <a:solidFill>
+            <a:schemeClr val="phClr"/>
+          </a:solidFill>
+          <a:prstDash val="solid"/>
+          <a:miter lim="800000"/>
+        </a:ln>
+      </a:lnStyleLst>
+      <a:effectStyleLst>
+        <a:effectStyle>
+          <a:effectLst/>
+        </a:effectStyle>
+        <a:effectStyle>
+          <a:effectLst/>
+        </a:effectStyle>
+        <a:effectStyle>
+          <a:effectLst>
+            <a:outerShdw blurRad="57150" dist="19050" dir="5400000" algn="ctr" rotWithShape="0">
+              <a:srgbClr val="000000">
+                <a:alpha val="63000"/>
+              </a:srgbClr>
+            </a:outerShdw>
+          </a:effectLst>
+        </a:effectStyle>
+      </a:effectStyleLst>
+      <a:bgFillStyleLst>
+        <a:solidFill>
+          <a:schemeClr val="phClr"/>
+        </a:solidFill>
+        <a:solidFill>
+          <a:schemeClr val="phClr">
+            <a:tint val="95000"/>
+            <a:satMod val="170000"/>
+          </a:schemeClr>
+        </a:solidFill>
+        <a:gradFill rotWithShape="1">
+          <a:gsLst>
+            <a:gs pos="0">
+              <a:schemeClr val="phClr">
+                <a:tint val="93000"/>
+                <a:satMod val="150000"/>
+                <a:shade val="98000"/>
+                <a:lumMod val="102000"/>
+              </a:schemeClr>
+            </a:gs>
+            <a:gs pos="50000">
+              <a:schemeClr val="phClr">
+                <a:tint val="98000"/>
+                <a:satMod val="130000"/>
+                <a:shade val="90000"/>
+                <a:lumMod val="103000"/>
+              </a:schemeClr>
+            </a:gs>
+            <a:gs pos="100000">
+              <a:schemeClr val="phClr">
+                <a:shade val="63000"/>
+                <a:satMod val="120000"/>
+              </a:schemeClr>
+            </a:gs>
+          </a:gsLst>
+          <a:lin ang="5400000" scaled="0"/>
+        </a:gradFill>
+      </a:bgFillStyleLst>
+    </a:fmtScheme>
+  </a:themeElements>
+  <a:objectDefaults>
+    <a:lnDef>
+      <a:spPr/>
+      <a:bodyPr/>
+      <a:lstStyle/>
+      <a:style>
+        <a:lnRef idx="2">
+          <a:schemeClr val="accent1"/>
+        </a:lnRef>
+        <a:fillRef idx="0">
+          <a:schemeClr val="accent1"/>
+        </a:fillRef>
+        <a:effectRef idx="1">
+          <a:schemeClr val="accent1"/>
+        </a:effectRef>
+        <a:fontRef idx="minor">
+          <a:schemeClr val="tx1"/>
+        </a:fontRef>
+      </a:style>
+    </a:lnDef>
+  </a:objectDefaults>
+  <a:extraClrSchemeLst/>
+  <a:extLst>
+    <a:ext uri="{05A4C25C-085E-4340-85A3-A5531E510DB2}">
+      <thm15:themeFamily xmlns:thm15="http://schemas.microsoft.com/office/thememl/2012/main" name="Office Theme" id="{2E142A2C-CD16-42D6-873A-C26D2A0506FA}" vid="{1BDDFF52-6CD6-40A5-AB3C-68EB2F1E4D0A}"/>
+    </a:ext>
+  </a:extLst>
+</a:theme>
 </file>
--- a/2026-Q4/05-TheBereanMethod/Week05-TheBereanMethod.pptx
+++ b/2026-Q4/05-TheBereanMethod/Week05-TheBereanMethod.pptx
@@ -5802,7 +5802,30 @@
                 <a:ea typeface="Arial" pitchFamily="34" charset="-122"/>
                 <a:cs typeface="Arial" pitchFamily="34" charset="-120"/>
               </a:rPr>
-              <a:t>Ten minutes — this is the week’s practice</a:t>
+              <a:t>Ten minutes </a:t>
+            </a:r>
+            <a:r>
+              <a:rPr lang="en-US" sz="2000" b="1" dirty="0">
+                <a:solidFill>
+                  <a:srgbClr val="4F81BD"/>
+                </a:solidFill>
+                <a:latin typeface="Arial" pitchFamily="34" charset="0"/>
+                <a:ea typeface="Arial" pitchFamily="34" charset="-122"/>
+                <a:cs typeface="Arial" pitchFamily="34" charset="-120"/>
+                <a:sym typeface="Wingdings" pitchFamily="2" charset="2"/>
+              </a:rPr>
+              <a:t></a:t>
+            </a:r>
+            <a:r>
+              <a:rPr lang="en-US" sz="2000" b="1" dirty="0">
+                <a:solidFill>
+                  <a:srgbClr val="4F81BD"/>
+                </a:solidFill>
+                <a:latin typeface="Arial" pitchFamily="34" charset="0"/>
+                <a:ea typeface="Arial" pitchFamily="34" charset="-122"/>
+                <a:cs typeface="Arial" pitchFamily="34" charset="-120"/>
+              </a:rPr>
+              <a:t> this is the week’s practice</a:t>
             </a:r>
             <a:endParaRPr lang="en-US" sz="2800" dirty="0"/>
           </a:p>
